--- a/presentations/COES_2025.pptx
+++ b/presentations/COES_2025.pptx
@@ -5,7 +5,7 @@
     <p:sldMasterId id="2147483659" r:id="rId1"/>
   </p:sldMasterIdLst>
   <p:notesMasterIdLst>
-    <p:notesMasterId r:id="rId30"/>
+    <p:notesMasterId r:id="rId34"/>
   </p:notesMasterIdLst>
   <p:sldIdLst>
     <p:sldId id="256" r:id="rId2"/>
@@ -36,6 +36,10 @@
     <p:sldId id="276" r:id="rId27"/>
     <p:sldId id="257" r:id="rId28"/>
     <p:sldId id="258" r:id="rId29"/>
+    <p:sldId id="327" r:id="rId30"/>
+    <p:sldId id="330" r:id="rId31"/>
+    <p:sldId id="328" r:id="rId32"/>
+    <p:sldId id="329" r:id="rId33"/>
   </p:sldIdLst>
   <p:sldSz cx="9144000" cy="5143500" type="screen16x9"/>
   <p:notesSz cx="6858000" cy="9144000"/>
@@ -299,8 +303,16 @@
             <p14:sldId id="324"/>
             <p14:sldId id="325"/>
             <p14:sldId id="276"/>
+          </p14:sldIdLst>
+        </p14:section>
+        <p14:section name="Untitled Section" id="{5F83A641-8CD7-4938-A646-0232E8ED99EF}">
+          <p14:sldIdLst>
             <p14:sldId id="257"/>
             <p14:sldId id="258"/>
+            <p14:sldId id="327"/>
+            <p14:sldId id="330"/>
+            <p14:sldId id="328"/>
+            <p14:sldId id="329"/>
           </p14:sldIdLst>
         </p14:section>
       </p14:sectionLst>
@@ -326,7 +338,7 @@
 <file path=ppt/revisionInfo.xml><?xml version="1.0" encoding="utf-8"?>
 <p1510:revInfo xmlns:a="http://schemas.openxmlformats.org/drawingml/2006/main" xmlns:r="http://schemas.openxmlformats.org/officeDocument/2006/relationships" xmlns:p1510="http://schemas.microsoft.com/office/powerpoint/2015/10/main">
   <p1510:revLst>
-    <p1510:client id="{C9D81053-A4BA-4367-A853-4DE9199D8B26}" v="7" dt="2025-12-10T18:50:05.153"/>
+    <p1510:client id="{3B899E20-C7CF-489E-8AD5-A18B6C970CAE}" v="31" dt="2026-04-06T23:00:37.499"/>
   </p1510:revLst>
 </p1510:revInfo>
 </file>
@@ -335,350 +347,572 @@
 <pc:chgInfo xmlns:a="http://schemas.openxmlformats.org/drawingml/2006/main" xmlns:r="http://schemas.openxmlformats.org/officeDocument/2006/relationships" xmlns:ac="http://schemas.microsoft.com/office/drawing/2013/main/command" xmlns:pc="http://schemas.microsoft.com/office/powerpoint/2013/main/command">
   <pc:docChgLst>
     <pc:chgData name="Julio César Iturra Sanhueza" userId="e2de3052-3501-452a-9806-eb4e3c41687c" providerId="ADAL" clId="{9573727F-4811-45D9-A52A-5B3A3BCA0CD9}"/>
-    <pc:docChg chg="undo custSel addSld delSld modSld sldOrd modSection">
-      <pc:chgData name="Julio César Iturra Sanhueza" userId="e2de3052-3501-452a-9806-eb4e3c41687c" providerId="ADAL" clId="{9573727F-4811-45D9-A52A-5B3A3BCA0CD9}" dt="2025-12-10T18:50:17.149" v="104" actId="478"/>
+    <pc:docChg chg="undo custSel addSld delSld modSld sldOrd addSection modSection">
+      <pc:chgData name="Julio César Iturra Sanhueza" userId="e2de3052-3501-452a-9806-eb4e3c41687c" providerId="ADAL" clId="{9573727F-4811-45D9-A52A-5B3A3BCA0CD9}" dt="2026-04-07T05:53:24.540" v="2241" actId="20577"/>
       <pc:docMkLst>
         <pc:docMk/>
       </pc:docMkLst>
-      <pc:sldChg chg="modSp mod">
-        <pc:chgData name="Julio César Iturra Sanhueza" userId="e2de3052-3501-452a-9806-eb4e3c41687c" providerId="ADAL" clId="{9573727F-4811-45D9-A52A-5B3A3BCA0CD9}" dt="2025-12-10T18:47:19.319" v="3" actId="27636"/>
+      <pc:sldChg chg="delSp modSp mod">
+        <pc:chgData name="Julio César Iturra Sanhueza" userId="e2de3052-3501-452a-9806-eb4e3c41687c" providerId="ADAL" clId="{9573727F-4811-45D9-A52A-5B3A3BCA0CD9}" dt="2026-04-06T20:57:24.294" v="1696" actId="122"/>
         <pc:sldMkLst>
           <pc:docMk/>
-          <pc:sldMk cId="0" sldId="268"/>
+          <pc:sldMk cId="723249223" sldId="327"/>
         </pc:sldMkLst>
-        <pc:spChg chg="mod">
-          <ac:chgData name="Julio César Iturra Sanhueza" userId="e2de3052-3501-452a-9806-eb4e3c41687c" providerId="ADAL" clId="{9573727F-4811-45D9-A52A-5B3A3BCA0CD9}" dt="2025-12-10T18:47:19.319" v="3" actId="27636"/>
+        <pc:spChg chg="del mod">
+          <ac:chgData name="Julio César Iturra Sanhueza" userId="e2de3052-3501-452a-9806-eb4e3c41687c" providerId="ADAL" clId="{9573727F-4811-45D9-A52A-5B3A3BCA0CD9}" dt="2026-04-06T20:53:38.251" v="1691" actId="478"/>
           <ac:spMkLst>
             <pc:docMk/>
-            <pc:sldMk cId="0" sldId="268"/>
-            <ac:spMk id="157" creationId="{00000000-0000-0000-0000-000000000000}"/>
-          </ac:spMkLst>
-        </pc:spChg>
-      </pc:sldChg>
-      <pc:sldChg chg="addSp delSp modSp del mod">
-        <pc:chgData name="Julio César Iturra Sanhueza" userId="e2de3052-3501-452a-9806-eb4e3c41687c" providerId="ADAL" clId="{9573727F-4811-45D9-A52A-5B3A3BCA0CD9}" dt="2025-12-10T18:50:03.523" v="93" actId="47"/>
-        <pc:sldMkLst>
-          <pc:docMk/>
-          <pc:sldMk cId="0" sldId="291"/>
-        </pc:sldMkLst>
-        <pc:spChg chg="mod">
-          <ac:chgData name="Julio César Iturra Sanhueza" userId="e2de3052-3501-452a-9806-eb4e3c41687c" providerId="ADAL" clId="{9573727F-4811-45D9-A52A-5B3A3BCA0CD9}" dt="2025-12-10T18:49:46.470" v="70" actId="1035"/>
-          <ac:spMkLst>
-            <pc:docMk/>
-            <pc:sldMk cId="0" sldId="291"/>
-            <ac:spMk id="2" creationId="{B3D491B1-A7E8-3C25-A082-803379E1A9BD}"/>
-          </ac:spMkLst>
-        </pc:spChg>
-        <pc:spChg chg="mod topLvl">
-          <ac:chgData name="Julio César Iturra Sanhueza" userId="e2de3052-3501-452a-9806-eb4e3c41687c" providerId="ADAL" clId="{9573727F-4811-45D9-A52A-5B3A3BCA0CD9}" dt="2025-12-10T18:49:46.470" v="70" actId="1035"/>
-          <ac:spMkLst>
-            <pc:docMk/>
-            <pc:sldMk cId="0" sldId="291"/>
-            <ac:spMk id="3" creationId="{1AFC7972-1E5B-9311-49EA-F3921876BCFC}"/>
-          </ac:spMkLst>
-        </pc:spChg>
-        <pc:spChg chg="mod topLvl">
-          <ac:chgData name="Julio César Iturra Sanhueza" userId="e2de3052-3501-452a-9806-eb4e3c41687c" providerId="ADAL" clId="{9573727F-4811-45D9-A52A-5B3A3BCA0CD9}" dt="2025-12-10T18:49:32.286" v="32" actId="165"/>
-          <ac:spMkLst>
-            <pc:docMk/>
-            <pc:sldMk cId="0" sldId="291"/>
-            <ac:spMk id="4" creationId="{D440E6DD-7272-0CAD-1101-A969B049B6A4}"/>
+            <pc:sldMk cId="723249223" sldId="327"/>
+            <ac:spMk id="4" creationId="{35B581AD-3D76-B047-07A6-A183CF589AB8}"/>
           </ac:spMkLst>
         </pc:spChg>
         <pc:spChg chg="mod">
-          <ac:chgData name="Julio César Iturra Sanhueza" userId="e2de3052-3501-452a-9806-eb4e3c41687c" providerId="ADAL" clId="{9573727F-4811-45D9-A52A-5B3A3BCA0CD9}" dt="2025-12-10T18:49:46.470" v="70" actId="1035"/>
+          <ac:chgData name="Julio César Iturra Sanhueza" userId="e2de3052-3501-452a-9806-eb4e3c41687c" providerId="ADAL" clId="{9573727F-4811-45D9-A52A-5B3A3BCA0CD9}" dt="2026-04-06T20:57:24.294" v="1696" actId="122"/>
           <ac:spMkLst>
             <pc:docMk/>
-            <pc:sldMk cId="0" sldId="291"/>
-            <ac:spMk id="5" creationId="{2E02EE1C-69B4-A556-A5EF-AF84F79286E8}"/>
+            <pc:sldMk cId="723249223" sldId="327"/>
+            <ac:spMk id="5" creationId="{3BCE2E96-C589-7EBD-3E3C-892D6743E3D0}"/>
           </ac:spMkLst>
         </pc:spChg>
         <pc:spChg chg="mod">
-          <ac:chgData name="Julio César Iturra Sanhueza" userId="e2de3052-3501-452a-9806-eb4e3c41687c" providerId="ADAL" clId="{9573727F-4811-45D9-A52A-5B3A3BCA0CD9}" dt="2025-12-10T18:48:55.411" v="17" actId="1076"/>
+          <ac:chgData name="Julio César Iturra Sanhueza" userId="e2de3052-3501-452a-9806-eb4e3c41687c" providerId="ADAL" clId="{9573727F-4811-45D9-A52A-5B3A3BCA0CD9}" dt="2026-04-06T20:57:24.294" v="1696" actId="122"/>
           <ac:spMkLst>
             <pc:docMk/>
-            <pc:sldMk cId="0" sldId="291"/>
-            <ac:spMk id="6" creationId="{763B3A31-DA82-E19E-4EC4-4FB1A598E75A}"/>
+            <pc:sldMk cId="723249223" sldId="327"/>
+            <ac:spMk id="9" creationId="{F9E96F2C-10C7-0D70-0D98-9D4B4CF8B55E}"/>
           </ac:spMkLst>
         </pc:spChg>
         <pc:spChg chg="mod">
-          <ac:chgData name="Julio César Iturra Sanhueza" userId="e2de3052-3501-452a-9806-eb4e3c41687c" providerId="ADAL" clId="{9573727F-4811-45D9-A52A-5B3A3BCA0CD9}" dt="2025-12-10T18:48:37.548" v="13" actId="14100"/>
+          <ac:chgData name="Julio César Iturra Sanhueza" userId="e2de3052-3501-452a-9806-eb4e3c41687c" providerId="ADAL" clId="{9573727F-4811-45D9-A52A-5B3A3BCA0CD9}" dt="2026-04-06T20:57:24.294" v="1696" actId="122"/>
           <ac:spMkLst>
             <pc:docMk/>
-            <pc:sldMk cId="0" sldId="291"/>
-            <ac:spMk id="7" creationId="{6C9D862A-4998-1E08-1501-6C38C0BB5B6B}"/>
+            <pc:sldMk cId="723249223" sldId="327"/>
+            <ac:spMk id="24" creationId="{548D0691-4728-659F-AB43-18B5DD8BA13F}"/>
           </ac:spMkLst>
         </pc:spChg>
         <pc:spChg chg="mod">
-          <ac:chgData name="Julio César Iturra Sanhueza" userId="e2de3052-3501-452a-9806-eb4e3c41687c" providerId="ADAL" clId="{9573727F-4811-45D9-A52A-5B3A3BCA0CD9}" dt="2025-12-10T18:48:55.411" v="17" actId="1076"/>
+          <ac:chgData name="Julio César Iturra Sanhueza" userId="e2de3052-3501-452a-9806-eb4e3c41687c" providerId="ADAL" clId="{9573727F-4811-45D9-A52A-5B3A3BCA0CD9}" dt="2026-04-06T20:57:24.294" v="1696" actId="122"/>
           <ac:spMkLst>
             <pc:docMk/>
-            <pc:sldMk cId="0" sldId="291"/>
-            <ac:spMk id="8" creationId="{28E93C0A-A96C-5138-F6E6-AB2C56421F1C}"/>
-          </ac:spMkLst>
-        </pc:spChg>
-        <pc:spChg chg="mod topLvl">
-          <ac:chgData name="Julio César Iturra Sanhueza" userId="e2de3052-3501-452a-9806-eb4e3c41687c" providerId="ADAL" clId="{9573727F-4811-45D9-A52A-5B3A3BCA0CD9}" dt="2025-12-10T18:49:46.470" v="70" actId="1035"/>
-          <ac:spMkLst>
-            <pc:docMk/>
-            <pc:sldMk cId="0" sldId="291"/>
-            <ac:spMk id="9" creationId="{5FE3A255-D2E8-C9F0-D8CD-21BE68A4A621}"/>
+            <pc:sldMk cId="723249223" sldId="327"/>
+            <ac:spMk id="36" creationId="{B4B51116-0A09-948A-9476-F8D50D29F792}"/>
           </ac:spMkLst>
         </pc:spChg>
         <pc:spChg chg="mod">
-          <ac:chgData name="Julio César Iturra Sanhueza" userId="e2de3052-3501-452a-9806-eb4e3c41687c" providerId="ADAL" clId="{9573727F-4811-45D9-A52A-5B3A3BCA0CD9}" dt="2025-12-10T18:49:46.470" v="70" actId="1035"/>
+          <ac:chgData name="Julio César Iturra Sanhueza" userId="e2de3052-3501-452a-9806-eb4e3c41687c" providerId="ADAL" clId="{9573727F-4811-45D9-A52A-5B3A3BCA0CD9}" dt="2026-04-06T20:55:57.288" v="1694" actId="20577"/>
           <ac:spMkLst>
             <pc:docMk/>
-            <pc:sldMk cId="0" sldId="291"/>
-            <ac:spMk id="25" creationId="{4C476F48-9B3D-6600-A216-979BBA61B66C}"/>
+            <pc:sldMk cId="723249223" sldId="327"/>
+            <ac:spMk id="46" creationId="{A3E31A86-1120-39A4-D871-F54E2AEF607E}"/>
           </ac:spMkLst>
         </pc:spChg>
         <pc:spChg chg="mod">
-          <ac:chgData name="Julio César Iturra Sanhueza" userId="e2de3052-3501-452a-9806-eb4e3c41687c" providerId="ADAL" clId="{9573727F-4811-45D9-A52A-5B3A3BCA0CD9}" dt="2025-12-10T18:49:46.470" v="70" actId="1035"/>
+          <ac:chgData name="Julio César Iturra Sanhueza" userId="e2de3052-3501-452a-9806-eb4e3c41687c" providerId="ADAL" clId="{9573727F-4811-45D9-A52A-5B3A3BCA0CD9}" dt="2026-04-06T20:53:35.030" v="1690" actId="1037"/>
           <ac:spMkLst>
             <pc:docMk/>
-            <pc:sldMk cId="0" sldId="291"/>
-            <ac:spMk id="75" creationId="{7B4AD257-54DC-E013-7730-02FE7A86F7D7}"/>
+            <pc:sldMk cId="723249223" sldId="327"/>
+            <ac:spMk id="47" creationId="{C9931CF8-F02C-0954-352E-3C48585135B6}"/>
           </ac:spMkLst>
         </pc:spChg>
-        <pc:spChg chg="mod">
-          <ac:chgData name="Julio César Iturra Sanhueza" userId="e2de3052-3501-452a-9806-eb4e3c41687c" providerId="ADAL" clId="{9573727F-4811-45D9-A52A-5B3A3BCA0CD9}" dt="2025-12-10T18:49:46.470" v="70" actId="1035"/>
+        <pc:cxnChg chg="mod">
+          <ac:chgData name="Julio César Iturra Sanhueza" userId="e2de3052-3501-452a-9806-eb4e3c41687c" providerId="ADAL" clId="{9573727F-4811-45D9-A52A-5B3A3BCA0CD9}" dt="2026-04-06T20:56:45.538" v="1695" actId="1076"/>
+          <ac:cxnSpMkLst>
+            <pc:docMk/>
+            <pc:sldMk cId="723249223" sldId="327"/>
+            <ac:cxnSpMk id="10" creationId="{36237E22-1DDE-4D4E-6A09-85AB865572CE}"/>
+          </ac:cxnSpMkLst>
+        </pc:cxnChg>
+        <pc:cxnChg chg="mod">
+          <ac:chgData name="Julio César Iturra Sanhueza" userId="e2de3052-3501-452a-9806-eb4e3c41687c" providerId="ADAL" clId="{9573727F-4811-45D9-A52A-5B3A3BCA0CD9}" dt="2026-04-06T20:56:45.538" v="1695" actId="1076"/>
+          <ac:cxnSpMkLst>
+            <pc:docMk/>
+            <pc:sldMk cId="723249223" sldId="327"/>
+            <ac:cxnSpMk id="25" creationId="{F8D50FC4-E2A9-308E-23E4-6DC3296093B5}"/>
+          </ac:cxnSpMkLst>
+        </pc:cxnChg>
+        <pc:cxnChg chg="mod">
+          <ac:chgData name="Julio César Iturra Sanhueza" userId="e2de3052-3501-452a-9806-eb4e3c41687c" providerId="ADAL" clId="{9573727F-4811-45D9-A52A-5B3A3BCA0CD9}" dt="2026-04-06T20:52:54.426" v="1640" actId="1076"/>
+          <ac:cxnSpMkLst>
+            <pc:docMk/>
+            <pc:sldMk cId="723249223" sldId="327"/>
+            <ac:cxnSpMk id="28" creationId="{8CBA71FC-1A37-60E1-20F1-5E575653A50E}"/>
+          </ac:cxnSpMkLst>
+        </pc:cxnChg>
+        <pc:cxnChg chg="mod">
+          <ac:chgData name="Julio César Iturra Sanhueza" userId="e2de3052-3501-452a-9806-eb4e3c41687c" providerId="ADAL" clId="{9573727F-4811-45D9-A52A-5B3A3BCA0CD9}" dt="2026-04-06T20:56:45.538" v="1695" actId="1076"/>
+          <ac:cxnSpMkLst>
+            <pc:docMk/>
+            <pc:sldMk cId="723249223" sldId="327"/>
+            <ac:cxnSpMk id="37" creationId="{EBF629DC-BB86-F0E1-D42C-5C9970A0AA05}"/>
+          </ac:cxnSpMkLst>
+        </pc:cxnChg>
+        <pc:cxnChg chg="mod">
+          <ac:chgData name="Julio César Iturra Sanhueza" userId="e2de3052-3501-452a-9806-eb4e3c41687c" providerId="ADAL" clId="{9573727F-4811-45D9-A52A-5B3A3BCA0CD9}" dt="2026-04-06T20:53:35.030" v="1690" actId="1037"/>
+          <ac:cxnSpMkLst>
+            <pc:docMk/>
+            <pc:sldMk cId="723249223" sldId="327"/>
+            <ac:cxnSpMk id="40" creationId="{56F5D1F6-61F5-84D4-B567-BCA2014E0E98}"/>
+          </ac:cxnSpMkLst>
+        </pc:cxnChg>
+      </pc:sldChg>
+      <pc:sldChg chg="add del">
+        <pc:chgData name="Julio César Iturra Sanhueza" userId="e2de3052-3501-452a-9806-eb4e3c41687c" providerId="ADAL" clId="{9573727F-4811-45D9-A52A-5B3A3BCA0CD9}" dt="2026-04-06T20:36:50.162" v="1025"/>
+        <pc:sldMkLst>
+          <pc:docMk/>
+          <pc:sldMk cId="2969537017" sldId="328"/>
+        </pc:sldMkLst>
+      </pc:sldChg>
+      <pc:sldChg chg="addSp delSp modSp add mod">
+        <pc:chgData name="Julio César Iturra Sanhueza" userId="e2de3052-3501-452a-9806-eb4e3c41687c" providerId="ADAL" clId="{9573727F-4811-45D9-A52A-5B3A3BCA0CD9}" dt="2026-04-06T23:00:42.418" v="2240" actId="120"/>
+        <pc:sldMkLst>
+          <pc:docMk/>
+          <pc:sldMk cId="3025336891" sldId="328"/>
+        </pc:sldMkLst>
+        <pc:spChg chg="add del mod">
+          <ac:chgData name="Julio César Iturra Sanhueza" userId="e2de3052-3501-452a-9806-eb4e3c41687c" providerId="ADAL" clId="{9573727F-4811-45D9-A52A-5B3A3BCA0CD9}" dt="2026-04-06T22:49:29.771" v="1890" actId="478"/>
           <ac:spMkLst>
             <pc:docMk/>
-            <pc:sldMk cId="0" sldId="291"/>
-            <ac:spMk id="76" creationId="{A5A3152A-F1F9-16AD-F11D-832855209A10}"/>
+            <pc:sldMk cId="3025336891" sldId="328"/>
+            <ac:spMk id="2" creationId="{DEAC2718-6238-3C09-F43A-DDBA6C05402F}"/>
           </ac:spMkLst>
         </pc:spChg>
-        <pc:spChg chg="mod">
-          <ac:chgData name="Julio César Iturra Sanhueza" userId="e2de3052-3501-452a-9806-eb4e3c41687c" providerId="ADAL" clId="{9573727F-4811-45D9-A52A-5B3A3BCA0CD9}" dt="2025-12-10T18:49:46.470" v="70" actId="1035"/>
+        <pc:spChg chg="del">
+          <ac:chgData name="Julio César Iturra Sanhueza" userId="e2de3052-3501-452a-9806-eb4e3c41687c" providerId="ADAL" clId="{9573727F-4811-45D9-A52A-5B3A3BCA0CD9}" dt="2026-04-06T20:37:22.028" v="1047" actId="478"/>
           <ac:spMkLst>
             <pc:docMk/>
-            <pc:sldMk cId="0" sldId="291"/>
-            <ac:spMk id="77" creationId="{9EEC3144-C7D2-3728-415C-941F7442E8B8}"/>
+            <pc:sldMk cId="3025336891" sldId="328"/>
+            <ac:spMk id="3" creationId="{22642045-E8C8-3EA3-8083-F02A0E88C444}"/>
           </ac:spMkLst>
         </pc:spChg>
-        <pc:spChg chg="mod">
-          <ac:chgData name="Julio César Iturra Sanhueza" userId="e2de3052-3501-452a-9806-eb4e3c41687c" providerId="ADAL" clId="{9573727F-4811-45D9-A52A-5B3A3BCA0CD9}" dt="2025-12-10T18:48:39.288" v="15" actId="14100"/>
+        <pc:spChg chg="del topLvl">
+          <ac:chgData name="Julio César Iturra Sanhueza" userId="e2de3052-3501-452a-9806-eb4e3c41687c" providerId="ADAL" clId="{9573727F-4811-45D9-A52A-5B3A3BCA0CD9}" dt="2026-04-06T20:37:23.899" v="1048" actId="478"/>
           <ac:spMkLst>
             <pc:docMk/>
-            <pc:sldMk cId="0" sldId="291"/>
-            <ac:spMk id="78" creationId="{4F2BCAEB-FB48-4C92-B6F8-42243079C5CA}"/>
+            <pc:sldMk cId="3025336891" sldId="328"/>
+            <ac:spMk id="4" creationId="{F25AB843-DC0B-02B1-D77D-FFEC2F09CA25}"/>
           </ac:spMkLst>
         </pc:spChg>
-        <pc:spChg chg="mod">
-          <ac:chgData name="Julio César Iturra Sanhueza" userId="e2de3052-3501-452a-9806-eb4e3c41687c" providerId="ADAL" clId="{9573727F-4811-45D9-A52A-5B3A3BCA0CD9}" dt="2025-12-10T18:49:46.470" v="70" actId="1035"/>
+        <pc:spChg chg="add del mod">
+          <ac:chgData name="Julio César Iturra Sanhueza" userId="e2de3052-3501-452a-9806-eb4e3c41687c" providerId="ADAL" clId="{9573727F-4811-45D9-A52A-5B3A3BCA0CD9}" dt="2026-04-06T22:49:30.499" v="1891" actId="478"/>
           <ac:spMkLst>
             <pc:docMk/>
-            <pc:sldMk cId="0" sldId="291"/>
-            <ac:spMk id="79" creationId="{3F318A84-E20F-2BC2-6C77-14D0187E0BB8}"/>
+            <pc:sldMk cId="3025336891" sldId="328"/>
+            <ac:spMk id="5" creationId="{FB95D7B7-7D0E-6781-F447-1F9D53C2964F}"/>
+          </ac:spMkLst>
+        </pc:spChg>
+        <pc:spChg chg="del">
+          <ac:chgData name="Julio César Iturra Sanhueza" userId="e2de3052-3501-452a-9806-eb4e3c41687c" providerId="ADAL" clId="{9573727F-4811-45D9-A52A-5B3A3BCA0CD9}" dt="2026-04-06T20:37:10.228" v="1045" actId="478"/>
+          <ac:spMkLst>
+            <pc:docMk/>
+            <pc:sldMk cId="3025336891" sldId="328"/>
+            <ac:spMk id="6" creationId="{E928EFE9-27B3-B383-1CF0-3565CF14BBF0}"/>
+          </ac:spMkLst>
+        </pc:spChg>
+        <pc:spChg chg="add del mod">
+          <ac:chgData name="Julio César Iturra Sanhueza" userId="e2de3052-3501-452a-9806-eb4e3c41687c" providerId="ADAL" clId="{9573727F-4811-45D9-A52A-5B3A3BCA0CD9}" dt="2026-04-06T22:49:31.116" v="1892" actId="478"/>
+          <ac:spMkLst>
+            <pc:docMk/>
+            <pc:sldMk cId="3025336891" sldId="328"/>
+            <ac:spMk id="7" creationId="{F5869869-CD0D-B68E-E746-56EED3DC922F}"/>
+          </ac:spMkLst>
+        </pc:spChg>
+        <pc:spChg chg="add del mod">
+          <ac:chgData name="Julio César Iturra Sanhueza" userId="e2de3052-3501-452a-9806-eb4e3c41687c" providerId="ADAL" clId="{9573727F-4811-45D9-A52A-5B3A3BCA0CD9}" dt="2026-04-06T22:49:31.705" v="1893" actId="478"/>
+          <ac:spMkLst>
+            <pc:docMk/>
+            <pc:sldMk cId="3025336891" sldId="328"/>
+            <ac:spMk id="8" creationId="{A830373E-7A29-985F-9A81-2A7B0426257E}"/>
+          </ac:spMkLst>
+        </pc:spChg>
+        <pc:spChg chg="add del mod topLvl">
+          <ac:chgData name="Julio César Iturra Sanhueza" userId="e2de3052-3501-452a-9806-eb4e3c41687c" providerId="ADAL" clId="{9573727F-4811-45D9-A52A-5B3A3BCA0CD9}" dt="2026-04-06T22:55:04.799" v="2179" actId="1076"/>
+          <ac:spMkLst>
+            <pc:docMk/>
+            <pc:sldMk cId="3025336891" sldId="328"/>
+            <ac:spMk id="9" creationId="{D7375C31-4D0A-1861-84E7-4E89046264A4}"/>
+          </ac:spMkLst>
+        </pc:spChg>
+        <pc:spChg chg="add del mod">
+          <ac:chgData name="Julio César Iturra Sanhueza" userId="e2de3052-3501-452a-9806-eb4e3c41687c" providerId="ADAL" clId="{9573727F-4811-45D9-A52A-5B3A3BCA0CD9}" dt="2026-04-06T23:00:42.418" v="2240" actId="120"/>
+          <ac:spMkLst>
+            <pc:docMk/>
+            <pc:sldMk cId="3025336891" sldId="328"/>
+            <ac:spMk id="25" creationId="{B3EAD770-2119-7E45-8832-FBD30D920DF9}"/>
+          </ac:spMkLst>
+        </pc:spChg>
+        <pc:spChg chg="del">
+          <ac:chgData name="Julio César Iturra Sanhueza" userId="e2de3052-3501-452a-9806-eb4e3c41687c" providerId="ADAL" clId="{9573727F-4811-45D9-A52A-5B3A3BCA0CD9}" dt="2026-04-06T20:38:07.143" v="1097" actId="478"/>
+          <ac:spMkLst>
+            <pc:docMk/>
+            <pc:sldMk cId="3025336891" sldId="328"/>
+            <ac:spMk id="49" creationId="{D44438E4-5488-AD9C-B92C-97945ED926B1}"/>
+          </ac:spMkLst>
+        </pc:spChg>
+        <pc:spChg chg="del">
+          <ac:chgData name="Julio César Iturra Sanhueza" userId="e2de3052-3501-452a-9806-eb4e3c41687c" providerId="ADAL" clId="{9573727F-4811-45D9-A52A-5B3A3BCA0CD9}" dt="2026-04-06T20:38:16.242" v="1102" actId="478"/>
+          <ac:spMkLst>
+            <pc:docMk/>
+            <pc:sldMk cId="3025336891" sldId="328"/>
+            <ac:spMk id="50" creationId="{782334BE-743F-515F-8C22-A18BE835F78D}"/>
+          </ac:spMkLst>
+        </pc:spChg>
+        <pc:spChg chg="del">
+          <ac:chgData name="Julio César Iturra Sanhueza" userId="e2de3052-3501-452a-9806-eb4e3c41687c" providerId="ADAL" clId="{9573727F-4811-45D9-A52A-5B3A3BCA0CD9}" dt="2026-04-06T20:38:10.004" v="1098" actId="478"/>
+          <ac:spMkLst>
+            <pc:docMk/>
+            <pc:sldMk cId="3025336891" sldId="328"/>
+            <ac:spMk id="51" creationId="{DBC65261-7185-1437-5F83-66AC04173FD2}"/>
           </ac:spMkLst>
         </pc:spChg>
         <pc:spChg chg="del mod">
-          <ac:chgData name="Julio César Iturra Sanhueza" userId="e2de3052-3501-452a-9806-eb4e3c41687c" providerId="ADAL" clId="{9573727F-4811-45D9-A52A-5B3A3BCA0CD9}" dt="2025-12-10T18:47:39.114" v="7" actId="478"/>
+          <ac:chgData name="Julio César Iturra Sanhueza" userId="e2de3052-3501-452a-9806-eb4e3c41687c" providerId="ADAL" clId="{9573727F-4811-45D9-A52A-5B3A3BCA0CD9}" dt="2026-04-06T20:38:05.673" v="1096" actId="478"/>
           <ac:spMkLst>
             <pc:docMk/>
-            <pc:sldMk cId="0" sldId="291"/>
-            <ac:spMk id="127" creationId="{00000000-0000-0000-0000-000000000000}"/>
+            <pc:sldMk cId="3025336891" sldId="328"/>
+            <ac:spMk id="52" creationId="{9914671E-DA6A-8334-9626-206BC961DF9C}"/>
           </ac:spMkLst>
         </pc:spChg>
-        <pc:spChg chg="mod">
-          <ac:chgData name="Julio César Iturra Sanhueza" userId="e2de3052-3501-452a-9806-eb4e3c41687c" providerId="ADAL" clId="{9573727F-4811-45D9-A52A-5B3A3BCA0CD9}" dt="2025-12-10T18:49:46.470" v="70" actId="1035"/>
+        <pc:spChg chg="del">
+          <ac:chgData name="Julio César Iturra Sanhueza" userId="e2de3052-3501-452a-9806-eb4e3c41687c" providerId="ADAL" clId="{9573727F-4811-45D9-A52A-5B3A3BCA0CD9}" dt="2026-04-06T20:38:11.558" v="1099" actId="478"/>
           <ac:spMkLst>
             <pc:docMk/>
-            <pc:sldMk cId="0" sldId="291"/>
-            <ac:spMk id="128" creationId="{00000000-0000-0000-0000-000000000000}"/>
+            <pc:sldMk cId="3025336891" sldId="328"/>
+            <ac:spMk id="53" creationId="{B50D73AC-8730-7848-EB43-3C9072C07838}"/>
           </ac:spMkLst>
         </pc:spChg>
-        <pc:grpChg chg="add del mod">
-          <ac:chgData name="Julio César Iturra Sanhueza" userId="e2de3052-3501-452a-9806-eb4e3c41687c" providerId="ADAL" clId="{9573727F-4811-45D9-A52A-5B3A3BCA0CD9}" dt="2025-12-10T18:49:32.286" v="32" actId="165"/>
+        <pc:spChg chg="add del mod ord">
+          <ac:chgData name="Julio César Iturra Sanhueza" userId="e2de3052-3501-452a-9806-eb4e3c41687c" providerId="ADAL" clId="{9573727F-4811-45D9-A52A-5B3A3BCA0CD9}" dt="2026-04-06T21:57:41.866" v="1759" actId="478"/>
+          <ac:spMkLst>
+            <pc:docMk/>
+            <pc:sldMk cId="3025336891" sldId="328"/>
+            <ac:spMk id="62" creationId="{E441529B-F249-A2AE-A5C3-33E600410853}"/>
+          </ac:spMkLst>
+        </pc:spChg>
+        <pc:spChg chg="del">
+          <ac:chgData name="Julio César Iturra Sanhueza" userId="e2de3052-3501-452a-9806-eb4e3c41687c" providerId="ADAL" clId="{9573727F-4811-45D9-A52A-5B3A3BCA0CD9}" dt="2026-04-06T21:57:33.643" v="1756" actId="478"/>
+          <ac:spMkLst>
+            <pc:docMk/>
+            <pc:sldMk cId="3025336891" sldId="328"/>
+            <ac:spMk id="128" creationId="{D6164665-F8FF-6267-4364-B88C5955ECFE}"/>
+          </ac:spMkLst>
+        </pc:spChg>
+        <pc:spChg chg="add del mod">
+          <ac:chgData name="Julio César Iturra Sanhueza" userId="e2de3052-3501-452a-9806-eb4e3c41687c" providerId="ADAL" clId="{9573727F-4811-45D9-A52A-5B3A3BCA0CD9}" dt="2026-04-06T21:58:04.282" v="1762" actId="478"/>
+          <ac:spMkLst>
+            <pc:docMk/>
+            <pc:sldMk cId="3025336891" sldId="328"/>
+            <ac:spMk id="130" creationId="{99EE8D37-E19C-C70C-6362-155979382F6D}"/>
+          </ac:spMkLst>
+        </pc:spChg>
+        <pc:spChg chg="add mod">
+          <ac:chgData name="Julio César Iturra Sanhueza" userId="e2de3052-3501-452a-9806-eb4e3c41687c" providerId="ADAL" clId="{9573727F-4811-45D9-A52A-5B3A3BCA0CD9}" dt="2026-04-06T22:48:26.234" v="1877" actId="1076"/>
+          <ac:spMkLst>
+            <pc:docMk/>
+            <pc:sldMk cId="3025336891" sldId="328"/>
+            <ac:spMk id="136" creationId="{C62CCBA4-A5C5-A552-201C-F5C660112F9D}"/>
+          </ac:spMkLst>
+        </pc:spChg>
+        <pc:spChg chg="add mod">
+          <ac:chgData name="Julio César Iturra Sanhueza" userId="e2de3052-3501-452a-9806-eb4e3c41687c" providerId="ADAL" clId="{9573727F-4811-45D9-A52A-5B3A3BCA0CD9}" dt="2026-04-06T22:48:26.234" v="1877" actId="1076"/>
+          <ac:spMkLst>
+            <pc:docMk/>
+            <pc:sldMk cId="3025336891" sldId="328"/>
+            <ac:spMk id="137" creationId="{1B92FF99-1EE4-BEBD-C1DC-987229418287}"/>
+          </ac:spMkLst>
+        </pc:spChg>
+        <pc:spChg chg="add mod">
+          <ac:chgData name="Julio César Iturra Sanhueza" userId="e2de3052-3501-452a-9806-eb4e3c41687c" providerId="ADAL" clId="{9573727F-4811-45D9-A52A-5B3A3BCA0CD9}" dt="2026-04-06T22:48:26.234" v="1877" actId="1076"/>
+          <ac:spMkLst>
+            <pc:docMk/>
+            <pc:sldMk cId="3025336891" sldId="328"/>
+            <ac:spMk id="138" creationId="{3123C7A4-54E1-CB50-3BF3-10373F6BD781}"/>
+          </ac:spMkLst>
+        </pc:spChg>
+        <pc:spChg chg="add mod">
+          <ac:chgData name="Julio César Iturra Sanhueza" userId="e2de3052-3501-452a-9806-eb4e3c41687c" providerId="ADAL" clId="{9573727F-4811-45D9-A52A-5B3A3BCA0CD9}" dt="2026-04-06T22:48:26.234" v="1877" actId="1076"/>
+          <ac:spMkLst>
+            <pc:docMk/>
+            <pc:sldMk cId="3025336891" sldId="328"/>
+            <ac:spMk id="139" creationId="{FACFB784-7EF6-B1A6-8025-AA8D3FCB7E82}"/>
+          </ac:spMkLst>
+        </pc:spChg>
+        <pc:spChg chg="add mod ord">
+          <ac:chgData name="Julio César Iturra Sanhueza" userId="e2de3052-3501-452a-9806-eb4e3c41687c" providerId="ADAL" clId="{9573727F-4811-45D9-A52A-5B3A3BCA0CD9}" dt="2026-04-06T22:48:17.905" v="1876" actId="167"/>
+          <ac:spMkLst>
+            <pc:docMk/>
+            <pc:sldMk cId="3025336891" sldId="328"/>
+            <ac:spMk id="140" creationId="{4141D2C7-33CC-71BF-08E3-4A7A887094F8}"/>
+          </ac:spMkLst>
+        </pc:spChg>
+        <pc:spChg chg="add del mod">
+          <ac:chgData name="Julio César Iturra Sanhueza" userId="e2de3052-3501-452a-9806-eb4e3c41687c" providerId="ADAL" clId="{9573727F-4811-45D9-A52A-5B3A3BCA0CD9}" dt="2026-04-06T22:51:05.663" v="1970" actId="478"/>
+          <ac:spMkLst>
+            <pc:docMk/>
+            <pc:sldMk cId="3025336891" sldId="328"/>
+            <ac:spMk id="141" creationId="{D98706CE-9055-C37A-BBFA-DE66AC7C6B5F}"/>
+          </ac:spMkLst>
+        </pc:spChg>
+        <pc:spChg chg="add del mod">
+          <ac:chgData name="Julio César Iturra Sanhueza" userId="e2de3052-3501-452a-9806-eb4e3c41687c" providerId="ADAL" clId="{9573727F-4811-45D9-A52A-5B3A3BCA0CD9}" dt="2026-04-06T22:51:12.392" v="1974" actId="478"/>
+          <ac:spMkLst>
+            <pc:docMk/>
+            <pc:sldMk cId="3025336891" sldId="328"/>
+            <ac:spMk id="142" creationId="{2B231758-64A4-E217-D5F2-703417630E4D}"/>
+          </ac:spMkLst>
+        </pc:spChg>
+        <pc:spChg chg="add del mod">
+          <ac:chgData name="Julio César Iturra Sanhueza" userId="e2de3052-3501-452a-9806-eb4e3c41687c" providerId="ADAL" clId="{9573727F-4811-45D9-A52A-5B3A3BCA0CD9}" dt="2026-04-06T22:51:11.700" v="1973" actId="478"/>
+          <ac:spMkLst>
+            <pc:docMk/>
+            <pc:sldMk cId="3025336891" sldId="328"/>
+            <ac:spMk id="143" creationId="{5D2BBED8-3F20-5C51-6EA0-D4D20425CDDD}"/>
+          </ac:spMkLst>
+        </pc:spChg>
+        <pc:spChg chg="add del mod">
+          <ac:chgData name="Julio César Iturra Sanhueza" userId="e2de3052-3501-452a-9806-eb4e3c41687c" providerId="ADAL" clId="{9573727F-4811-45D9-A52A-5B3A3BCA0CD9}" dt="2026-04-06T22:51:09.624" v="1971" actId="478"/>
+          <ac:spMkLst>
+            <pc:docMk/>
+            <pc:sldMk cId="3025336891" sldId="328"/>
+            <ac:spMk id="144" creationId="{BD93AC67-9E39-18EB-E200-C93420FE9B1D}"/>
+          </ac:spMkLst>
+        </pc:spChg>
+        <pc:spChg chg="add del mod">
+          <ac:chgData name="Julio César Iturra Sanhueza" userId="e2de3052-3501-452a-9806-eb4e3c41687c" providerId="ADAL" clId="{9573727F-4811-45D9-A52A-5B3A3BCA0CD9}" dt="2026-04-06T22:51:10.526" v="1972" actId="478"/>
+          <ac:spMkLst>
+            <pc:docMk/>
+            <pc:sldMk cId="3025336891" sldId="328"/>
+            <ac:spMk id="145" creationId="{FB682A14-346D-DD2A-D58F-4BB80359AAD2}"/>
+          </ac:spMkLst>
+        </pc:spChg>
+        <pc:spChg chg="add del mod">
+          <ac:chgData name="Julio César Iturra Sanhueza" userId="e2de3052-3501-452a-9806-eb4e3c41687c" providerId="ADAL" clId="{9573727F-4811-45D9-A52A-5B3A3BCA0CD9}" dt="2026-04-06T22:49:22.184" v="1889" actId="478"/>
+          <ac:spMkLst>
+            <pc:docMk/>
+            <pc:sldMk cId="3025336891" sldId="328"/>
+            <ac:spMk id="149" creationId="{0CBB7A91-9CA6-A396-39DE-71D4B539BC99}"/>
+          </ac:spMkLst>
+        </pc:spChg>
+        <pc:spChg chg="add mod">
+          <ac:chgData name="Julio César Iturra Sanhueza" userId="e2de3052-3501-452a-9806-eb4e3c41687c" providerId="ADAL" clId="{9573727F-4811-45D9-A52A-5B3A3BCA0CD9}" dt="2026-04-06T22:54:58.220" v="2177" actId="14100"/>
+          <ac:spMkLst>
+            <pc:docMk/>
+            <pc:sldMk cId="3025336891" sldId="328"/>
+            <ac:spMk id="150" creationId="{82CFF197-1EFE-07B9-7067-105D2CBC28E7}"/>
+          </ac:spMkLst>
+        </pc:spChg>
+        <pc:spChg chg="add mod">
+          <ac:chgData name="Julio César Iturra Sanhueza" userId="e2de3052-3501-452a-9806-eb4e3c41687c" providerId="ADAL" clId="{9573727F-4811-45D9-A52A-5B3A3BCA0CD9}" dt="2026-04-06T22:50:15.222" v="1912" actId="1036"/>
+          <ac:spMkLst>
+            <pc:docMk/>
+            <pc:sldMk cId="3025336891" sldId="328"/>
+            <ac:spMk id="151" creationId="{5BA92C8E-2F4F-1626-C876-8DE60C0BFC95}"/>
+          </ac:spMkLst>
+        </pc:spChg>
+        <pc:spChg chg="add mod">
+          <ac:chgData name="Julio César Iturra Sanhueza" userId="e2de3052-3501-452a-9806-eb4e3c41687c" providerId="ADAL" clId="{9573727F-4811-45D9-A52A-5B3A3BCA0CD9}" dt="2026-04-06T22:49:39.237" v="1895" actId="1076"/>
+          <ac:spMkLst>
+            <pc:docMk/>
+            <pc:sldMk cId="3025336891" sldId="328"/>
+            <ac:spMk id="152" creationId="{5CADB8FB-8CD0-100A-44B5-0F1BEE74652A}"/>
+          </ac:spMkLst>
+        </pc:spChg>
+        <pc:spChg chg="add mod">
+          <ac:chgData name="Julio César Iturra Sanhueza" userId="e2de3052-3501-452a-9806-eb4e3c41687c" providerId="ADAL" clId="{9573727F-4811-45D9-A52A-5B3A3BCA0CD9}" dt="2026-04-06T22:50:19.811" v="1927" actId="1035"/>
+          <ac:spMkLst>
+            <pc:docMk/>
+            <pc:sldMk cId="3025336891" sldId="328"/>
+            <ac:spMk id="153" creationId="{BD991ADB-B50F-66E4-1E1E-432F5513935E}"/>
+          </ac:spMkLst>
+        </pc:spChg>
+        <pc:spChg chg="add mod">
+          <ac:chgData name="Julio César Iturra Sanhueza" userId="e2de3052-3501-452a-9806-eb4e3c41687c" providerId="ADAL" clId="{9573727F-4811-45D9-A52A-5B3A3BCA0CD9}" dt="2026-04-06T22:50:26.119" v="1952" actId="1036"/>
+          <ac:spMkLst>
+            <pc:docMk/>
+            <pc:sldMk cId="3025336891" sldId="328"/>
+            <ac:spMk id="154" creationId="{DC977B5B-C39B-0938-89DD-5E2C294A2C3E}"/>
+          </ac:spMkLst>
+        </pc:spChg>
+        <pc:spChg chg="add mod">
+          <ac:chgData name="Julio César Iturra Sanhueza" userId="e2de3052-3501-452a-9806-eb4e3c41687c" providerId="ADAL" clId="{9573727F-4811-45D9-A52A-5B3A3BCA0CD9}" dt="2026-04-06T22:54:40.073" v="2143" actId="1076"/>
+          <ac:spMkLst>
+            <pc:docMk/>
+            <pc:sldMk cId="3025336891" sldId="328"/>
+            <ac:spMk id="166" creationId="{2566B2D7-C8D8-E952-580B-429A88827CCB}"/>
+          </ac:spMkLst>
+        </pc:spChg>
+        <pc:spChg chg="add mod">
+          <ac:chgData name="Julio César Iturra Sanhueza" userId="e2de3052-3501-452a-9806-eb4e3c41687c" providerId="ADAL" clId="{9573727F-4811-45D9-A52A-5B3A3BCA0CD9}" dt="2026-04-06T22:53:07.291" v="2093" actId="1037"/>
+          <ac:spMkLst>
+            <pc:docMk/>
+            <pc:sldMk cId="3025336891" sldId="328"/>
+            <ac:spMk id="167" creationId="{7A2E2988-B1E7-F42C-6C53-BE6140031EF5}"/>
+          </ac:spMkLst>
+        </pc:spChg>
+        <pc:spChg chg="add mod">
+          <ac:chgData name="Julio César Iturra Sanhueza" userId="e2de3052-3501-452a-9806-eb4e3c41687c" providerId="ADAL" clId="{9573727F-4811-45D9-A52A-5B3A3BCA0CD9}" dt="2026-04-06T22:53:07.291" v="2093" actId="1037"/>
+          <ac:spMkLst>
+            <pc:docMk/>
+            <pc:sldMk cId="3025336891" sldId="328"/>
+            <ac:spMk id="168" creationId="{C0248755-6C4F-DC36-5875-350128F4536C}"/>
+          </ac:spMkLst>
+        </pc:spChg>
+        <pc:spChg chg="add mod">
+          <ac:chgData name="Julio César Iturra Sanhueza" userId="e2de3052-3501-452a-9806-eb4e3c41687c" providerId="ADAL" clId="{9573727F-4811-45D9-A52A-5B3A3BCA0CD9}" dt="2026-04-06T22:53:07.291" v="2093" actId="1037"/>
+          <ac:spMkLst>
+            <pc:docMk/>
+            <pc:sldMk cId="3025336891" sldId="328"/>
+            <ac:spMk id="169" creationId="{07985B01-0BDC-670E-6771-F65A31CF52DB}"/>
+          </ac:spMkLst>
+        </pc:spChg>
+        <pc:spChg chg="add mod">
+          <ac:chgData name="Julio César Iturra Sanhueza" userId="e2de3052-3501-452a-9806-eb4e3c41687c" providerId="ADAL" clId="{9573727F-4811-45D9-A52A-5B3A3BCA0CD9}" dt="2026-04-06T22:53:07.291" v="2093" actId="1037"/>
+          <ac:spMkLst>
+            <pc:docMk/>
+            <pc:sldMk cId="3025336891" sldId="328"/>
+            <ac:spMk id="170" creationId="{F2EE69CC-20FE-A32F-F819-F4071802B934}"/>
+          </ac:spMkLst>
+        </pc:spChg>
+        <pc:spChg chg="add mod">
+          <ac:chgData name="Julio César Iturra Sanhueza" userId="e2de3052-3501-452a-9806-eb4e3c41687c" providerId="ADAL" clId="{9573727F-4811-45D9-A52A-5B3A3BCA0CD9}" dt="2026-04-06T22:55:18.073" v="2182" actId="571"/>
+          <ac:spMkLst>
+            <pc:docMk/>
+            <pc:sldMk cId="3025336891" sldId="328"/>
+            <ac:spMk id="191" creationId="{C49612A8-BAD8-E678-ADA0-ACE2C3C0A749}"/>
+          </ac:spMkLst>
+        </pc:spChg>
+        <pc:grpChg chg="del">
+          <ac:chgData name="Julio César Iturra Sanhueza" userId="e2de3052-3501-452a-9806-eb4e3c41687c" providerId="ADAL" clId="{9573727F-4811-45D9-A52A-5B3A3BCA0CD9}" dt="2026-04-06T20:37:23.899" v="1048" actId="478"/>
           <ac:grpSpMkLst>
             <pc:docMk/>
-            <pc:sldMk cId="0" sldId="291"/>
-            <ac:grpSpMk id="10" creationId="{2E97173F-1277-E355-7194-DE1AD43083E7}"/>
+            <pc:sldMk cId="3025336891" sldId="328"/>
+            <ac:grpSpMk id="10" creationId="{0D9351AE-A675-5039-9556-36ECEC908331}"/>
           </ac:grpSpMkLst>
         </pc:grpChg>
-        <pc:cxnChg chg="mod">
-          <ac:chgData name="Julio César Iturra Sanhueza" userId="e2de3052-3501-452a-9806-eb4e3c41687c" providerId="ADAL" clId="{9573727F-4811-45D9-A52A-5B3A3BCA0CD9}" dt="2025-12-10T18:49:19.712" v="28" actId="1076"/>
+        <pc:cxnChg chg="del mod">
+          <ac:chgData name="Julio César Iturra Sanhueza" userId="e2de3052-3501-452a-9806-eb4e3c41687c" providerId="ADAL" clId="{9573727F-4811-45D9-A52A-5B3A3BCA0CD9}" dt="2026-04-06T22:49:15.583" v="1884" actId="478"/>
           <ac:cxnSpMkLst>
             <pc:docMk/>
-            <pc:sldMk cId="0" sldId="291"/>
-            <ac:cxnSpMk id="37" creationId="{3DDE7B43-35A2-1A84-B515-705DFC87BD0F}"/>
+            <pc:sldMk cId="3025336891" sldId="328"/>
+            <ac:cxnSpMk id="12" creationId="{62DECD98-91EE-25DE-9870-A8808C3B1F55}"/>
+          </ac:cxnSpMkLst>
+        </pc:cxnChg>
+        <pc:cxnChg chg="del mod">
+          <ac:chgData name="Julio César Iturra Sanhueza" userId="e2de3052-3501-452a-9806-eb4e3c41687c" providerId="ADAL" clId="{9573727F-4811-45D9-A52A-5B3A3BCA0CD9}" dt="2026-04-06T20:40:14.349" v="1115" actId="478"/>
+          <ac:cxnSpMkLst>
+            <pc:docMk/>
+            <pc:sldMk cId="3025336891" sldId="328"/>
+            <ac:cxnSpMk id="13" creationId="{559BB4A6-A7A9-E705-5A2A-8DDA26261E32}"/>
+          </ac:cxnSpMkLst>
+        </pc:cxnChg>
+        <pc:cxnChg chg="del mod">
+          <ac:chgData name="Julio César Iturra Sanhueza" userId="e2de3052-3501-452a-9806-eb4e3c41687c" providerId="ADAL" clId="{9573727F-4811-45D9-A52A-5B3A3BCA0CD9}" dt="2026-04-06T20:37:14.278" v="1046" actId="478"/>
+          <ac:cxnSpMkLst>
+            <pc:docMk/>
+            <pc:sldMk cId="3025336891" sldId="328"/>
+            <ac:cxnSpMk id="16" creationId="{468C90F1-0469-A3C3-322F-F400A03003E9}"/>
+          </ac:cxnSpMkLst>
+        </pc:cxnChg>
+        <pc:cxnChg chg="del mod">
+          <ac:chgData name="Julio César Iturra Sanhueza" userId="e2de3052-3501-452a-9806-eb4e3c41687c" providerId="ADAL" clId="{9573727F-4811-45D9-A52A-5B3A3BCA0CD9}" dt="2026-04-06T20:41:19.692" v="1137" actId="478"/>
+          <ac:cxnSpMkLst>
+            <pc:docMk/>
+            <pc:sldMk cId="3025336891" sldId="328"/>
+            <ac:cxnSpMk id="19" creationId="{1949B720-C0B4-119C-7422-9D79F2FF7C9F}"/>
+          </ac:cxnSpMkLst>
+        </pc:cxnChg>
+        <pc:cxnChg chg="del mod">
+          <ac:chgData name="Julio César Iturra Sanhueza" userId="e2de3052-3501-452a-9806-eb4e3c41687c" providerId="ADAL" clId="{9573727F-4811-45D9-A52A-5B3A3BCA0CD9}" dt="2026-04-06T20:41:18.886" v="1136" actId="478"/>
+          <ac:cxnSpMkLst>
+            <pc:docMk/>
+            <pc:sldMk cId="3025336891" sldId="328"/>
+            <ac:cxnSpMk id="22" creationId="{55DEC7C8-E2F7-F550-BF36-F1EC36732C16}"/>
+          </ac:cxnSpMkLst>
+        </pc:cxnChg>
+        <pc:cxnChg chg="add del mod">
+          <ac:chgData name="Julio César Iturra Sanhueza" userId="e2de3052-3501-452a-9806-eb4e3c41687c" providerId="ADAL" clId="{9573727F-4811-45D9-A52A-5B3A3BCA0CD9}" dt="2026-04-06T22:49:16.382" v="1885" actId="478"/>
+          <ac:cxnSpMkLst>
+            <pc:docMk/>
+            <pc:sldMk cId="3025336891" sldId="328"/>
+            <ac:cxnSpMk id="36" creationId="{219A13D8-CE41-DF38-BAFD-7FCC0334AC27}"/>
+          </ac:cxnSpMkLst>
+        </pc:cxnChg>
+        <pc:cxnChg chg="mod">
+          <ac:chgData name="Julio César Iturra Sanhueza" userId="e2de3052-3501-452a-9806-eb4e3c41687c" providerId="ADAL" clId="{9573727F-4811-45D9-A52A-5B3A3BCA0CD9}" dt="2026-04-06T23:00:25.487" v="2213" actId="6549"/>
+          <ac:cxnSpMkLst>
+            <pc:docMk/>
+            <pc:sldMk cId="3025336891" sldId="328"/>
+            <ac:cxnSpMk id="37" creationId="{73E13BAE-3769-609C-140B-A5690F067ACD}"/>
+          </ac:cxnSpMkLst>
+        </pc:cxnChg>
+        <pc:cxnChg chg="add del mod">
+          <ac:chgData name="Julio César Iturra Sanhueza" userId="e2de3052-3501-452a-9806-eb4e3c41687c" providerId="ADAL" clId="{9573727F-4811-45D9-A52A-5B3A3BCA0CD9}" dt="2026-04-06T22:49:17.057" v="1886" actId="478"/>
+          <ac:cxnSpMkLst>
+            <pc:docMk/>
+            <pc:sldMk cId="3025336891" sldId="328"/>
+            <ac:cxnSpMk id="46" creationId="{F3ED5D4A-C8F4-5F45-6B35-222799228418}"/>
+          </ac:cxnSpMkLst>
+        </pc:cxnChg>
+        <pc:cxnChg chg="add del mod">
+          <ac:chgData name="Julio César Iturra Sanhueza" userId="e2de3052-3501-452a-9806-eb4e3c41687c" providerId="ADAL" clId="{9573727F-4811-45D9-A52A-5B3A3BCA0CD9}" dt="2026-04-06T22:49:17.895" v="1887" actId="478"/>
+          <ac:cxnSpMkLst>
+            <pc:docMk/>
+            <pc:sldMk cId="3025336891" sldId="328"/>
+            <ac:cxnSpMk id="54" creationId="{4E4F8E1D-8E13-2657-875A-0406F5AC3927}"/>
+          </ac:cxnSpMkLst>
+        </pc:cxnChg>
+        <pc:cxnChg chg="add mod">
+          <ac:chgData name="Julio César Iturra Sanhueza" userId="e2de3052-3501-452a-9806-eb4e3c41687c" providerId="ADAL" clId="{9573727F-4811-45D9-A52A-5B3A3BCA0CD9}" dt="2026-04-06T22:55:04.799" v="2179" actId="1076"/>
+          <ac:cxnSpMkLst>
+            <pc:docMk/>
+            <pc:sldMk cId="3025336891" sldId="328"/>
+            <ac:cxnSpMk id="146" creationId="{C1E6F10B-CE21-942B-AE78-773A2860A596}"/>
+          </ac:cxnSpMkLst>
+        </pc:cxnChg>
+        <pc:cxnChg chg="add del mod">
+          <ac:chgData name="Julio César Iturra Sanhueza" userId="e2de3052-3501-452a-9806-eb4e3c41687c" providerId="ADAL" clId="{9573727F-4811-45D9-A52A-5B3A3BCA0CD9}" dt="2026-04-06T22:50:40.774" v="1956" actId="478"/>
+          <ac:cxnSpMkLst>
+            <pc:docMk/>
+            <pc:sldMk cId="3025336891" sldId="328"/>
+            <ac:cxnSpMk id="155" creationId="{739CC77F-677E-391E-53F3-EC12DB61CED4}"/>
+          </ac:cxnSpMkLst>
+        </pc:cxnChg>
+        <pc:cxnChg chg="add mod ord">
+          <ac:chgData name="Julio César Iturra Sanhueza" userId="e2de3052-3501-452a-9806-eb4e3c41687c" providerId="ADAL" clId="{9573727F-4811-45D9-A52A-5B3A3BCA0CD9}" dt="2026-04-06T22:55:26.672" v="2183" actId="14100"/>
+          <ac:cxnSpMkLst>
+            <pc:docMk/>
+            <pc:sldMk cId="3025336891" sldId="328"/>
+            <ac:cxnSpMk id="173" creationId="{3F2827F9-0E3B-72F0-789A-0B9F85854CF7}"/>
           </ac:cxnSpMkLst>
         </pc:cxnChg>
       </pc:sldChg>
-      <pc:sldChg chg="delSp modSp mod">
-        <pc:chgData name="Julio César Iturra Sanhueza" userId="e2de3052-3501-452a-9806-eb4e3c41687c" providerId="ADAL" clId="{9573727F-4811-45D9-A52A-5B3A3BCA0CD9}" dt="2025-12-10T18:49:57.087" v="92" actId="1036"/>
+      <pc:sldChg chg="add">
+        <pc:chgData name="Julio César Iturra Sanhueza" userId="e2de3052-3501-452a-9806-eb4e3c41687c" providerId="ADAL" clId="{9573727F-4811-45D9-A52A-5B3A3BCA0CD9}" dt="2026-04-06T20:36:52.276" v="1026"/>
         <pc:sldMkLst>
           <pc:docMk/>
-          <pc:sldMk cId="3351718079" sldId="297"/>
+          <pc:sldMk cId="1598568575" sldId="329"/>
+        </pc:sldMkLst>
+      </pc:sldChg>
+      <pc:sldChg chg="add del">
+        <pc:chgData name="Julio César Iturra Sanhueza" userId="e2de3052-3501-452a-9806-eb4e3c41687c" providerId="ADAL" clId="{9573727F-4811-45D9-A52A-5B3A3BCA0CD9}" dt="2026-04-06T20:36:50.162" v="1025"/>
+        <pc:sldMkLst>
+          <pc:docMk/>
+          <pc:sldMk cId="4040491843" sldId="329"/>
+        </pc:sldMkLst>
+      </pc:sldChg>
+      <pc:sldChg chg="modSp add mod">
+        <pc:chgData name="Julio César Iturra Sanhueza" userId="e2de3052-3501-452a-9806-eb4e3c41687c" providerId="ADAL" clId="{9573727F-4811-45D9-A52A-5B3A3BCA0CD9}" dt="2026-04-07T05:53:24.540" v="2241" actId="20577"/>
+        <pc:sldMkLst>
+          <pc:docMk/>
+          <pc:sldMk cId="3306130683" sldId="330"/>
         </pc:sldMkLst>
         <pc:spChg chg="mod">
-          <ac:chgData name="Julio César Iturra Sanhueza" userId="e2de3052-3501-452a-9806-eb4e3c41687c" providerId="ADAL" clId="{9573727F-4811-45D9-A52A-5B3A3BCA0CD9}" dt="2025-12-10T18:49:57.087" v="92" actId="1036"/>
+          <ac:chgData name="Julio César Iturra Sanhueza" userId="e2de3052-3501-452a-9806-eb4e3c41687c" providerId="ADAL" clId="{9573727F-4811-45D9-A52A-5B3A3BCA0CD9}" dt="2026-04-07T05:53:24.540" v="2241" actId="20577"/>
           <ac:spMkLst>
             <pc:docMk/>
-            <pc:sldMk cId="3351718079" sldId="297"/>
-            <ac:spMk id="2" creationId="{39C8F8B9-C6E2-1BCB-4655-4DB4F8F40041}"/>
+            <pc:sldMk cId="3306130683" sldId="330"/>
+            <ac:spMk id="9" creationId="{B3E2EBEE-DC27-CB99-1D0A-1CE2A7DB9A19}"/>
           </ac:spMkLst>
         </pc:spChg>
-        <pc:spChg chg="mod">
-          <ac:chgData name="Julio César Iturra Sanhueza" userId="e2de3052-3501-452a-9806-eb4e3c41687c" providerId="ADAL" clId="{9573727F-4811-45D9-A52A-5B3A3BCA0CD9}" dt="2025-12-10T18:49:57.087" v="92" actId="1036"/>
-          <ac:spMkLst>
-            <pc:docMk/>
-            <pc:sldMk cId="3351718079" sldId="297"/>
-            <ac:spMk id="6" creationId="{CAFE6412-0B96-376C-EF93-29FBFDA9B487}"/>
-          </ac:spMkLst>
-        </pc:spChg>
-        <pc:spChg chg="mod">
-          <ac:chgData name="Julio César Iturra Sanhueza" userId="e2de3052-3501-452a-9806-eb4e3c41687c" providerId="ADAL" clId="{9573727F-4811-45D9-A52A-5B3A3BCA0CD9}" dt="2025-12-10T18:49:57.087" v="92" actId="1036"/>
-          <ac:spMkLst>
-            <pc:docMk/>
-            <pc:sldMk cId="3351718079" sldId="297"/>
-            <ac:spMk id="7" creationId="{295AEBC4-4D07-2974-7627-5CA5410FDBC9}"/>
-          </ac:spMkLst>
-        </pc:spChg>
-        <pc:spChg chg="mod">
-          <ac:chgData name="Julio César Iturra Sanhueza" userId="e2de3052-3501-452a-9806-eb4e3c41687c" providerId="ADAL" clId="{9573727F-4811-45D9-A52A-5B3A3BCA0CD9}" dt="2025-12-10T18:49:57.087" v="92" actId="1036"/>
-          <ac:spMkLst>
-            <pc:docMk/>
-            <pc:sldMk cId="3351718079" sldId="297"/>
-            <ac:spMk id="25" creationId="{3B5390AC-E6A1-5AD6-97AF-5424C10FEAC1}"/>
-          </ac:spMkLst>
-        </pc:spChg>
-        <pc:spChg chg="mod">
-          <ac:chgData name="Julio César Iturra Sanhueza" userId="e2de3052-3501-452a-9806-eb4e3c41687c" providerId="ADAL" clId="{9573727F-4811-45D9-A52A-5B3A3BCA0CD9}" dt="2025-12-10T18:49:57.087" v="92" actId="1036"/>
-          <ac:spMkLst>
-            <pc:docMk/>
-            <pc:sldMk cId="3351718079" sldId="297"/>
-            <ac:spMk id="28" creationId="{25DFDE2A-CC59-D81A-8634-A7CC9DD74B48}"/>
-          </ac:spMkLst>
-        </pc:spChg>
-        <pc:spChg chg="mod">
-          <ac:chgData name="Julio César Iturra Sanhueza" userId="e2de3052-3501-452a-9806-eb4e3c41687c" providerId="ADAL" clId="{9573727F-4811-45D9-A52A-5B3A3BCA0CD9}" dt="2025-12-10T18:49:57.087" v="92" actId="1036"/>
-          <ac:spMkLst>
-            <pc:docMk/>
-            <pc:sldMk cId="3351718079" sldId="297"/>
-            <ac:spMk id="38" creationId="{C6FE5CC8-7129-B667-98A3-AC2E8BD4700D}"/>
-          </ac:spMkLst>
-        </pc:spChg>
-        <pc:spChg chg="mod">
-          <ac:chgData name="Julio César Iturra Sanhueza" userId="e2de3052-3501-452a-9806-eb4e3c41687c" providerId="ADAL" clId="{9573727F-4811-45D9-A52A-5B3A3BCA0CD9}" dt="2025-12-10T18:49:57.087" v="92" actId="1036"/>
-          <ac:spMkLst>
-            <pc:docMk/>
-            <pc:sldMk cId="3351718079" sldId="297"/>
-            <ac:spMk id="39" creationId="{749F3221-1C39-1578-1B5F-2896545C3069}"/>
-          </ac:spMkLst>
-        </pc:spChg>
-        <pc:spChg chg="mod">
-          <ac:chgData name="Julio César Iturra Sanhueza" userId="e2de3052-3501-452a-9806-eb4e3c41687c" providerId="ADAL" clId="{9573727F-4811-45D9-A52A-5B3A3BCA0CD9}" dt="2025-12-10T18:49:57.087" v="92" actId="1036"/>
-          <ac:spMkLst>
-            <pc:docMk/>
-            <pc:sldMk cId="3351718079" sldId="297"/>
-            <ac:spMk id="50" creationId="{6F2A4285-B47F-6E19-682F-FE16BF761B69}"/>
-          </ac:spMkLst>
-        </pc:spChg>
-        <pc:spChg chg="mod">
-          <ac:chgData name="Julio César Iturra Sanhueza" userId="e2de3052-3501-452a-9806-eb4e3c41687c" providerId="ADAL" clId="{9573727F-4811-45D9-A52A-5B3A3BCA0CD9}" dt="2025-12-10T18:49:57.087" v="92" actId="1036"/>
-          <ac:spMkLst>
-            <pc:docMk/>
-            <pc:sldMk cId="3351718079" sldId="297"/>
-            <ac:spMk id="52" creationId="{4295B050-5046-37BE-50D0-A0C678689BD8}"/>
-          </ac:spMkLst>
-        </pc:spChg>
-        <pc:spChg chg="mod">
-          <ac:chgData name="Julio César Iturra Sanhueza" userId="e2de3052-3501-452a-9806-eb4e3c41687c" providerId="ADAL" clId="{9573727F-4811-45D9-A52A-5B3A3BCA0CD9}" dt="2025-12-10T18:49:57.087" v="92" actId="1036"/>
-          <ac:spMkLst>
-            <pc:docMk/>
-            <pc:sldMk cId="3351718079" sldId="297"/>
-            <ac:spMk id="53" creationId="{9DDA89A9-1478-69F0-18DF-4F01CC408278}"/>
-          </ac:spMkLst>
-        </pc:spChg>
-        <pc:spChg chg="del mod">
-          <ac:chgData name="Julio César Iturra Sanhueza" userId="e2de3052-3501-452a-9806-eb4e3c41687c" providerId="ADAL" clId="{9573727F-4811-45D9-A52A-5B3A3BCA0CD9}" dt="2025-12-10T18:47:43.748" v="9" actId="478"/>
-          <ac:spMkLst>
-            <pc:docMk/>
-            <pc:sldMk cId="3351718079" sldId="297"/>
-            <ac:spMk id="127" creationId="{7EAFAAE5-346D-74F7-4723-3A99CD614ECF}"/>
-          </ac:spMkLst>
-        </pc:spChg>
-        <pc:spChg chg="mod">
-          <ac:chgData name="Julio César Iturra Sanhueza" userId="e2de3052-3501-452a-9806-eb4e3c41687c" providerId="ADAL" clId="{9573727F-4811-45D9-A52A-5B3A3BCA0CD9}" dt="2025-12-10T18:47:33.758" v="5" actId="6549"/>
-          <ac:spMkLst>
-            <pc:docMk/>
-            <pc:sldMk cId="3351718079" sldId="297"/>
-            <ac:spMk id="128" creationId="{E1487194-D584-2E1C-ED70-989ACBCD7F0D}"/>
-          </ac:spMkLst>
-        </pc:spChg>
-      </pc:sldChg>
-      <pc:sldChg chg="delSp modSp add mod ord">
-        <pc:chgData name="Julio César Iturra Sanhueza" userId="e2de3052-3501-452a-9806-eb4e3c41687c" providerId="ADAL" clId="{9573727F-4811-45D9-A52A-5B3A3BCA0CD9}" dt="2025-12-10T18:50:17.149" v="104" actId="478"/>
-        <pc:sldMkLst>
-          <pc:docMk/>
-          <pc:sldMk cId="1180629799" sldId="326"/>
-        </pc:sldMkLst>
-        <pc:spChg chg="del">
-          <ac:chgData name="Julio César Iturra Sanhueza" userId="e2de3052-3501-452a-9806-eb4e3c41687c" providerId="ADAL" clId="{9573727F-4811-45D9-A52A-5B3A3BCA0CD9}" dt="2025-12-10T18:50:12.961" v="99" actId="478"/>
-          <ac:spMkLst>
-            <pc:docMk/>
-            <pc:sldMk cId="1180629799" sldId="326"/>
-            <ac:spMk id="28" creationId="{0F77D9E8-6C59-D02B-9879-F09687927881}"/>
-          </ac:spMkLst>
-        </pc:spChg>
-        <pc:spChg chg="del">
-          <ac:chgData name="Julio César Iturra Sanhueza" userId="e2de3052-3501-452a-9806-eb4e3c41687c" providerId="ADAL" clId="{9573727F-4811-45D9-A52A-5B3A3BCA0CD9}" dt="2025-12-10T18:50:15.562" v="102" actId="478"/>
-          <ac:spMkLst>
-            <pc:docMk/>
-            <pc:sldMk cId="1180629799" sldId="326"/>
-            <ac:spMk id="38" creationId="{F4BB2AF5-E318-66D2-F801-5EACDE76C562}"/>
-          </ac:spMkLst>
-        </pc:spChg>
-        <pc:spChg chg="del">
-          <ac:chgData name="Julio César Iturra Sanhueza" userId="e2de3052-3501-452a-9806-eb4e3c41687c" providerId="ADAL" clId="{9573727F-4811-45D9-A52A-5B3A3BCA0CD9}" dt="2025-12-10T18:50:14.451" v="101" actId="478"/>
-          <ac:spMkLst>
-            <pc:docMk/>
-            <pc:sldMk cId="1180629799" sldId="326"/>
-            <ac:spMk id="39" creationId="{DC47E2A0-FA2F-9D64-9973-D0A5E0CA2C58}"/>
-          </ac:spMkLst>
-        </pc:spChg>
-        <pc:spChg chg="del">
-          <ac:chgData name="Julio César Iturra Sanhueza" userId="e2de3052-3501-452a-9806-eb4e3c41687c" providerId="ADAL" clId="{9573727F-4811-45D9-A52A-5B3A3BCA0CD9}" dt="2025-12-10T18:50:13.738" v="100" actId="478"/>
-          <ac:spMkLst>
-            <pc:docMk/>
-            <pc:sldMk cId="1180629799" sldId="326"/>
-            <ac:spMk id="40" creationId="{6CAA9318-6AE0-7AC9-FF2B-B251032FC370}"/>
-          </ac:spMkLst>
-        </pc:spChg>
-        <pc:spChg chg="del">
-          <ac:chgData name="Julio César Iturra Sanhueza" userId="e2de3052-3501-452a-9806-eb4e3c41687c" providerId="ADAL" clId="{9573727F-4811-45D9-A52A-5B3A3BCA0CD9}" dt="2025-12-10T18:50:16.606" v="103" actId="478"/>
-          <ac:spMkLst>
-            <pc:docMk/>
-            <pc:sldMk cId="1180629799" sldId="326"/>
-            <ac:spMk id="41" creationId="{A78F3012-5F21-26B8-544A-2C1DB59C961E}"/>
-          </ac:spMkLst>
-        </pc:spChg>
-        <pc:spChg chg="del">
-          <ac:chgData name="Julio César Iturra Sanhueza" userId="e2de3052-3501-452a-9806-eb4e3c41687c" providerId="ADAL" clId="{9573727F-4811-45D9-A52A-5B3A3BCA0CD9}" dt="2025-12-10T18:50:17.149" v="104" actId="478"/>
-          <ac:spMkLst>
-            <pc:docMk/>
-            <pc:sldMk cId="1180629799" sldId="326"/>
-            <ac:spMk id="42" creationId="{3F70D75A-EBFB-65DE-E50B-A5FD3063CC86}"/>
-          </ac:spMkLst>
-        </pc:spChg>
-        <pc:spChg chg="del">
-          <ac:chgData name="Julio César Iturra Sanhueza" userId="e2de3052-3501-452a-9806-eb4e3c41687c" providerId="ADAL" clId="{9573727F-4811-45D9-A52A-5B3A3BCA0CD9}" dt="2025-12-10T18:50:10.437" v="98" actId="478"/>
-          <ac:spMkLst>
-            <pc:docMk/>
-            <pc:sldMk cId="1180629799" sldId="326"/>
-            <ac:spMk id="60" creationId="{D32CACD2-1ED3-9DDF-AABA-00EDA6DB4ADB}"/>
-          </ac:spMkLst>
-        </pc:spChg>
-        <pc:cxnChg chg="del mod">
-          <ac:chgData name="Julio César Iturra Sanhueza" userId="e2de3052-3501-452a-9806-eb4e3c41687c" providerId="ADAL" clId="{9573727F-4811-45D9-A52A-5B3A3BCA0CD9}" dt="2025-12-10T18:50:08.950" v="97" actId="478"/>
-          <ac:cxnSpMkLst>
-            <pc:docMk/>
-            <pc:sldMk cId="1180629799" sldId="326"/>
-            <ac:cxnSpMk id="33" creationId="{38A5BE96-DDBF-0AF2-B2D8-AE2551B67635}"/>
-          </ac:cxnSpMkLst>
-        </pc:cxnChg>
       </pc:sldChg>
     </pc:docChg>
   </pc:docChgLst>
@@ -2538,6 +2772,260 @@
         </p:txBody>
       </p:sp>
     </p:spTree>
+  </p:cSld>
+  <p:clrMapOvr>
+    <a:masterClrMapping/>
+  </p:clrMapOvr>
+</p:notes>
+</file>
+
+<file path=ppt/notesSlides/notesSlide21.xml><?xml version="1.0" encoding="utf-8"?>
+<p:notes xmlns:a="http://schemas.openxmlformats.org/drawingml/2006/main" xmlns:r="http://schemas.openxmlformats.org/officeDocument/2006/relationships" xmlns:p="http://schemas.openxmlformats.org/presentationml/2006/main" showMasterSp="0" showMasterPhAnim="0">
+  <p:cSld>
+    <p:spTree>
+      <p:nvGrpSpPr>
+        <p:cNvPr id="1" name="Shape 123">
+          <a:extLst>
+            <a:ext uri="{FF2B5EF4-FFF2-40B4-BE49-F238E27FC236}">
+              <a16:creationId xmlns:a16="http://schemas.microsoft.com/office/drawing/2014/main" id="{B3906AFF-6B8A-3434-F43E-CC963ED791A2}"/>
+            </a:ext>
+          </a:extLst>
+        </p:cNvPr>
+        <p:cNvGrpSpPr/>
+        <p:nvPr/>
+      </p:nvGrpSpPr>
+      <p:grpSpPr>
+        <a:xfrm>
+          <a:off x="0" y="0"/>
+          <a:ext cx="0" cy="0"/>
+          <a:chOff x="0" y="0"/>
+          <a:chExt cx="0" cy="0"/>
+        </a:xfrm>
+      </p:grpSpPr>
+      <p:sp>
+        <p:nvSpPr>
+          <p:cNvPr id="124" name="Google Shape;124;g324f42fc18a_0_48:notes">
+            <a:extLst>
+              <a:ext uri="{FF2B5EF4-FFF2-40B4-BE49-F238E27FC236}">
+                <a16:creationId xmlns:a16="http://schemas.microsoft.com/office/drawing/2014/main" id="{D5BB3E5F-B5CC-720E-F481-6A97DFAAD76B}"/>
+              </a:ext>
+            </a:extLst>
+          </p:cNvPr>
+          <p:cNvSpPr>
+            <a:spLocks noGrp="1" noRot="1" noChangeAspect="1"/>
+          </p:cNvSpPr>
+          <p:nvPr>
+            <p:ph type="sldImg" idx="2"/>
+          </p:nvPr>
+        </p:nvSpPr>
+        <p:spPr>
+          <a:xfrm>
+            <a:off x="381000" y="685800"/>
+            <a:ext cx="6096000" cy="3429000"/>
+          </a:xfrm>
+          <a:custGeom>
+            <a:avLst/>
+            <a:gdLst/>
+            <a:ahLst/>
+            <a:cxnLst/>
+            <a:rect l="l" t="t" r="r" b="b"/>
+            <a:pathLst>
+              <a:path w="120000" h="120000" extrusionOk="0">
+                <a:moveTo>
+                  <a:pt x="0" y="0"/>
+                </a:moveTo>
+                <a:lnTo>
+                  <a:pt x="120000" y="0"/>
+                </a:lnTo>
+                <a:lnTo>
+                  <a:pt x="120000" y="120000"/>
+                </a:lnTo>
+                <a:lnTo>
+                  <a:pt x="0" y="120000"/>
+                </a:lnTo>
+                <a:close/>
+              </a:path>
+            </a:pathLst>
+          </a:custGeom>
+        </p:spPr>
+      </p:sp>
+      <p:sp>
+        <p:nvSpPr>
+          <p:cNvPr id="125" name="Google Shape;125;g324f42fc18a_0_48:notes">
+            <a:extLst>
+              <a:ext uri="{FF2B5EF4-FFF2-40B4-BE49-F238E27FC236}">
+                <a16:creationId xmlns:a16="http://schemas.microsoft.com/office/drawing/2014/main" id="{6AEE11F9-A974-1D88-E4AA-DEB752842463}"/>
+              </a:ext>
+            </a:extLst>
+          </p:cNvPr>
+          <p:cNvSpPr txBox="1">
+            <a:spLocks noGrp="1"/>
+          </p:cNvSpPr>
+          <p:nvPr>
+            <p:ph type="body" idx="1"/>
+          </p:nvPr>
+        </p:nvSpPr>
+        <p:spPr>
+          <a:xfrm>
+            <a:off x="685800" y="4343400"/>
+            <a:ext cx="5486400" cy="4114800"/>
+          </a:xfrm>
+          <a:prstGeom prst="rect">
+            <a:avLst/>
+          </a:prstGeom>
+        </p:spPr>
+        <p:txBody>
+          <a:bodyPr spcFirstLastPara="1" wrap="square" lIns="91425" tIns="91425" rIns="91425" bIns="91425" anchor="t" anchorCtr="0">
+            <a:noAutofit/>
+          </a:bodyPr>
+          <a:lstStyle/>
+          <a:p>
+            <a:pPr marL="0" lvl="0" indent="0" algn="l" rtl="0">
+              <a:spcBef>
+                <a:spcPts val="0"/>
+              </a:spcBef>
+              <a:spcAft>
+                <a:spcPts val="0"/>
+              </a:spcAft>
+              <a:buNone/>
+            </a:pPr>
+            <a:endParaRPr/>
+          </a:p>
+        </p:txBody>
+      </p:sp>
+    </p:spTree>
+    <p:extLst>
+      <p:ext uri="{BB962C8B-B14F-4D97-AF65-F5344CB8AC3E}">
+        <p14:creationId xmlns:p14="http://schemas.microsoft.com/office/powerpoint/2010/main" val="4279704065"/>
+      </p:ext>
+    </p:extLst>
+  </p:cSld>
+  <p:clrMapOvr>
+    <a:masterClrMapping/>
+  </p:clrMapOvr>
+</p:notes>
+</file>
+
+<file path=ppt/notesSlides/notesSlide22.xml><?xml version="1.0" encoding="utf-8"?>
+<p:notes xmlns:a="http://schemas.openxmlformats.org/drawingml/2006/main" xmlns:r="http://schemas.openxmlformats.org/officeDocument/2006/relationships" xmlns:p="http://schemas.openxmlformats.org/presentationml/2006/main" showMasterSp="0" showMasterPhAnim="0">
+  <p:cSld>
+    <p:spTree>
+      <p:nvGrpSpPr>
+        <p:cNvPr id="1" name="Shape 123">
+          <a:extLst>
+            <a:ext uri="{FF2B5EF4-FFF2-40B4-BE49-F238E27FC236}">
+              <a16:creationId xmlns:a16="http://schemas.microsoft.com/office/drawing/2014/main" id="{5804F83E-A849-FE17-D58B-79BDEA2C4D4E}"/>
+            </a:ext>
+          </a:extLst>
+        </p:cNvPr>
+        <p:cNvGrpSpPr/>
+        <p:nvPr/>
+      </p:nvGrpSpPr>
+      <p:grpSpPr>
+        <a:xfrm>
+          <a:off x="0" y="0"/>
+          <a:ext cx="0" cy="0"/>
+          <a:chOff x="0" y="0"/>
+          <a:chExt cx="0" cy="0"/>
+        </a:xfrm>
+      </p:grpSpPr>
+      <p:sp>
+        <p:nvSpPr>
+          <p:cNvPr id="124" name="Google Shape;124;g324f42fc18a_0_48:notes">
+            <a:extLst>
+              <a:ext uri="{FF2B5EF4-FFF2-40B4-BE49-F238E27FC236}">
+                <a16:creationId xmlns:a16="http://schemas.microsoft.com/office/drawing/2014/main" id="{3DE8FAB6-3F1E-2947-F46D-4FAC8990EBE9}"/>
+              </a:ext>
+            </a:extLst>
+          </p:cNvPr>
+          <p:cNvSpPr>
+            <a:spLocks noGrp="1" noRot="1" noChangeAspect="1"/>
+          </p:cNvSpPr>
+          <p:nvPr>
+            <p:ph type="sldImg" idx="2"/>
+          </p:nvPr>
+        </p:nvSpPr>
+        <p:spPr>
+          <a:xfrm>
+            <a:off x="381000" y="685800"/>
+            <a:ext cx="6096000" cy="3429000"/>
+          </a:xfrm>
+          <a:custGeom>
+            <a:avLst/>
+            <a:gdLst/>
+            <a:ahLst/>
+            <a:cxnLst/>
+            <a:rect l="l" t="t" r="r" b="b"/>
+            <a:pathLst>
+              <a:path w="120000" h="120000" extrusionOk="0">
+                <a:moveTo>
+                  <a:pt x="0" y="0"/>
+                </a:moveTo>
+                <a:lnTo>
+                  <a:pt x="120000" y="0"/>
+                </a:lnTo>
+                <a:lnTo>
+                  <a:pt x="120000" y="120000"/>
+                </a:lnTo>
+                <a:lnTo>
+                  <a:pt x="0" y="120000"/>
+                </a:lnTo>
+                <a:close/>
+              </a:path>
+            </a:pathLst>
+          </a:custGeom>
+        </p:spPr>
+      </p:sp>
+      <p:sp>
+        <p:nvSpPr>
+          <p:cNvPr id="125" name="Google Shape;125;g324f42fc18a_0_48:notes">
+            <a:extLst>
+              <a:ext uri="{FF2B5EF4-FFF2-40B4-BE49-F238E27FC236}">
+                <a16:creationId xmlns:a16="http://schemas.microsoft.com/office/drawing/2014/main" id="{81BEA6E9-0A72-D9DD-1ECE-6651824105D1}"/>
+              </a:ext>
+            </a:extLst>
+          </p:cNvPr>
+          <p:cNvSpPr txBox="1">
+            <a:spLocks noGrp="1"/>
+          </p:cNvSpPr>
+          <p:nvPr>
+            <p:ph type="body" idx="1"/>
+          </p:nvPr>
+        </p:nvSpPr>
+        <p:spPr>
+          <a:xfrm>
+            <a:off x="685800" y="4343400"/>
+            <a:ext cx="5486400" cy="4114800"/>
+          </a:xfrm>
+          <a:prstGeom prst="rect">
+            <a:avLst/>
+          </a:prstGeom>
+        </p:spPr>
+        <p:txBody>
+          <a:bodyPr spcFirstLastPara="1" wrap="square" lIns="91425" tIns="91425" rIns="91425" bIns="91425" anchor="t" anchorCtr="0">
+            <a:noAutofit/>
+          </a:bodyPr>
+          <a:lstStyle/>
+          <a:p>
+            <a:pPr marL="0" lvl="0" indent="0" algn="l" rtl="0">
+              <a:spcBef>
+                <a:spcPts val="0"/>
+              </a:spcBef>
+              <a:spcAft>
+                <a:spcPts val="0"/>
+              </a:spcAft>
+              <a:buNone/>
+            </a:pPr>
+            <a:endParaRPr/>
+          </a:p>
+        </p:txBody>
+      </p:sp>
+    </p:spTree>
+    <p:extLst>
+      <p:ext uri="{BB962C8B-B14F-4D97-AF65-F5344CB8AC3E}">
+        <p14:creationId xmlns:p14="http://schemas.microsoft.com/office/powerpoint/2010/main" val="471476757"/>
+      </p:ext>
+    </p:extLst>
   </p:cSld>
   <p:clrMapOvr>
     <a:masterClrMapping/>
@@ -19909,6 +20397,944 @@
 </p:sld>
 </file>
 
+<file path=ppt/slides/slide29.xml><?xml version="1.0" encoding="utf-8"?>
+<p:sld xmlns:a="http://schemas.openxmlformats.org/drawingml/2006/main" xmlns:r="http://schemas.openxmlformats.org/officeDocument/2006/relationships" xmlns:p="http://schemas.openxmlformats.org/presentationml/2006/main">
+  <p:cSld>
+    <p:spTree>
+      <p:nvGrpSpPr>
+        <p:cNvPr id="1" name=""/>
+        <p:cNvGrpSpPr/>
+        <p:nvPr/>
+      </p:nvGrpSpPr>
+      <p:grpSpPr>
+        <a:xfrm>
+          <a:off x="0" y="0"/>
+          <a:ext cx="0" cy="0"/>
+          <a:chOff x="0" y="0"/>
+          <a:chExt cx="0" cy="0"/>
+        </a:xfrm>
+      </p:grpSpPr>
+      <p:sp>
+        <p:nvSpPr>
+          <p:cNvPr id="47" name="TextBox 46">
+            <a:extLst>
+              <a:ext uri="{FF2B5EF4-FFF2-40B4-BE49-F238E27FC236}">
+                <a16:creationId xmlns:a16="http://schemas.microsoft.com/office/drawing/2014/main" id="{C9931CF8-F02C-0954-352E-3C48585135B6}"/>
+              </a:ext>
+            </a:extLst>
+          </p:cNvPr>
+          <p:cNvSpPr txBox="1"/>
+          <p:nvPr/>
+        </p:nvSpPr>
+        <p:spPr>
+          <a:xfrm>
+            <a:off x="1141310" y="2449147"/>
+            <a:ext cx="6678008" cy="1384995"/>
+          </a:xfrm>
+          <a:prstGeom prst="rect">
+            <a:avLst/>
+          </a:prstGeom>
+          <a:ln>
+            <a:prstDash val="sysDot"/>
+          </a:ln>
+        </p:spPr>
+        <p:style>
+          <a:lnRef idx="2">
+            <a:schemeClr val="dk1"/>
+          </a:lnRef>
+          <a:fillRef idx="1">
+            <a:schemeClr val="lt1"/>
+          </a:fillRef>
+          <a:effectRef idx="0">
+            <a:schemeClr val="dk1"/>
+          </a:effectRef>
+          <a:fontRef idx="minor">
+            <a:schemeClr val="dk1"/>
+          </a:fontRef>
+        </p:style>
+        <p:txBody>
+          <a:bodyPr wrap="square" rtlCol="0">
+            <a:spAutoFit/>
+          </a:bodyPr>
+          <a:lstStyle/>
+          <a:p>
+            <a:r>
+              <a:rPr lang="es-CL" dirty="0" err="1">
+                <a:latin typeface="Times New Roman" panose="02020603050405020304" pitchFamily="18" charset="0"/>
+                <a:cs typeface="Times New Roman" panose="02020603050405020304" pitchFamily="18" charset="0"/>
+              </a:rPr>
+              <a:t>This</a:t>
+            </a:r>
+            <a:r>
+              <a:rPr lang="es-CL" dirty="0">
+                <a:latin typeface="Times New Roman" panose="02020603050405020304" pitchFamily="18" charset="0"/>
+                <a:cs typeface="Times New Roman" panose="02020603050405020304" pitchFamily="18" charset="0"/>
+              </a:rPr>
+              <a:t> </a:t>
+            </a:r>
+            <a:r>
+              <a:rPr lang="es-CL" dirty="0" err="1">
+                <a:latin typeface="Times New Roman" panose="02020603050405020304" pitchFamily="18" charset="0"/>
+                <a:cs typeface="Times New Roman" panose="02020603050405020304" pitchFamily="18" charset="0"/>
+              </a:rPr>
+              <a:t>study</a:t>
+            </a:r>
+            <a:r>
+              <a:rPr lang="es-CL" dirty="0">
+                <a:latin typeface="Times New Roman" panose="02020603050405020304" pitchFamily="18" charset="0"/>
+                <a:cs typeface="Times New Roman" panose="02020603050405020304" pitchFamily="18" charset="0"/>
+              </a:rPr>
+              <a:t>:</a:t>
+            </a:r>
+          </a:p>
+          <a:p>
+            <a:endParaRPr lang="es-CL" dirty="0">
+              <a:latin typeface="Times New Roman" panose="02020603050405020304" pitchFamily="18" charset="0"/>
+              <a:cs typeface="Times New Roman" panose="02020603050405020304" pitchFamily="18" charset="0"/>
+            </a:endParaRPr>
+          </a:p>
+          <a:p>
+            <a:endParaRPr lang="es-CL" dirty="0">
+              <a:latin typeface="Times New Roman" panose="02020603050405020304" pitchFamily="18" charset="0"/>
+              <a:cs typeface="Times New Roman" panose="02020603050405020304" pitchFamily="18" charset="0"/>
+            </a:endParaRPr>
+          </a:p>
+          <a:p>
+            <a:endParaRPr lang="es-CL" dirty="0">
+              <a:latin typeface="Times New Roman" panose="02020603050405020304" pitchFamily="18" charset="0"/>
+              <a:cs typeface="Times New Roman" panose="02020603050405020304" pitchFamily="18" charset="0"/>
+            </a:endParaRPr>
+          </a:p>
+          <a:p>
+            <a:endParaRPr lang="es-CL" dirty="0">
+              <a:latin typeface="Times New Roman" panose="02020603050405020304" pitchFamily="18" charset="0"/>
+              <a:cs typeface="Times New Roman" panose="02020603050405020304" pitchFamily="18" charset="0"/>
+            </a:endParaRPr>
+          </a:p>
+          <a:p>
+            <a:endParaRPr lang="es-CL" dirty="0">
+              <a:latin typeface="Times New Roman" panose="02020603050405020304" pitchFamily="18" charset="0"/>
+              <a:cs typeface="Times New Roman" panose="02020603050405020304" pitchFamily="18" charset="0"/>
+            </a:endParaRPr>
+          </a:p>
+        </p:txBody>
+      </p:sp>
+      <p:sp>
+        <p:nvSpPr>
+          <p:cNvPr id="5" name="TextBox 4">
+            <a:extLst>
+              <a:ext uri="{FF2B5EF4-FFF2-40B4-BE49-F238E27FC236}">
+                <a16:creationId xmlns:a16="http://schemas.microsoft.com/office/drawing/2014/main" id="{3BCE2E96-C589-7EBD-3E3C-892D6743E3D0}"/>
+              </a:ext>
+            </a:extLst>
+          </p:cNvPr>
+          <p:cNvSpPr txBox="1"/>
+          <p:nvPr/>
+        </p:nvSpPr>
+        <p:spPr>
+          <a:xfrm>
+            <a:off x="5100321" y="2936402"/>
+            <a:ext cx="1440000" cy="540000"/>
+          </a:xfrm>
+          <a:prstGeom prst="rect">
+            <a:avLst/>
+          </a:prstGeom>
+        </p:spPr>
+        <p:style>
+          <a:lnRef idx="2">
+            <a:schemeClr val="dk1"/>
+          </a:lnRef>
+          <a:fillRef idx="1">
+            <a:schemeClr val="lt1"/>
+          </a:fillRef>
+          <a:effectRef idx="0">
+            <a:schemeClr val="dk1"/>
+          </a:effectRef>
+          <a:fontRef idx="minor">
+            <a:schemeClr val="dk1"/>
+          </a:fontRef>
+        </p:style>
+        <p:txBody>
+          <a:bodyPr wrap="square" rtlCol="0" anchor="ctr">
+            <a:spAutoFit/>
+          </a:bodyPr>
+          <a:lstStyle/>
+          <a:p>
+            <a:pPr algn="ctr"/>
+            <a:r>
+              <a:rPr lang="es-CL" dirty="0" err="1">
+                <a:latin typeface="Times New Roman" panose="02020603050405020304" pitchFamily="18" charset="0"/>
+                <a:cs typeface="Times New Roman" panose="02020603050405020304" pitchFamily="18" charset="0"/>
+              </a:rPr>
+              <a:t>Attitudes</a:t>
+            </a:r>
+            <a:r>
+              <a:rPr lang="es-CL" dirty="0">
+                <a:latin typeface="Times New Roman" panose="02020603050405020304" pitchFamily="18" charset="0"/>
+                <a:cs typeface="Times New Roman" panose="02020603050405020304" pitchFamily="18" charset="0"/>
+              </a:rPr>
+              <a:t> and</a:t>
+            </a:r>
+          </a:p>
+          <a:p>
+            <a:pPr algn="ctr"/>
+            <a:r>
+              <a:rPr lang="es-CL" dirty="0" err="1">
+                <a:latin typeface="Times New Roman" panose="02020603050405020304" pitchFamily="18" charset="0"/>
+                <a:cs typeface="Times New Roman" panose="02020603050405020304" pitchFamily="18" charset="0"/>
+              </a:rPr>
+              <a:t>Behaviors</a:t>
+            </a:r>
+            <a:endParaRPr lang="es-CL" dirty="0">
+              <a:latin typeface="Times New Roman" panose="02020603050405020304" pitchFamily="18" charset="0"/>
+              <a:cs typeface="Times New Roman" panose="02020603050405020304" pitchFamily="18" charset="0"/>
+            </a:endParaRPr>
+          </a:p>
+        </p:txBody>
+      </p:sp>
+      <p:sp>
+        <p:nvSpPr>
+          <p:cNvPr id="9" name="TextBox 8">
+            <a:extLst>
+              <a:ext uri="{FF2B5EF4-FFF2-40B4-BE49-F238E27FC236}">
+                <a16:creationId xmlns:a16="http://schemas.microsoft.com/office/drawing/2014/main" id="{F9E96F2C-10C7-0D70-0D98-9D4B4CF8B55E}"/>
+              </a:ext>
+            </a:extLst>
+          </p:cNvPr>
+          <p:cNvSpPr txBox="1"/>
+          <p:nvPr/>
+        </p:nvSpPr>
+        <p:spPr>
+          <a:xfrm>
+            <a:off x="1141310" y="346311"/>
+            <a:ext cx="1733973" cy="523220"/>
+          </a:xfrm>
+          <a:prstGeom prst="rect">
+            <a:avLst/>
+          </a:prstGeom>
+        </p:spPr>
+        <p:style>
+          <a:lnRef idx="2">
+            <a:schemeClr val="dk1"/>
+          </a:lnRef>
+          <a:fillRef idx="1">
+            <a:schemeClr val="lt1"/>
+          </a:fillRef>
+          <a:effectRef idx="0">
+            <a:schemeClr val="dk1"/>
+          </a:effectRef>
+          <a:fontRef idx="minor">
+            <a:schemeClr val="dk1"/>
+          </a:fontRef>
+        </p:style>
+        <p:txBody>
+          <a:bodyPr wrap="square" rtlCol="0">
+            <a:spAutoFit/>
+          </a:bodyPr>
+          <a:lstStyle/>
+          <a:p>
+            <a:pPr algn="ctr"/>
+            <a:r>
+              <a:rPr lang="es-CL" dirty="0" err="1">
+                <a:latin typeface="Times New Roman" panose="02020603050405020304" pitchFamily="18" charset="0"/>
+                <a:cs typeface="Times New Roman" panose="02020603050405020304" pitchFamily="18" charset="0"/>
+              </a:rPr>
+              <a:t>Structural</a:t>
+            </a:r>
+            <a:r>
+              <a:rPr lang="es-CL" dirty="0">
+                <a:latin typeface="Times New Roman" panose="02020603050405020304" pitchFamily="18" charset="0"/>
+                <a:cs typeface="Times New Roman" panose="02020603050405020304" pitchFamily="18" charset="0"/>
+              </a:rPr>
+              <a:t> /Societal  </a:t>
+            </a:r>
+            <a:r>
+              <a:rPr lang="es-CL" dirty="0" err="1">
+                <a:latin typeface="Times New Roman" panose="02020603050405020304" pitchFamily="18" charset="0"/>
+                <a:cs typeface="Times New Roman" panose="02020603050405020304" pitchFamily="18" charset="0"/>
+              </a:rPr>
+              <a:t>parameters</a:t>
+            </a:r>
+            <a:r>
+              <a:rPr lang="es-CL" dirty="0">
+                <a:latin typeface="Times New Roman" panose="02020603050405020304" pitchFamily="18" charset="0"/>
+                <a:cs typeface="Times New Roman" panose="02020603050405020304" pitchFamily="18" charset="0"/>
+              </a:rPr>
+              <a:t> </a:t>
+            </a:r>
+          </a:p>
+        </p:txBody>
+      </p:sp>
+      <p:cxnSp>
+        <p:nvCxnSpPr>
+          <p:cNvPr id="10" name="Straight Arrow Connector 9">
+            <a:extLst>
+              <a:ext uri="{FF2B5EF4-FFF2-40B4-BE49-F238E27FC236}">
+                <a16:creationId xmlns:a16="http://schemas.microsoft.com/office/drawing/2014/main" id="{36237E22-1DDE-4D4E-6A09-85AB865572CE}"/>
+              </a:ext>
+            </a:extLst>
+          </p:cNvPr>
+          <p:cNvCxnSpPr>
+            <a:cxnSpLocks/>
+            <a:stCxn id="9" idx="2"/>
+            <a:endCxn id="5" idx="1"/>
+          </p:cNvCxnSpPr>
+          <p:nvPr/>
+        </p:nvCxnSpPr>
+        <p:spPr>
+          <a:xfrm>
+            <a:off x="2008297" y="869531"/>
+            <a:ext cx="3092024" cy="2336871"/>
+          </a:xfrm>
+          <a:prstGeom prst="straightConnector1">
+            <a:avLst/>
+          </a:prstGeom>
+          <a:ln>
+            <a:prstDash val="dash"/>
+            <a:tailEnd type="triangle"/>
+          </a:ln>
+        </p:spPr>
+        <p:style>
+          <a:lnRef idx="1">
+            <a:schemeClr val="dk1"/>
+          </a:lnRef>
+          <a:fillRef idx="0">
+            <a:schemeClr val="dk1"/>
+          </a:fillRef>
+          <a:effectRef idx="0">
+            <a:schemeClr val="dk1"/>
+          </a:effectRef>
+          <a:fontRef idx="minor">
+            <a:schemeClr val="tx1"/>
+          </a:fontRef>
+        </p:style>
+      </p:cxnSp>
+      <p:sp>
+        <p:nvSpPr>
+          <p:cNvPr id="24" name="Oval 23">
+            <a:extLst>
+              <a:ext uri="{FF2B5EF4-FFF2-40B4-BE49-F238E27FC236}">
+                <a16:creationId xmlns:a16="http://schemas.microsoft.com/office/drawing/2014/main" id="{548D0691-4728-659F-AB43-18B5DD8BA13F}"/>
+              </a:ext>
+            </a:extLst>
+          </p:cNvPr>
+          <p:cNvSpPr/>
+          <p:nvPr/>
+        </p:nvSpPr>
+        <p:spPr>
+          <a:xfrm>
+            <a:off x="6091319" y="121921"/>
+            <a:ext cx="1728000" cy="972000"/>
+          </a:xfrm>
+          <a:prstGeom prst="ellipse">
+            <a:avLst/>
+          </a:prstGeom>
+        </p:spPr>
+        <p:style>
+          <a:lnRef idx="2">
+            <a:schemeClr val="dk1"/>
+          </a:lnRef>
+          <a:fillRef idx="1">
+            <a:schemeClr val="lt1"/>
+          </a:fillRef>
+          <a:effectRef idx="0">
+            <a:schemeClr val="dk1"/>
+          </a:effectRef>
+          <a:fontRef idx="minor">
+            <a:schemeClr val="dk1"/>
+          </a:fontRef>
+        </p:style>
+        <p:txBody>
+          <a:bodyPr rtlCol="0" anchor="ctr"/>
+          <a:lstStyle/>
+          <a:p>
+            <a:pPr algn="ctr"/>
+            <a:r>
+              <a:rPr lang="es-CL" dirty="0">
+                <a:latin typeface="Times New Roman" panose="02020603050405020304" pitchFamily="18" charset="0"/>
+                <a:cs typeface="Times New Roman" panose="02020603050405020304" pitchFamily="18" charset="0"/>
+              </a:rPr>
+              <a:t>Social </a:t>
+            </a:r>
+            <a:r>
+              <a:rPr lang="es-CL" dirty="0" err="1">
+                <a:latin typeface="Times New Roman" panose="02020603050405020304" pitchFamily="18" charset="0"/>
+                <a:cs typeface="Times New Roman" panose="02020603050405020304" pitchFamily="18" charset="0"/>
+              </a:rPr>
+              <a:t>Cohesion</a:t>
+            </a:r>
+            <a:endParaRPr lang="es-CL" dirty="0">
+              <a:latin typeface="Times New Roman" panose="02020603050405020304" pitchFamily="18" charset="0"/>
+              <a:cs typeface="Times New Roman" panose="02020603050405020304" pitchFamily="18" charset="0"/>
+            </a:endParaRPr>
+          </a:p>
+        </p:txBody>
+      </p:sp>
+      <p:cxnSp>
+        <p:nvCxnSpPr>
+          <p:cNvPr id="25" name="Straight Arrow Connector 24">
+            <a:extLst>
+              <a:ext uri="{FF2B5EF4-FFF2-40B4-BE49-F238E27FC236}">
+                <a16:creationId xmlns:a16="http://schemas.microsoft.com/office/drawing/2014/main" id="{F8D50FC4-E2A9-308E-23E4-6DC3296093B5}"/>
+              </a:ext>
+            </a:extLst>
+          </p:cNvPr>
+          <p:cNvCxnSpPr>
+            <a:cxnSpLocks/>
+            <a:stCxn id="5" idx="3"/>
+            <a:endCxn id="24" idx="4"/>
+          </p:cNvCxnSpPr>
+          <p:nvPr/>
+        </p:nvCxnSpPr>
+        <p:spPr>
+          <a:xfrm flipV="1">
+            <a:off x="6540321" y="1093921"/>
+            <a:ext cx="414998" cy="2112481"/>
+          </a:xfrm>
+          <a:prstGeom prst="straightConnector1">
+            <a:avLst/>
+          </a:prstGeom>
+          <a:ln>
+            <a:prstDash val="dash"/>
+            <a:tailEnd type="triangle"/>
+          </a:ln>
+        </p:spPr>
+        <p:style>
+          <a:lnRef idx="1">
+            <a:schemeClr val="dk1"/>
+          </a:lnRef>
+          <a:fillRef idx="0">
+            <a:schemeClr val="dk1"/>
+          </a:fillRef>
+          <a:effectRef idx="0">
+            <a:schemeClr val="dk1"/>
+          </a:effectRef>
+          <a:fontRef idx="minor">
+            <a:schemeClr val="tx1"/>
+          </a:fontRef>
+        </p:style>
+      </p:cxnSp>
+      <p:cxnSp>
+        <p:nvCxnSpPr>
+          <p:cNvPr id="28" name="Straight Arrow Connector 27">
+            <a:extLst>
+              <a:ext uri="{FF2B5EF4-FFF2-40B4-BE49-F238E27FC236}">
+                <a16:creationId xmlns:a16="http://schemas.microsoft.com/office/drawing/2014/main" id="{8CBA71FC-1A37-60E1-20F1-5E575653A50E}"/>
+              </a:ext>
+            </a:extLst>
+          </p:cNvPr>
+          <p:cNvCxnSpPr>
+            <a:cxnSpLocks/>
+            <a:stCxn id="9" idx="3"/>
+            <a:endCxn id="24" idx="2"/>
+          </p:cNvCxnSpPr>
+          <p:nvPr/>
+        </p:nvCxnSpPr>
+        <p:spPr>
+          <a:xfrm>
+            <a:off x="2875283" y="607921"/>
+            <a:ext cx="3216036" cy="0"/>
+          </a:xfrm>
+          <a:prstGeom prst="straightConnector1">
+            <a:avLst/>
+          </a:prstGeom>
+          <a:ln>
+            <a:prstDash val="dash"/>
+            <a:tailEnd type="triangle"/>
+          </a:ln>
+        </p:spPr>
+        <p:style>
+          <a:lnRef idx="1">
+            <a:schemeClr val="dk1"/>
+          </a:lnRef>
+          <a:fillRef idx="0">
+            <a:schemeClr val="dk1"/>
+          </a:fillRef>
+          <a:effectRef idx="0">
+            <a:schemeClr val="dk1"/>
+          </a:effectRef>
+          <a:fontRef idx="minor">
+            <a:schemeClr val="tx1"/>
+          </a:fontRef>
+        </p:style>
+      </p:cxnSp>
+      <p:sp>
+        <p:nvSpPr>
+          <p:cNvPr id="36" name="TextBox 35">
+            <a:extLst>
+              <a:ext uri="{FF2B5EF4-FFF2-40B4-BE49-F238E27FC236}">
+                <a16:creationId xmlns:a16="http://schemas.microsoft.com/office/drawing/2014/main" id="{B4B51116-0A09-948A-9476-F8D50D29F792}"/>
+              </a:ext>
+            </a:extLst>
+          </p:cNvPr>
+          <p:cNvSpPr txBox="1"/>
+          <p:nvPr/>
+        </p:nvSpPr>
+        <p:spPr>
+          <a:xfrm>
+            <a:off x="2523064" y="2936402"/>
+            <a:ext cx="1440000" cy="523220"/>
+          </a:xfrm>
+          <a:prstGeom prst="rect">
+            <a:avLst/>
+          </a:prstGeom>
+        </p:spPr>
+        <p:style>
+          <a:lnRef idx="2">
+            <a:schemeClr val="dk1"/>
+          </a:lnRef>
+          <a:fillRef idx="1">
+            <a:schemeClr val="lt1"/>
+          </a:fillRef>
+          <a:effectRef idx="0">
+            <a:schemeClr val="dk1"/>
+          </a:effectRef>
+          <a:fontRef idx="minor">
+            <a:schemeClr val="dk1"/>
+          </a:fontRef>
+        </p:style>
+        <p:txBody>
+          <a:bodyPr wrap="square" rtlCol="0" anchor="ctr">
+            <a:spAutoFit/>
+          </a:bodyPr>
+          <a:lstStyle/>
+          <a:p>
+            <a:pPr algn="ctr"/>
+            <a:r>
+              <a:rPr lang="es-CL" dirty="0">
+                <a:latin typeface="Times New Roman" panose="02020603050405020304" pitchFamily="18" charset="0"/>
+                <a:cs typeface="Times New Roman" panose="02020603050405020304" pitchFamily="18" charset="0"/>
+              </a:rPr>
+              <a:t>Social </a:t>
+            </a:r>
+          </a:p>
+          <a:p>
+            <a:pPr algn="ctr"/>
+            <a:r>
+              <a:rPr lang="es-CL" dirty="0">
+                <a:latin typeface="Times New Roman" panose="02020603050405020304" pitchFamily="18" charset="0"/>
+                <a:cs typeface="Times New Roman" panose="02020603050405020304" pitchFamily="18" charset="0"/>
+              </a:rPr>
+              <a:t>Positions</a:t>
+            </a:r>
+          </a:p>
+        </p:txBody>
+      </p:sp>
+      <p:cxnSp>
+        <p:nvCxnSpPr>
+          <p:cNvPr id="37" name="Straight Arrow Connector 36">
+            <a:extLst>
+              <a:ext uri="{FF2B5EF4-FFF2-40B4-BE49-F238E27FC236}">
+                <a16:creationId xmlns:a16="http://schemas.microsoft.com/office/drawing/2014/main" id="{EBF629DC-BB86-F0E1-D42C-5C9970A0AA05}"/>
+              </a:ext>
+            </a:extLst>
+          </p:cNvPr>
+          <p:cNvCxnSpPr>
+            <a:cxnSpLocks/>
+            <a:stCxn id="36" idx="3"/>
+            <a:endCxn id="5" idx="1"/>
+          </p:cNvCxnSpPr>
+          <p:nvPr/>
+        </p:nvCxnSpPr>
+        <p:spPr>
+          <a:xfrm>
+            <a:off x="3963064" y="3198012"/>
+            <a:ext cx="1137257" cy="8390"/>
+          </a:xfrm>
+          <a:prstGeom prst="straightConnector1">
+            <a:avLst/>
+          </a:prstGeom>
+          <a:ln w="28575">
+            <a:tailEnd type="triangle"/>
+          </a:ln>
+        </p:spPr>
+        <p:style>
+          <a:lnRef idx="1">
+            <a:schemeClr val="dk1"/>
+          </a:lnRef>
+          <a:fillRef idx="0">
+            <a:schemeClr val="dk1"/>
+          </a:fillRef>
+          <a:effectRef idx="0">
+            <a:schemeClr val="dk1"/>
+          </a:effectRef>
+          <a:fontRef idx="minor">
+            <a:schemeClr val="tx1"/>
+          </a:fontRef>
+        </p:style>
+      </p:cxnSp>
+      <p:cxnSp>
+        <p:nvCxnSpPr>
+          <p:cNvPr id="40" name="Straight Arrow Connector 39">
+            <a:extLst>
+              <a:ext uri="{FF2B5EF4-FFF2-40B4-BE49-F238E27FC236}">
+                <a16:creationId xmlns:a16="http://schemas.microsoft.com/office/drawing/2014/main" id="{56F5D1F6-61F5-84D4-B567-BCA2014E0E98}"/>
+              </a:ext>
+            </a:extLst>
+          </p:cNvPr>
+          <p:cNvCxnSpPr>
+            <a:cxnSpLocks/>
+            <a:stCxn id="9" idx="2"/>
+            <a:endCxn id="36" idx="0"/>
+          </p:cNvCxnSpPr>
+          <p:nvPr/>
+        </p:nvCxnSpPr>
+        <p:spPr>
+          <a:xfrm>
+            <a:off x="2008297" y="869531"/>
+            <a:ext cx="1234767" cy="2066871"/>
+          </a:xfrm>
+          <a:prstGeom prst="straightConnector1">
+            <a:avLst/>
+          </a:prstGeom>
+          <a:ln>
+            <a:prstDash val="dash"/>
+            <a:tailEnd type="triangle"/>
+          </a:ln>
+        </p:spPr>
+        <p:style>
+          <a:lnRef idx="1">
+            <a:schemeClr val="dk1"/>
+          </a:lnRef>
+          <a:fillRef idx="0">
+            <a:schemeClr val="dk1"/>
+          </a:fillRef>
+          <a:effectRef idx="0">
+            <a:schemeClr val="dk1"/>
+          </a:effectRef>
+          <a:fontRef idx="minor">
+            <a:schemeClr val="tx1"/>
+          </a:fontRef>
+        </p:style>
+      </p:cxnSp>
+      <p:sp>
+        <p:nvSpPr>
+          <p:cNvPr id="46" name="TextBox 45">
+            <a:extLst>
+              <a:ext uri="{FF2B5EF4-FFF2-40B4-BE49-F238E27FC236}">
+                <a16:creationId xmlns:a16="http://schemas.microsoft.com/office/drawing/2014/main" id="{A3E31A86-1120-39A4-D871-F54E2AEF607E}"/>
+              </a:ext>
+            </a:extLst>
+          </p:cNvPr>
+          <p:cNvSpPr txBox="1"/>
+          <p:nvPr/>
+        </p:nvSpPr>
+        <p:spPr>
+          <a:xfrm>
+            <a:off x="894079" y="3962401"/>
+            <a:ext cx="7355840" cy="738664"/>
+          </a:xfrm>
+          <a:prstGeom prst="rect">
+            <a:avLst/>
+          </a:prstGeom>
+          <a:noFill/>
+        </p:spPr>
+        <p:txBody>
+          <a:bodyPr wrap="square" rtlCol="0">
+            <a:spAutoFit/>
+          </a:bodyPr>
+          <a:lstStyle/>
+          <a:p>
+            <a:r>
+              <a:rPr lang="es-CL" b="1" dirty="0" err="1">
+                <a:latin typeface="Times New Roman" panose="02020603050405020304" pitchFamily="18" charset="0"/>
+                <a:cs typeface="Times New Roman" panose="02020603050405020304" pitchFamily="18" charset="0"/>
+              </a:rPr>
+              <a:t>Structural</a:t>
+            </a:r>
+            <a:r>
+              <a:rPr lang="es-CL" b="1" dirty="0">
+                <a:latin typeface="Times New Roman" panose="02020603050405020304" pitchFamily="18" charset="0"/>
+                <a:cs typeface="Times New Roman" panose="02020603050405020304" pitchFamily="18" charset="0"/>
+              </a:rPr>
+              <a:t>/Societal </a:t>
+            </a:r>
+            <a:r>
+              <a:rPr lang="es-CL" b="1" dirty="0" err="1">
+                <a:latin typeface="Times New Roman" panose="02020603050405020304" pitchFamily="18" charset="0"/>
+                <a:cs typeface="Times New Roman" panose="02020603050405020304" pitchFamily="18" charset="0"/>
+              </a:rPr>
+              <a:t>parameters</a:t>
+            </a:r>
+            <a:r>
+              <a:rPr lang="es-CL" b="1" dirty="0">
+                <a:latin typeface="Times New Roman" panose="02020603050405020304" pitchFamily="18" charset="0"/>
+                <a:cs typeface="Times New Roman" panose="02020603050405020304" pitchFamily="18" charset="0"/>
+              </a:rPr>
+              <a:t> </a:t>
+            </a:r>
+            <a:r>
+              <a:rPr lang="es-CL" dirty="0">
+                <a:latin typeface="Times New Roman" panose="02020603050405020304" pitchFamily="18" charset="0"/>
+                <a:cs typeface="Times New Roman" panose="02020603050405020304" pitchFamily="18" charset="0"/>
+              </a:rPr>
+              <a:t>(</a:t>
+            </a:r>
+            <a:r>
+              <a:rPr lang="es-CL" dirty="0" err="1">
+                <a:latin typeface="Times New Roman" panose="02020603050405020304" pitchFamily="18" charset="0"/>
+                <a:cs typeface="Times New Roman" panose="02020603050405020304" pitchFamily="18" charset="0"/>
+              </a:rPr>
+              <a:t>e.g</a:t>
+            </a:r>
+            <a:r>
+              <a:rPr lang="es-CL" dirty="0">
+                <a:latin typeface="Times New Roman" panose="02020603050405020304" pitchFamily="18" charset="0"/>
+                <a:cs typeface="Times New Roman" panose="02020603050405020304" pitchFamily="18" charset="0"/>
+              </a:rPr>
+              <a:t> </a:t>
+            </a:r>
+            <a:r>
+              <a:rPr lang="es-CL" dirty="0" err="1">
+                <a:latin typeface="Times New Roman" panose="02020603050405020304" pitchFamily="18" charset="0"/>
+                <a:cs typeface="Times New Roman" panose="02020603050405020304" pitchFamily="18" charset="0"/>
+              </a:rPr>
+              <a:t>Inequality</a:t>
+            </a:r>
+            <a:r>
+              <a:rPr lang="es-CL" dirty="0">
+                <a:latin typeface="Times New Roman" panose="02020603050405020304" pitchFamily="18" charset="0"/>
+                <a:cs typeface="Times New Roman" panose="02020603050405020304" pitchFamily="18" charset="0"/>
+              </a:rPr>
+              <a:t>, </a:t>
+            </a:r>
+            <a:r>
+              <a:rPr lang="es-CL" dirty="0" err="1">
+                <a:latin typeface="Times New Roman" panose="02020603050405020304" pitchFamily="18" charset="0"/>
+                <a:cs typeface="Times New Roman" panose="02020603050405020304" pitchFamily="18" charset="0"/>
+              </a:rPr>
+              <a:t>Heterogeneity</a:t>
+            </a:r>
+            <a:r>
+              <a:rPr lang="es-CL" dirty="0">
+                <a:latin typeface="Times New Roman" panose="02020603050405020304" pitchFamily="18" charset="0"/>
+                <a:cs typeface="Times New Roman" panose="02020603050405020304" pitchFamily="18" charset="0"/>
+              </a:rPr>
+              <a:t>, </a:t>
+            </a:r>
+            <a:r>
+              <a:rPr lang="es-CL" dirty="0" err="1">
+                <a:latin typeface="Times New Roman" panose="02020603050405020304" pitchFamily="18" charset="0"/>
+                <a:cs typeface="Times New Roman" panose="02020603050405020304" pitchFamily="18" charset="0"/>
+              </a:rPr>
+              <a:t>Institutions</a:t>
+            </a:r>
+            <a:r>
+              <a:rPr lang="es-CL" dirty="0">
+                <a:latin typeface="Times New Roman" panose="02020603050405020304" pitchFamily="18" charset="0"/>
+                <a:cs typeface="Times New Roman" panose="02020603050405020304" pitchFamily="18" charset="0"/>
+              </a:rPr>
+              <a:t>, </a:t>
+            </a:r>
+            <a:r>
+              <a:rPr lang="es-CL" dirty="0" err="1">
+                <a:latin typeface="Times New Roman" panose="02020603050405020304" pitchFamily="18" charset="0"/>
+                <a:cs typeface="Times New Roman" panose="02020603050405020304" pitchFamily="18" charset="0"/>
+              </a:rPr>
+              <a:t>Value</a:t>
+            </a:r>
+            <a:r>
+              <a:rPr lang="es-CL" dirty="0">
+                <a:latin typeface="Times New Roman" panose="02020603050405020304" pitchFamily="18" charset="0"/>
+                <a:cs typeface="Times New Roman" panose="02020603050405020304" pitchFamily="18" charset="0"/>
+              </a:rPr>
+              <a:t> </a:t>
+            </a:r>
+            <a:r>
+              <a:rPr lang="es-CL" dirty="0" err="1">
+                <a:latin typeface="Times New Roman" panose="02020603050405020304" pitchFamily="18" charset="0"/>
+                <a:cs typeface="Times New Roman" panose="02020603050405020304" pitchFamily="18" charset="0"/>
+              </a:rPr>
+              <a:t>climate</a:t>
+            </a:r>
+            <a:r>
+              <a:rPr lang="es-CL" dirty="0">
+                <a:latin typeface="Times New Roman" panose="02020603050405020304" pitchFamily="18" charset="0"/>
+                <a:cs typeface="Times New Roman" panose="02020603050405020304" pitchFamily="18" charset="0"/>
+              </a:rPr>
+              <a:t>)</a:t>
+            </a:r>
+          </a:p>
+          <a:p>
+            <a:r>
+              <a:rPr lang="es-CL" b="1" dirty="0">
+                <a:latin typeface="Times New Roman" panose="02020603050405020304" pitchFamily="18" charset="0"/>
+                <a:cs typeface="Times New Roman" panose="02020603050405020304" pitchFamily="18" charset="0"/>
+              </a:rPr>
+              <a:t>Social Positions </a:t>
+            </a:r>
+            <a:r>
+              <a:rPr lang="es-CL" dirty="0">
+                <a:latin typeface="Times New Roman" panose="02020603050405020304" pitchFamily="18" charset="0"/>
+                <a:cs typeface="Times New Roman" panose="02020603050405020304" pitchFamily="18" charset="0"/>
+              </a:rPr>
+              <a:t>(</a:t>
+            </a:r>
+            <a:r>
+              <a:rPr lang="es-CL" dirty="0" err="1">
+                <a:latin typeface="Times New Roman" panose="02020603050405020304" pitchFamily="18" charset="0"/>
+                <a:cs typeface="Times New Roman" panose="02020603050405020304" pitchFamily="18" charset="0"/>
+              </a:rPr>
+              <a:t>e.g</a:t>
+            </a:r>
+            <a:r>
+              <a:rPr lang="es-CL" dirty="0">
+                <a:latin typeface="Times New Roman" panose="02020603050405020304" pitchFamily="18" charset="0"/>
+                <a:cs typeface="Times New Roman" panose="02020603050405020304" pitchFamily="18" charset="0"/>
+              </a:rPr>
+              <a:t>. Status, </a:t>
+            </a:r>
+            <a:r>
+              <a:rPr lang="es-CL" dirty="0" err="1">
+                <a:latin typeface="Times New Roman" panose="02020603050405020304" pitchFamily="18" charset="0"/>
+                <a:cs typeface="Times New Roman" panose="02020603050405020304" pitchFamily="18" charset="0"/>
+              </a:rPr>
+              <a:t>Migration</a:t>
+            </a:r>
+            <a:r>
+              <a:rPr lang="es-CL" dirty="0">
+                <a:latin typeface="Times New Roman" panose="02020603050405020304" pitchFamily="18" charset="0"/>
+                <a:cs typeface="Times New Roman" panose="02020603050405020304" pitchFamily="18" charset="0"/>
+              </a:rPr>
+              <a:t>, </a:t>
+            </a:r>
+            <a:r>
+              <a:rPr lang="es-CL" dirty="0" err="1">
+                <a:latin typeface="Times New Roman" panose="02020603050405020304" pitchFamily="18" charset="0"/>
+                <a:cs typeface="Times New Roman" panose="02020603050405020304" pitchFamily="18" charset="0"/>
+              </a:rPr>
+              <a:t>Religion</a:t>
+            </a:r>
+            <a:r>
+              <a:rPr lang="es-CL" dirty="0">
+                <a:latin typeface="Times New Roman" panose="02020603050405020304" pitchFamily="18" charset="0"/>
+                <a:cs typeface="Times New Roman" panose="02020603050405020304" pitchFamily="18" charset="0"/>
+              </a:rPr>
+              <a:t>, </a:t>
+            </a:r>
+            <a:r>
+              <a:rPr lang="es-CL" dirty="0" err="1">
+                <a:latin typeface="Times New Roman" panose="02020603050405020304" pitchFamily="18" charset="0"/>
+                <a:cs typeface="Times New Roman" panose="02020603050405020304" pitchFamily="18" charset="0"/>
+              </a:rPr>
+              <a:t>Political</a:t>
+            </a:r>
+            <a:r>
+              <a:rPr lang="es-CL" dirty="0">
+                <a:latin typeface="Times New Roman" panose="02020603050405020304" pitchFamily="18" charset="0"/>
+                <a:cs typeface="Times New Roman" panose="02020603050405020304" pitchFamily="18" charset="0"/>
+              </a:rPr>
+              <a:t>, </a:t>
+            </a:r>
+            <a:r>
+              <a:rPr lang="es-CL" dirty="0" err="1">
+                <a:latin typeface="Times New Roman" panose="02020603050405020304" pitchFamily="18" charset="0"/>
+                <a:cs typeface="Times New Roman" panose="02020603050405020304" pitchFamily="18" charset="0"/>
+              </a:rPr>
+              <a:t>Values</a:t>
+            </a:r>
+            <a:r>
+              <a:rPr lang="es-CL" dirty="0">
+                <a:latin typeface="Times New Roman" panose="02020603050405020304" pitchFamily="18" charset="0"/>
+                <a:cs typeface="Times New Roman" panose="02020603050405020304" pitchFamily="18" charset="0"/>
+              </a:rPr>
+              <a:t>)</a:t>
+            </a:r>
+          </a:p>
+          <a:p>
+            <a:r>
+              <a:rPr lang="es-CL" b="1" dirty="0" err="1">
+                <a:latin typeface="Times New Roman" panose="02020603050405020304" pitchFamily="18" charset="0"/>
+                <a:cs typeface="Times New Roman" panose="02020603050405020304" pitchFamily="18" charset="0"/>
+              </a:rPr>
+              <a:t>Attitudes</a:t>
+            </a:r>
+            <a:r>
+              <a:rPr lang="es-CL" b="1" dirty="0">
+                <a:latin typeface="Times New Roman" panose="02020603050405020304" pitchFamily="18" charset="0"/>
+                <a:cs typeface="Times New Roman" panose="02020603050405020304" pitchFamily="18" charset="0"/>
+              </a:rPr>
+              <a:t> and </a:t>
+            </a:r>
+            <a:r>
+              <a:rPr lang="es-CL" b="1" dirty="0" err="1">
+                <a:latin typeface="Times New Roman" panose="02020603050405020304" pitchFamily="18" charset="0"/>
+                <a:cs typeface="Times New Roman" panose="02020603050405020304" pitchFamily="18" charset="0"/>
+              </a:rPr>
+              <a:t>Behavior</a:t>
+            </a:r>
+            <a:r>
+              <a:rPr lang="es-CL" b="1" dirty="0">
+                <a:latin typeface="Times New Roman" panose="02020603050405020304" pitchFamily="18" charset="0"/>
+                <a:cs typeface="Times New Roman" panose="02020603050405020304" pitchFamily="18" charset="0"/>
+              </a:rPr>
+              <a:t> </a:t>
+            </a:r>
+            <a:r>
+              <a:rPr lang="es-CL" dirty="0">
+                <a:latin typeface="Times New Roman" panose="02020603050405020304" pitchFamily="18" charset="0"/>
+                <a:cs typeface="Times New Roman" panose="02020603050405020304" pitchFamily="18" charset="0"/>
+              </a:rPr>
+              <a:t>(</a:t>
+            </a:r>
+            <a:r>
+              <a:rPr lang="es-CL" dirty="0" err="1">
+                <a:latin typeface="Times New Roman" panose="02020603050405020304" pitchFamily="18" charset="0"/>
+                <a:cs typeface="Times New Roman" panose="02020603050405020304" pitchFamily="18" charset="0"/>
+              </a:rPr>
+              <a:t>e.g</a:t>
+            </a:r>
+            <a:r>
+              <a:rPr lang="es-CL" dirty="0">
+                <a:latin typeface="Times New Roman" panose="02020603050405020304" pitchFamily="18" charset="0"/>
+                <a:cs typeface="Times New Roman" panose="02020603050405020304" pitchFamily="18" charset="0"/>
+              </a:rPr>
+              <a:t> Trust, </a:t>
+            </a:r>
+            <a:r>
+              <a:rPr lang="es-CL" dirty="0" err="1">
+                <a:latin typeface="Times New Roman" panose="02020603050405020304" pitchFamily="18" charset="0"/>
+                <a:cs typeface="Times New Roman" panose="02020603050405020304" pitchFamily="18" charset="0"/>
+              </a:rPr>
+              <a:t>Cooperation</a:t>
+            </a:r>
+            <a:r>
+              <a:rPr lang="es-CL" dirty="0">
+                <a:latin typeface="Times New Roman" panose="02020603050405020304" pitchFamily="18" charset="0"/>
+                <a:cs typeface="Times New Roman" panose="02020603050405020304" pitchFamily="18" charset="0"/>
+              </a:rPr>
+              <a:t>, </a:t>
+            </a:r>
+            <a:r>
+              <a:rPr lang="es-CL" dirty="0" err="1">
+                <a:latin typeface="Times New Roman" panose="02020603050405020304" pitchFamily="18" charset="0"/>
+                <a:cs typeface="Times New Roman" panose="02020603050405020304" pitchFamily="18" charset="0"/>
+              </a:rPr>
+              <a:t>Partipation</a:t>
+            </a:r>
+            <a:r>
+              <a:rPr lang="es-CL" dirty="0">
+                <a:latin typeface="Times New Roman" panose="02020603050405020304" pitchFamily="18" charset="0"/>
+                <a:cs typeface="Times New Roman" panose="02020603050405020304" pitchFamily="18" charset="0"/>
+              </a:rPr>
+              <a:t>)</a:t>
+            </a:r>
+          </a:p>
+        </p:txBody>
+      </p:sp>
+    </p:spTree>
+    <p:extLst>
+      <p:ext uri="{BB962C8B-B14F-4D97-AF65-F5344CB8AC3E}">
+        <p14:creationId xmlns:p14="http://schemas.microsoft.com/office/powerpoint/2010/main" val="723249223"/>
+      </p:ext>
+    </p:extLst>
+  </p:cSld>
+  <p:clrMapOvr>
+    <a:masterClrMapping/>
+  </p:clrMapOvr>
+</p:sld>
+</file>
+
 <file path=ppt/slides/slide3.xml><?xml version="1.0" encoding="utf-8"?>
 <p:sld xmlns:a="http://schemas.openxmlformats.org/drawingml/2006/main" xmlns:r="http://schemas.openxmlformats.org/officeDocument/2006/relationships" xmlns:p="http://schemas.openxmlformats.org/presentationml/2006/main">
   <p:cSld>
@@ -20713,6 +22139,3367 @@
   <p:transition spd="med">
     <p:fade thruBlk="1"/>
   </p:transition>
+</p:sld>
+</file>
+
+<file path=ppt/slides/slide30.xml><?xml version="1.0" encoding="utf-8"?>
+<p:sld xmlns:a="http://schemas.openxmlformats.org/drawingml/2006/main" xmlns:r="http://schemas.openxmlformats.org/officeDocument/2006/relationships" xmlns:p="http://schemas.openxmlformats.org/presentationml/2006/main">
+  <p:cSld>
+    <p:spTree>
+      <p:nvGrpSpPr>
+        <p:cNvPr id="1" name="">
+          <a:extLst>
+            <a:ext uri="{FF2B5EF4-FFF2-40B4-BE49-F238E27FC236}">
+              <a16:creationId xmlns:a16="http://schemas.microsoft.com/office/drawing/2014/main" id="{CAC272DA-D4D7-8F8C-A71F-B48AF1C494B6}"/>
+            </a:ext>
+          </a:extLst>
+        </p:cNvPr>
+        <p:cNvGrpSpPr/>
+        <p:nvPr/>
+      </p:nvGrpSpPr>
+      <p:grpSpPr>
+        <a:xfrm>
+          <a:off x="0" y="0"/>
+          <a:ext cx="0" cy="0"/>
+          <a:chOff x="0" y="0"/>
+          <a:chExt cx="0" cy="0"/>
+        </a:xfrm>
+      </p:grpSpPr>
+      <p:sp>
+        <p:nvSpPr>
+          <p:cNvPr id="47" name="TextBox 46">
+            <a:extLst>
+              <a:ext uri="{FF2B5EF4-FFF2-40B4-BE49-F238E27FC236}">
+                <a16:creationId xmlns:a16="http://schemas.microsoft.com/office/drawing/2014/main" id="{F9896335-9368-4332-710E-B466F892297C}"/>
+              </a:ext>
+            </a:extLst>
+          </p:cNvPr>
+          <p:cNvSpPr txBox="1"/>
+          <p:nvPr/>
+        </p:nvSpPr>
+        <p:spPr>
+          <a:xfrm>
+            <a:off x="528320" y="2032000"/>
+            <a:ext cx="5350932" cy="1384995"/>
+          </a:xfrm>
+          <a:prstGeom prst="rect">
+            <a:avLst/>
+          </a:prstGeom>
+          <a:ln>
+            <a:prstDash val="sysDot"/>
+          </a:ln>
+        </p:spPr>
+        <p:style>
+          <a:lnRef idx="2">
+            <a:schemeClr val="dk1"/>
+          </a:lnRef>
+          <a:fillRef idx="1">
+            <a:schemeClr val="lt1"/>
+          </a:fillRef>
+          <a:effectRef idx="0">
+            <a:schemeClr val="dk1"/>
+          </a:effectRef>
+          <a:fontRef idx="minor">
+            <a:schemeClr val="dk1"/>
+          </a:fontRef>
+        </p:style>
+        <p:txBody>
+          <a:bodyPr wrap="square" rtlCol="0">
+            <a:spAutoFit/>
+          </a:bodyPr>
+          <a:lstStyle/>
+          <a:p>
+            <a:r>
+              <a:rPr lang="es-CL" dirty="0" err="1"/>
+              <a:t>This</a:t>
+            </a:r>
+            <a:r>
+              <a:rPr lang="es-CL" dirty="0"/>
+              <a:t> </a:t>
+            </a:r>
+            <a:r>
+              <a:rPr lang="es-CL" dirty="0" err="1"/>
+              <a:t>study</a:t>
+            </a:r>
+            <a:r>
+              <a:rPr lang="es-CL" dirty="0"/>
+              <a:t>:</a:t>
+            </a:r>
+          </a:p>
+          <a:p>
+            <a:endParaRPr lang="es-CL" dirty="0"/>
+          </a:p>
+          <a:p>
+            <a:endParaRPr lang="es-CL" dirty="0"/>
+          </a:p>
+          <a:p>
+            <a:endParaRPr lang="es-CL" dirty="0"/>
+          </a:p>
+          <a:p>
+            <a:endParaRPr lang="es-CL" dirty="0"/>
+          </a:p>
+          <a:p>
+            <a:endParaRPr lang="es-CL" dirty="0"/>
+          </a:p>
+        </p:txBody>
+      </p:sp>
+      <p:sp>
+        <p:nvSpPr>
+          <p:cNvPr id="4" name="Slide Number Placeholder 3">
+            <a:extLst>
+              <a:ext uri="{FF2B5EF4-FFF2-40B4-BE49-F238E27FC236}">
+                <a16:creationId xmlns:a16="http://schemas.microsoft.com/office/drawing/2014/main" id="{F0547AA7-8659-7477-2D86-1151EA11CBBE}"/>
+              </a:ext>
+            </a:extLst>
+          </p:cNvPr>
+          <p:cNvSpPr>
+            <a:spLocks noGrp="1"/>
+          </p:cNvSpPr>
+          <p:nvPr>
+            <p:ph type="sldNum" idx="12"/>
+          </p:nvPr>
+        </p:nvSpPr>
+        <p:spPr/>
+        <p:txBody>
+          <a:bodyPr/>
+          <a:lstStyle/>
+          <a:p>
+            <a:pPr marL="0" lvl="0" indent="0" algn="r" rtl="0">
+              <a:spcBef>
+                <a:spcPts val="0"/>
+              </a:spcBef>
+              <a:spcAft>
+                <a:spcPts val="0"/>
+              </a:spcAft>
+              <a:buNone/>
+            </a:pPr>
+            <a:fld id="{00000000-1234-1234-1234-123412341234}" type="slidenum">
+              <a:rPr lang="en" smtClean="0"/>
+              <a:t>30</a:t>
+            </a:fld>
+            <a:endParaRPr lang="en"/>
+          </a:p>
+        </p:txBody>
+      </p:sp>
+      <p:sp>
+        <p:nvSpPr>
+          <p:cNvPr id="5" name="TextBox 4">
+            <a:extLst>
+              <a:ext uri="{FF2B5EF4-FFF2-40B4-BE49-F238E27FC236}">
+                <a16:creationId xmlns:a16="http://schemas.microsoft.com/office/drawing/2014/main" id="{CDD6AEF1-F19D-CCB3-E42F-30EAAB475A7C}"/>
+              </a:ext>
+            </a:extLst>
+          </p:cNvPr>
+          <p:cNvSpPr txBox="1"/>
+          <p:nvPr/>
+        </p:nvSpPr>
+        <p:spPr>
+          <a:xfrm>
+            <a:off x="3713479" y="2648374"/>
+            <a:ext cx="1733973" cy="523220"/>
+          </a:xfrm>
+          <a:prstGeom prst="rect">
+            <a:avLst/>
+          </a:prstGeom>
+        </p:spPr>
+        <p:style>
+          <a:lnRef idx="2">
+            <a:schemeClr val="dk1"/>
+          </a:lnRef>
+          <a:fillRef idx="1">
+            <a:schemeClr val="lt1"/>
+          </a:fillRef>
+          <a:effectRef idx="0">
+            <a:schemeClr val="dk1"/>
+          </a:effectRef>
+          <a:fontRef idx="minor">
+            <a:schemeClr val="dk1"/>
+          </a:fontRef>
+        </p:style>
+        <p:txBody>
+          <a:bodyPr wrap="square" rtlCol="0">
+            <a:spAutoFit/>
+          </a:bodyPr>
+          <a:lstStyle/>
+          <a:p>
+            <a:r>
+              <a:rPr lang="es-CL" dirty="0" err="1"/>
+              <a:t>Attitudes</a:t>
+            </a:r>
+            <a:r>
+              <a:rPr lang="es-CL" dirty="0"/>
+              <a:t> and</a:t>
+            </a:r>
+          </a:p>
+          <a:p>
+            <a:r>
+              <a:rPr lang="es-CL" dirty="0" err="1"/>
+              <a:t>Behaviors</a:t>
+            </a:r>
+            <a:endParaRPr lang="es-CL" dirty="0"/>
+          </a:p>
+        </p:txBody>
+      </p:sp>
+      <p:sp>
+        <p:nvSpPr>
+          <p:cNvPr id="9" name="TextBox 8">
+            <a:extLst>
+              <a:ext uri="{FF2B5EF4-FFF2-40B4-BE49-F238E27FC236}">
+                <a16:creationId xmlns:a16="http://schemas.microsoft.com/office/drawing/2014/main" id="{B3E2EBEE-DC27-CB99-1D0A-1CE2A7DB9A19}"/>
+              </a:ext>
+            </a:extLst>
+          </p:cNvPr>
+          <p:cNvSpPr txBox="1"/>
+          <p:nvPr/>
+        </p:nvSpPr>
+        <p:spPr>
+          <a:xfrm>
+            <a:off x="670558" y="686647"/>
+            <a:ext cx="1733973" cy="523220"/>
+          </a:xfrm>
+          <a:prstGeom prst="rect">
+            <a:avLst/>
+          </a:prstGeom>
+        </p:spPr>
+        <p:style>
+          <a:lnRef idx="2">
+            <a:schemeClr val="dk1"/>
+          </a:lnRef>
+          <a:fillRef idx="1">
+            <a:schemeClr val="lt1"/>
+          </a:fillRef>
+          <a:effectRef idx="0">
+            <a:schemeClr val="dk1"/>
+          </a:effectRef>
+          <a:fontRef idx="minor">
+            <a:schemeClr val="dk1"/>
+          </a:fontRef>
+        </p:style>
+        <p:txBody>
+          <a:bodyPr wrap="square" rtlCol="0">
+            <a:spAutoFit/>
+          </a:bodyPr>
+          <a:lstStyle/>
+          <a:p>
+            <a:r>
+              <a:rPr lang="es-CL" dirty="0" err="1"/>
+              <a:t>Structural</a:t>
+            </a:r>
+            <a:r>
+              <a:rPr lang="es-CL" dirty="0"/>
+              <a:t> </a:t>
+            </a:r>
+            <a:r>
+              <a:rPr lang="es-CL" dirty="0" err="1"/>
+              <a:t>parameters</a:t>
+            </a:r>
+            <a:r>
+              <a:rPr lang="es-CL"/>
+              <a:t> </a:t>
+            </a:r>
+            <a:endParaRPr lang="es-CL" dirty="0"/>
+          </a:p>
+        </p:txBody>
+      </p:sp>
+      <p:cxnSp>
+        <p:nvCxnSpPr>
+          <p:cNvPr id="10" name="Straight Arrow Connector 9">
+            <a:extLst>
+              <a:ext uri="{FF2B5EF4-FFF2-40B4-BE49-F238E27FC236}">
+                <a16:creationId xmlns:a16="http://schemas.microsoft.com/office/drawing/2014/main" id="{B26A7824-AE5A-F9E7-4250-BB01F1FB84F1}"/>
+              </a:ext>
+            </a:extLst>
+          </p:cNvPr>
+          <p:cNvCxnSpPr>
+            <a:cxnSpLocks/>
+            <a:stCxn id="9" idx="2"/>
+            <a:endCxn id="5" idx="1"/>
+          </p:cNvCxnSpPr>
+          <p:nvPr/>
+        </p:nvCxnSpPr>
+        <p:spPr>
+          <a:xfrm>
+            <a:off x="1537545" y="1209867"/>
+            <a:ext cx="2175934" cy="1700117"/>
+          </a:xfrm>
+          <a:prstGeom prst="straightConnector1">
+            <a:avLst/>
+          </a:prstGeom>
+          <a:ln>
+            <a:prstDash val="dash"/>
+            <a:tailEnd type="triangle"/>
+          </a:ln>
+        </p:spPr>
+        <p:style>
+          <a:lnRef idx="1">
+            <a:schemeClr val="dk1"/>
+          </a:lnRef>
+          <a:fillRef idx="0">
+            <a:schemeClr val="dk1"/>
+          </a:fillRef>
+          <a:effectRef idx="0">
+            <a:schemeClr val="dk1"/>
+          </a:effectRef>
+          <a:fontRef idx="minor">
+            <a:schemeClr val="tx1"/>
+          </a:fontRef>
+        </p:style>
+      </p:cxnSp>
+      <p:sp>
+        <p:nvSpPr>
+          <p:cNvPr id="24" name="Oval 23">
+            <a:extLst>
+              <a:ext uri="{FF2B5EF4-FFF2-40B4-BE49-F238E27FC236}">
+                <a16:creationId xmlns:a16="http://schemas.microsoft.com/office/drawing/2014/main" id="{12A4105A-C589-E09E-A0E2-FF8E1D4E2CC6}"/>
+              </a:ext>
+            </a:extLst>
+          </p:cNvPr>
+          <p:cNvSpPr/>
+          <p:nvPr/>
+        </p:nvSpPr>
+        <p:spPr>
+          <a:xfrm>
+            <a:off x="6685279" y="465233"/>
+            <a:ext cx="1605280" cy="966047"/>
+          </a:xfrm>
+          <a:prstGeom prst="ellipse">
+            <a:avLst/>
+          </a:prstGeom>
+        </p:spPr>
+        <p:style>
+          <a:lnRef idx="2">
+            <a:schemeClr val="dk1"/>
+          </a:lnRef>
+          <a:fillRef idx="1">
+            <a:schemeClr val="lt1"/>
+          </a:fillRef>
+          <a:effectRef idx="0">
+            <a:schemeClr val="dk1"/>
+          </a:effectRef>
+          <a:fontRef idx="minor">
+            <a:schemeClr val="dk1"/>
+          </a:fontRef>
+        </p:style>
+        <p:txBody>
+          <a:bodyPr rtlCol="0" anchor="ctr"/>
+          <a:lstStyle/>
+          <a:p>
+            <a:pPr algn="ctr"/>
+            <a:r>
+              <a:rPr lang="es-CL" dirty="0" err="1"/>
+              <a:t>Cohesion</a:t>
+            </a:r>
+            <a:endParaRPr lang="es-CL" dirty="0"/>
+          </a:p>
+        </p:txBody>
+      </p:sp>
+      <p:cxnSp>
+        <p:nvCxnSpPr>
+          <p:cNvPr id="25" name="Straight Arrow Connector 24">
+            <a:extLst>
+              <a:ext uri="{FF2B5EF4-FFF2-40B4-BE49-F238E27FC236}">
+                <a16:creationId xmlns:a16="http://schemas.microsoft.com/office/drawing/2014/main" id="{DBC56F69-9BE7-7737-7759-56C9D1B72AC9}"/>
+              </a:ext>
+            </a:extLst>
+          </p:cNvPr>
+          <p:cNvCxnSpPr>
+            <a:cxnSpLocks/>
+            <a:stCxn id="5" idx="3"/>
+            <a:endCxn id="24" idx="4"/>
+          </p:cNvCxnSpPr>
+          <p:nvPr/>
+        </p:nvCxnSpPr>
+        <p:spPr>
+          <a:xfrm flipV="1">
+            <a:off x="5447452" y="1431280"/>
+            <a:ext cx="2040467" cy="1478704"/>
+          </a:xfrm>
+          <a:prstGeom prst="straightConnector1">
+            <a:avLst/>
+          </a:prstGeom>
+          <a:ln>
+            <a:prstDash val="dash"/>
+            <a:tailEnd type="triangle"/>
+          </a:ln>
+        </p:spPr>
+        <p:style>
+          <a:lnRef idx="1">
+            <a:schemeClr val="dk1"/>
+          </a:lnRef>
+          <a:fillRef idx="0">
+            <a:schemeClr val="dk1"/>
+          </a:fillRef>
+          <a:effectRef idx="0">
+            <a:schemeClr val="dk1"/>
+          </a:effectRef>
+          <a:fontRef idx="minor">
+            <a:schemeClr val="tx1"/>
+          </a:fontRef>
+        </p:style>
+      </p:cxnSp>
+      <p:cxnSp>
+        <p:nvCxnSpPr>
+          <p:cNvPr id="28" name="Straight Arrow Connector 27">
+            <a:extLst>
+              <a:ext uri="{FF2B5EF4-FFF2-40B4-BE49-F238E27FC236}">
+                <a16:creationId xmlns:a16="http://schemas.microsoft.com/office/drawing/2014/main" id="{9817EA86-7542-4801-F60C-6A6DD6618364}"/>
+              </a:ext>
+            </a:extLst>
+          </p:cNvPr>
+          <p:cNvCxnSpPr>
+            <a:cxnSpLocks/>
+            <a:stCxn id="9" idx="3"/>
+            <a:endCxn id="24" idx="2"/>
+          </p:cNvCxnSpPr>
+          <p:nvPr/>
+        </p:nvCxnSpPr>
+        <p:spPr>
+          <a:xfrm>
+            <a:off x="2404531" y="948257"/>
+            <a:ext cx="4280748" cy="0"/>
+          </a:xfrm>
+          <a:prstGeom prst="straightConnector1">
+            <a:avLst/>
+          </a:prstGeom>
+          <a:ln>
+            <a:prstDash val="dash"/>
+            <a:tailEnd type="triangle"/>
+          </a:ln>
+        </p:spPr>
+        <p:style>
+          <a:lnRef idx="1">
+            <a:schemeClr val="dk1"/>
+          </a:lnRef>
+          <a:fillRef idx="0">
+            <a:schemeClr val="dk1"/>
+          </a:fillRef>
+          <a:effectRef idx="0">
+            <a:schemeClr val="dk1"/>
+          </a:effectRef>
+          <a:fontRef idx="minor">
+            <a:schemeClr val="tx1"/>
+          </a:fontRef>
+        </p:style>
+      </p:cxnSp>
+      <p:sp>
+        <p:nvSpPr>
+          <p:cNvPr id="36" name="TextBox 35">
+            <a:extLst>
+              <a:ext uri="{FF2B5EF4-FFF2-40B4-BE49-F238E27FC236}">
+                <a16:creationId xmlns:a16="http://schemas.microsoft.com/office/drawing/2014/main" id="{22FC4CE7-A004-1709-585C-BB37D5B47C91}"/>
+              </a:ext>
+            </a:extLst>
+          </p:cNvPr>
+          <p:cNvSpPr txBox="1"/>
+          <p:nvPr/>
+        </p:nvSpPr>
+        <p:spPr>
+          <a:xfrm>
+            <a:off x="741680" y="2648373"/>
+            <a:ext cx="1733973" cy="523220"/>
+          </a:xfrm>
+          <a:prstGeom prst="rect">
+            <a:avLst/>
+          </a:prstGeom>
+        </p:spPr>
+        <p:style>
+          <a:lnRef idx="2">
+            <a:schemeClr val="dk1"/>
+          </a:lnRef>
+          <a:fillRef idx="1">
+            <a:schemeClr val="lt1"/>
+          </a:fillRef>
+          <a:effectRef idx="0">
+            <a:schemeClr val="dk1"/>
+          </a:effectRef>
+          <a:fontRef idx="minor">
+            <a:schemeClr val="dk1"/>
+          </a:fontRef>
+        </p:style>
+        <p:txBody>
+          <a:bodyPr wrap="square" rtlCol="0">
+            <a:spAutoFit/>
+          </a:bodyPr>
+          <a:lstStyle/>
+          <a:p>
+            <a:r>
+              <a:rPr lang="es-CL" dirty="0"/>
+              <a:t>Individual </a:t>
+            </a:r>
+            <a:r>
+              <a:rPr lang="es-CL" dirty="0" err="1"/>
+              <a:t>parameters</a:t>
+            </a:r>
+            <a:endParaRPr lang="es-CL" dirty="0"/>
+          </a:p>
+        </p:txBody>
+      </p:sp>
+      <p:cxnSp>
+        <p:nvCxnSpPr>
+          <p:cNvPr id="37" name="Straight Arrow Connector 36">
+            <a:extLst>
+              <a:ext uri="{FF2B5EF4-FFF2-40B4-BE49-F238E27FC236}">
+                <a16:creationId xmlns:a16="http://schemas.microsoft.com/office/drawing/2014/main" id="{DAE966FE-A4EE-5B8D-BB2C-D4F3A37B3258}"/>
+              </a:ext>
+            </a:extLst>
+          </p:cNvPr>
+          <p:cNvCxnSpPr>
+            <a:cxnSpLocks/>
+            <a:stCxn id="36" idx="3"/>
+            <a:endCxn id="5" idx="1"/>
+          </p:cNvCxnSpPr>
+          <p:nvPr/>
+        </p:nvCxnSpPr>
+        <p:spPr>
+          <a:xfrm>
+            <a:off x="2475653" y="2909983"/>
+            <a:ext cx="1237826" cy="1"/>
+          </a:xfrm>
+          <a:prstGeom prst="straightConnector1">
+            <a:avLst/>
+          </a:prstGeom>
+          <a:ln w="28575">
+            <a:tailEnd type="triangle"/>
+          </a:ln>
+        </p:spPr>
+        <p:style>
+          <a:lnRef idx="1">
+            <a:schemeClr val="dk1"/>
+          </a:lnRef>
+          <a:fillRef idx="0">
+            <a:schemeClr val="dk1"/>
+          </a:fillRef>
+          <a:effectRef idx="0">
+            <a:schemeClr val="dk1"/>
+          </a:effectRef>
+          <a:fontRef idx="minor">
+            <a:schemeClr val="tx1"/>
+          </a:fontRef>
+        </p:style>
+      </p:cxnSp>
+      <p:cxnSp>
+        <p:nvCxnSpPr>
+          <p:cNvPr id="40" name="Straight Arrow Connector 39">
+            <a:extLst>
+              <a:ext uri="{FF2B5EF4-FFF2-40B4-BE49-F238E27FC236}">
+                <a16:creationId xmlns:a16="http://schemas.microsoft.com/office/drawing/2014/main" id="{A632A20F-CD21-D85C-ACC0-1128A6978725}"/>
+              </a:ext>
+            </a:extLst>
+          </p:cNvPr>
+          <p:cNvCxnSpPr>
+            <a:cxnSpLocks/>
+            <a:stCxn id="9" idx="2"/>
+            <a:endCxn id="36" idx="0"/>
+          </p:cNvCxnSpPr>
+          <p:nvPr/>
+        </p:nvCxnSpPr>
+        <p:spPr>
+          <a:xfrm>
+            <a:off x="1537545" y="1209867"/>
+            <a:ext cx="71122" cy="1438506"/>
+          </a:xfrm>
+          <a:prstGeom prst="straightConnector1">
+            <a:avLst/>
+          </a:prstGeom>
+          <a:ln>
+            <a:prstDash val="dash"/>
+            <a:tailEnd type="triangle"/>
+          </a:ln>
+        </p:spPr>
+        <p:style>
+          <a:lnRef idx="1">
+            <a:schemeClr val="dk1"/>
+          </a:lnRef>
+          <a:fillRef idx="0">
+            <a:schemeClr val="dk1"/>
+          </a:fillRef>
+          <a:effectRef idx="0">
+            <a:schemeClr val="dk1"/>
+          </a:effectRef>
+          <a:fontRef idx="minor">
+            <a:schemeClr val="tx1"/>
+          </a:fontRef>
+        </p:style>
+      </p:cxnSp>
+      <p:sp>
+        <p:nvSpPr>
+          <p:cNvPr id="46" name="TextBox 45">
+            <a:extLst>
+              <a:ext uri="{FF2B5EF4-FFF2-40B4-BE49-F238E27FC236}">
+                <a16:creationId xmlns:a16="http://schemas.microsoft.com/office/drawing/2014/main" id="{433B31CB-497F-453F-9F05-3AC4D16038E5}"/>
+              </a:ext>
+            </a:extLst>
+          </p:cNvPr>
+          <p:cNvSpPr txBox="1"/>
+          <p:nvPr/>
+        </p:nvSpPr>
+        <p:spPr>
+          <a:xfrm>
+            <a:off x="670558" y="3840480"/>
+            <a:ext cx="7355840" cy="738664"/>
+          </a:xfrm>
+          <a:prstGeom prst="rect">
+            <a:avLst/>
+          </a:prstGeom>
+          <a:noFill/>
+        </p:spPr>
+        <p:txBody>
+          <a:bodyPr wrap="square" rtlCol="0">
+            <a:spAutoFit/>
+          </a:bodyPr>
+          <a:lstStyle/>
+          <a:p>
+            <a:r>
+              <a:rPr lang="es-CL" dirty="0" err="1"/>
+              <a:t>Structural</a:t>
+            </a:r>
+            <a:r>
+              <a:rPr lang="es-CL" dirty="0"/>
+              <a:t> </a:t>
+            </a:r>
+            <a:r>
+              <a:rPr lang="es-CL" dirty="0" err="1"/>
+              <a:t>parameters</a:t>
+            </a:r>
+            <a:r>
+              <a:rPr lang="es-CL" dirty="0"/>
+              <a:t>: </a:t>
+            </a:r>
+            <a:r>
+              <a:rPr lang="es-CL" dirty="0" err="1"/>
+              <a:t>Wealth</a:t>
+            </a:r>
+            <a:r>
+              <a:rPr lang="es-CL" dirty="0"/>
+              <a:t>, </a:t>
+            </a:r>
+            <a:r>
+              <a:rPr lang="es-CL" dirty="0" err="1"/>
+              <a:t>Inequality</a:t>
+            </a:r>
+            <a:r>
+              <a:rPr lang="es-CL" dirty="0"/>
+              <a:t>, </a:t>
+            </a:r>
+            <a:r>
+              <a:rPr lang="es-CL" dirty="0" err="1"/>
+              <a:t>Heterogeneity</a:t>
+            </a:r>
+            <a:r>
+              <a:rPr lang="es-CL" dirty="0"/>
+              <a:t>, </a:t>
+            </a:r>
+            <a:r>
+              <a:rPr lang="es-CL" dirty="0" err="1"/>
+              <a:t>Polarization</a:t>
+            </a:r>
+            <a:r>
+              <a:rPr lang="es-CL" dirty="0"/>
+              <a:t>, </a:t>
+            </a:r>
+            <a:r>
+              <a:rPr lang="es-CL" dirty="0" err="1"/>
+              <a:t>Consensus</a:t>
+            </a:r>
+            <a:r>
+              <a:rPr lang="es-CL" dirty="0"/>
+              <a:t> </a:t>
+            </a:r>
+          </a:p>
+          <a:p>
+            <a:r>
+              <a:rPr lang="es-CL" dirty="0"/>
+              <a:t>Individual </a:t>
+            </a:r>
+            <a:r>
+              <a:rPr lang="es-CL" dirty="0" err="1"/>
+              <a:t>parameters</a:t>
+            </a:r>
+            <a:r>
+              <a:rPr lang="es-CL" dirty="0"/>
+              <a:t>: Social </a:t>
+            </a:r>
+            <a:r>
+              <a:rPr lang="es-CL" dirty="0" err="1"/>
+              <a:t>Class</a:t>
+            </a:r>
+            <a:r>
+              <a:rPr lang="es-CL" dirty="0"/>
+              <a:t>, </a:t>
+            </a:r>
+            <a:r>
+              <a:rPr lang="es-CL" dirty="0" err="1"/>
+              <a:t>Religion</a:t>
+            </a:r>
+            <a:r>
+              <a:rPr lang="es-CL" dirty="0"/>
+              <a:t>, </a:t>
+            </a:r>
+            <a:r>
+              <a:rPr lang="es-CL" dirty="0" err="1"/>
+              <a:t>Political</a:t>
+            </a:r>
+            <a:r>
+              <a:rPr lang="es-CL" dirty="0"/>
+              <a:t> </a:t>
+            </a:r>
+            <a:r>
+              <a:rPr lang="es-CL" dirty="0" err="1"/>
+              <a:t>Party</a:t>
+            </a:r>
+            <a:r>
+              <a:rPr lang="es-CL" dirty="0"/>
+              <a:t>, </a:t>
+            </a:r>
+            <a:r>
+              <a:rPr lang="es-CL" dirty="0" err="1"/>
+              <a:t>Values</a:t>
+            </a:r>
+            <a:endParaRPr lang="es-CL" dirty="0"/>
+          </a:p>
+          <a:p>
+            <a:r>
+              <a:rPr lang="es-CL" dirty="0" err="1"/>
+              <a:t>Attitudes</a:t>
+            </a:r>
+            <a:r>
+              <a:rPr lang="es-CL" dirty="0"/>
+              <a:t> and </a:t>
+            </a:r>
+            <a:r>
+              <a:rPr lang="es-CL" dirty="0" err="1"/>
+              <a:t>Behavior</a:t>
+            </a:r>
+            <a:r>
+              <a:rPr lang="es-CL" dirty="0"/>
+              <a:t>: Trust, </a:t>
+            </a:r>
+            <a:r>
+              <a:rPr lang="es-CL" dirty="0" err="1"/>
+              <a:t>Participation</a:t>
+            </a:r>
+            <a:r>
+              <a:rPr lang="es-CL" dirty="0"/>
+              <a:t>, Networks</a:t>
+            </a:r>
+          </a:p>
+        </p:txBody>
+      </p:sp>
+    </p:spTree>
+    <p:extLst>
+      <p:ext uri="{BB962C8B-B14F-4D97-AF65-F5344CB8AC3E}">
+        <p14:creationId xmlns:p14="http://schemas.microsoft.com/office/powerpoint/2010/main" val="3306130683"/>
+      </p:ext>
+    </p:extLst>
+  </p:cSld>
+  <p:clrMapOvr>
+    <a:masterClrMapping/>
+  </p:clrMapOvr>
+</p:sld>
+</file>
+
+<file path=ppt/slides/slide31.xml><?xml version="1.0" encoding="utf-8"?>
+<p:sld xmlns:a="http://schemas.openxmlformats.org/drawingml/2006/main" xmlns:r="http://schemas.openxmlformats.org/officeDocument/2006/relationships" xmlns:p="http://schemas.openxmlformats.org/presentationml/2006/main">
+  <p:cSld>
+    <p:spTree>
+      <p:nvGrpSpPr>
+        <p:cNvPr id="1" name="Shape 126">
+          <a:extLst>
+            <a:ext uri="{FF2B5EF4-FFF2-40B4-BE49-F238E27FC236}">
+              <a16:creationId xmlns:a16="http://schemas.microsoft.com/office/drawing/2014/main" id="{25FDA814-67EA-754E-BAB8-5DBC50C78375}"/>
+            </a:ext>
+          </a:extLst>
+        </p:cNvPr>
+        <p:cNvGrpSpPr/>
+        <p:nvPr/>
+      </p:nvGrpSpPr>
+      <p:grpSpPr>
+        <a:xfrm>
+          <a:off x="0" y="0"/>
+          <a:ext cx="0" cy="0"/>
+          <a:chOff x="0" y="0"/>
+          <a:chExt cx="0" cy="0"/>
+        </a:xfrm>
+      </p:grpSpPr>
+      <p:sp>
+        <p:nvSpPr>
+          <p:cNvPr id="62" name="TextBox 61">
+            <a:extLst>
+              <a:ext uri="{FF2B5EF4-FFF2-40B4-BE49-F238E27FC236}">
+                <a16:creationId xmlns:a16="http://schemas.microsoft.com/office/drawing/2014/main" id="{E441529B-F249-A2AE-A5C3-33E600410853}"/>
+              </a:ext>
+            </a:extLst>
+          </p:cNvPr>
+          <p:cNvSpPr txBox="1"/>
+          <p:nvPr/>
+        </p:nvSpPr>
+        <p:spPr>
+          <a:xfrm>
+            <a:off x="3547960" y="2809604"/>
+            <a:ext cx="579040" cy="307777"/>
+          </a:xfrm>
+          <a:prstGeom prst="rect">
+            <a:avLst/>
+          </a:prstGeom>
+          <a:noFill/>
+          <a:ln w="9525" cap="flat" cmpd="sng" algn="ctr">
+            <a:solidFill>
+              <a:schemeClr val="dk1"/>
+            </a:solidFill>
+            <a:prstDash val="dash"/>
+            <a:round/>
+            <a:headEnd type="none" w="med" len="med"/>
+            <a:tailEnd type="none" w="med" len="med"/>
+          </a:ln>
+        </p:spPr>
+        <p:style>
+          <a:lnRef idx="0">
+            <a:scrgbClr r="0" g="0" b="0"/>
+          </a:lnRef>
+          <a:fillRef idx="0">
+            <a:scrgbClr r="0" g="0" b="0"/>
+          </a:fillRef>
+          <a:effectRef idx="0">
+            <a:scrgbClr r="0" g="0" b="0"/>
+          </a:effectRef>
+          <a:fontRef idx="minor">
+            <a:schemeClr val="dk1"/>
+          </a:fontRef>
+        </p:style>
+        <p:txBody>
+          <a:bodyPr wrap="square" rtlCol="0">
+            <a:spAutoFit/>
+          </a:bodyPr>
+          <a:lstStyle/>
+          <a:p>
+            <a:endParaRPr lang="en-US" noProof="0" dirty="0">
+              <a:latin typeface="Times New Roman" panose="02020603050405020304" pitchFamily="18" charset="0"/>
+              <a:cs typeface="Times New Roman" panose="02020603050405020304" pitchFamily="18" charset="0"/>
+            </a:endParaRPr>
+          </a:p>
+        </p:txBody>
+      </p:sp>
+      <p:sp>
+        <p:nvSpPr>
+          <p:cNvPr id="25" name="TextBox 24">
+            <a:extLst>
+              <a:ext uri="{FF2B5EF4-FFF2-40B4-BE49-F238E27FC236}">
+                <a16:creationId xmlns:a16="http://schemas.microsoft.com/office/drawing/2014/main" id="{B3EAD770-2119-7E45-8832-FBD30D920DF9}"/>
+              </a:ext>
+            </a:extLst>
+          </p:cNvPr>
+          <p:cNvSpPr txBox="1"/>
+          <p:nvPr/>
+        </p:nvSpPr>
+        <p:spPr>
+          <a:xfrm>
+            <a:off x="1177620" y="577459"/>
+            <a:ext cx="6978108" cy="3970318"/>
+          </a:xfrm>
+          <a:prstGeom prst="rect">
+            <a:avLst/>
+          </a:prstGeom>
+        </p:spPr>
+        <p:style>
+          <a:lnRef idx="2">
+            <a:schemeClr val="dk1"/>
+          </a:lnRef>
+          <a:fillRef idx="1">
+            <a:schemeClr val="lt1"/>
+          </a:fillRef>
+          <a:effectRef idx="0">
+            <a:schemeClr val="dk1"/>
+          </a:effectRef>
+          <a:fontRef idx="minor">
+            <a:schemeClr val="dk1"/>
+          </a:fontRef>
+        </p:style>
+        <p:txBody>
+          <a:bodyPr wrap="square" rtlCol="0">
+            <a:spAutoFit/>
+          </a:bodyPr>
+          <a:lstStyle/>
+          <a:p>
+            <a:r>
+              <a:rPr lang="en-US" i="1" noProof="0" dirty="0">
+                <a:latin typeface="Times New Roman" panose="02020603050405020304" pitchFamily="18" charset="0"/>
+                <a:cs typeface="Times New Roman" panose="02020603050405020304" pitchFamily="18" charset="0"/>
+              </a:rPr>
+              <a:t>Respondent</a:t>
+            </a:r>
+            <a:br>
+              <a:rPr lang="en-US" noProof="0" dirty="0">
+                <a:latin typeface="Times New Roman" panose="02020603050405020304" pitchFamily="18" charset="0"/>
+                <a:cs typeface="Times New Roman" panose="02020603050405020304" pitchFamily="18" charset="0"/>
+              </a:rPr>
+            </a:br>
+            <a:br>
+              <a:rPr lang="en-US" noProof="0" dirty="0">
+                <a:latin typeface="Times New Roman" panose="02020603050405020304" pitchFamily="18" charset="0"/>
+                <a:cs typeface="Times New Roman" panose="02020603050405020304" pitchFamily="18" charset="0"/>
+              </a:rPr>
+            </a:br>
+            <a:br>
+              <a:rPr lang="en-US" noProof="0" dirty="0">
+                <a:latin typeface="Times New Roman" panose="02020603050405020304" pitchFamily="18" charset="0"/>
+                <a:cs typeface="Times New Roman" panose="02020603050405020304" pitchFamily="18" charset="0"/>
+              </a:rPr>
+            </a:br>
+            <a:br>
+              <a:rPr lang="en-US" noProof="0" dirty="0">
+                <a:latin typeface="Times New Roman" panose="02020603050405020304" pitchFamily="18" charset="0"/>
+                <a:cs typeface="Times New Roman" panose="02020603050405020304" pitchFamily="18" charset="0"/>
+              </a:rPr>
+            </a:br>
+            <a:br>
+              <a:rPr lang="en-US" noProof="0" dirty="0">
+                <a:latin typeface="Times New Roman" panose="02020603050405020304" pitchFamily="18" charset="0"/>
+                <a:cs typeface="Times New Roman" panose="02020603050405020304" pitchFamily="18" charset="0"/>
+              </a:rPr>
+            </a:br>
+            <a:br>
+              <a:rPr lang="en-US" noProof="0" dirty="0">
+                <a:latin typeface="Times New Roman" panose="02020603050405020304" pitchFamily="18" charset="0"/>
+                <a:cs typeface="Times New Roman" panose="02020603050405020304" pitchFamily="18" charset="0"/>
+              </a:rPr>
+            </a:br>
+            <a:br>
+              <a:rPr lang="en-US" noProof="0" dirty="0">
+                <a:latin typeface="Times New Roman" panose="02020603050405020304" pitchFamily="18" charset="0"/>
+                <a:cs typeface="Times New Roman" panose="02020603050405020304" pitchFamily="18" charset="0"/>
+              </a:rPr>
+            </a:br>
+            <a:br>
+              <a:rPr lang="en-US" noProof="0" dirty="0">
+                <a:latin typeface="Times New Roman" panose="02020603050405020304" pitchFamily="18" charset="0"/>
+                <a:cs typeface="Times New Roman" panose="02020603050405020304" pitchFamily="18" charset="0"/>
+              </a:rPr>
+            </a:br>
+            <a:br>
+              <a:rPr lang="en-US" noProof="0" dirty="0">
+                <a:latin typeface="Times New Roman" panose="02020603050405020304" pitchFamily="18" charset="0"/>
+                <a:cs typeface="Times New Roman" panose="02020603050405020304" pitchFamily="18" charset="0"/>
+              </a:rPr>
+            </a:br>
+            <a:br>
+              <a:rPr lang="en-US" noProof="0" dirty="0">
+                <a:latin typeface="Times New Roman" panose="02020603050405020304" pitchFamily="18" charset="0"/>
+                <a:cs typeface="Times New Roman" panose="02020603050405020304" pitchFamily="18" charset="0"/>
+              </a:rPr>
+            </a:br>
+            <a:br>
+              <a:rPr lang="en-US" noProof="0" dirty="0">
+                <a:latin typeface="Times New Roman" panose="02020603050405020304" pitchFamily="18" charset="0"/>
+                <a:cs typeface="Times New Roman" panose="02020603050405020304" pitchFamily="18" charset="0"/>
+              </a:rPr>
+            </a:br>
+            <a:br>
+              <a:rPr lang="en-US" noProof="0" dirty="0">
+                <a:latin typeface="Times New Roman" panose="02020603050405020304" pitchFamily="18" charset="0"/>
+                <a:cs typeface="Times New Roman" panose="02020603050405020304" pitchFamily="18" charset="0"/>
+              </a:rPr>
+            </a:br>
+            <a:br>
+              <a:rPr lang="en-US" noProof="0" dirty="0">
+                <a:latin typeface="Times New Roman" panose="02020603050405020304" pitchFamily="18" charset="0"/>
+                <a:cs typeface="Times New Roman" panose="02020603050405020304" pitchFamily="18" charset="0"/>
+              </a:rPr>
+            </a:br>
+            <a:br>
+              <a:rPr lang="en-US" noProof="0" dirty="0">
+                <a:latin typeface="Times New Roman" panose="02020603050405020304" pitchFamily="18" charset="0"/>
+                <a:cs typeface="Times New Roman" panose="02020603050405020304" pitchFamily="18" charset="0"/>
+              </a:rPr>
+            </a:br>
+            <a:br>
+              <a:rPr lang="en-US" noProof="0" dirty="0">
+                <a:latin typeface="Times New Roman" panose="02020603050405020304" pitchFamily="18" charset="0"/>
+                <a:cs typeface="Times New Roman" panose="02020603050405020304" pitchFamily="18" charset="0"/>
+              </a:rPr>
+            </a:br>
+            <a:br>
+              <a:rPr lang="en-US" noProof="0" dirty="0">
+                <a:latin typeface="Times New Roman" panose="02020603050405020304" pitchFamily="18" charset="0"/>
+                <a:cs typeface="Times New Roman" panose="02020603050405020304" pitchFamily="18" charset="0"/>
+              </a:rPr>
+            </a:br>
+            <a:br>
+              <a:rPr lang="en-US" noProof="0" dirty="0">
+                <a:latin typeface="Times New Roman" panose="02020603050405020304" pitchFamily="18" charset="0"/>
+                <a:cs typeface="Times New Roman" panose="02020603050405020304" pitchFamily="18" charset="0"/>
+              </a:rPr>
+            </a:br>
+            <a:r>
+              <a:rPr lang="en-US" i="1" noProof="0" dirty="0">
+                <a:latin typeface="Times New Roman" panose="02020603050405020304" pitchFamily="18" charset="0"/>
+                <a:cs typeface="Times New Roman" panose="02020603050405020304" pitchFamily="18" charset="0"/>
+              </a:rPr>
+              <a:t>Vignette</a:t>
+            </a:r>
+          </a:p>
+        </p:txBody>
+      </p:sp>
+      <p:sp>
+        <p:nvSpPr>
+          <p:cNvPr id="9" name="TextBox 8">
+            <a:extLst>
+              <a:ext uri="{FF2B5EF4-FFF2-40B4-BE49-F238E27FC236}">
+                <a16:creationId xmlns:a16="http://schemas.microsoft.com/office/drawing/2014/main" id="{D7375C31-4D0A-1861-84E7-4E89046264A4}"/>
+              </a:ext>
+            </a:extLst>
+          </p:cNvPr>
+          <p:cNvSpPr txBox="1"/>
+          <p:nvPr/>
+        </p:nvSpPr>
+        <p:spPr>
+          <a:xfrm>
+            <a:off x="6333840" y="3145984"/>
+            <a:ext cx="1342760" cy="578882"/>
+          </a:xfrm>
+          <a:prstGeom prst="roundRect">
+            <a:avLst/>
+          </a:prstGeom>
+        </p:spPr>
+        <p:style>
+          <a:lnRef idx="2">
+            <a:schemeClr val="dk1"/>
+          </a:lnRef>
+          <a:fillRef idx="1">
+            <a:schemeClr val="lt1"/>
+          </a:fillRef>
+          <a:effectRef idx="0">
+            <a:schemeClr val="dk1"/>
+          </a:effectRef>
+          <a:fontRef idx="minor">
+            <a:schemeClr val="dk1"/>
+          </a:fontRef>
+        </p:style>
+        <p:txBody>
+          <a:bodyPr wrap="square" rtlCol="0" anchor="ctr">
+            <a:spAutoFit/>
+          </a:bodyPr>
+          <a:lstStyle/>
+          <a:p>
+            <a:pPr algn="ctr"/>
+            <a:r>
+              <a:rPr lang="en-US" noProof="0" dirty="0">
+                <a:latin typeface="Times New Roman" panose="02020603050405020304" pitchFamily="18" charset="0"/>
+                <a:cs typeface="Times New Roman" panose="02020603050405020304" pitchFamily="18" charset="0"/>
+              </a:rPr>
+              <a:t>Cohesive Attitudes</a:t>
+            </a:r>
+          </a:p>
+        </p:txBody>
+      </p:sp>
+      <p:cxnSp>
+        <p:nvCxnSpPr>
+          <p:cNvPr id="37" name="Straight Connector 36">
+            <a:extLst>
+              <a:ext uri="{FF2B5EF4-FFF2-40B4-BE49-F238E27FC236}">
+                <a16:creationId xmlns:a16="http://schemas.microsoft.com/office/drawing/2014/main" id="{73E13BAE-3769-609C-140B-A5690F067ACD}"/>
+              </a:ext>
+            </a:extLst>
+          </p:cNvPr>
+          <p:cNvCxnSpPr>
+            <a:cxnSpLocks/>
+            <a:stCxn id="25" idx="1"/>
+            <a:endCxn id="25" idx="3"/>
+          </p:cNvCxnSpPr>
+          <p:nvPr/>
+        </p:nvCxnSpPr>
+        <p:spPr>
+          <a:xfrm>
+            <a:off x="1177620" y="2562618"/>
+            <a:ext cx="6978108" cy="0"/>
+          </a:xfrm>
+          <a:prstGeom prst="line">
+            <a:avLst/>
+          </a:prstGeom>
+          <a:ln w="19050" cap="flat" cmpd="sng" algn="ctr">
+            <a:solidFill>
+              <a:schemeClr val="dk1"/>
+            </a:solidFill>
+            <a:prstDash val="dash"/>
+            <a:round/>
+            <a:headEnd type="none" w="med" len="med"/>
+            <a:tailEnd type="none" w="med" len="med"/>
+          </a:ln>
+        </p:spPr>
+        <p:style>
+          <a:lnRef idx="0">
+            <a:scrgbClr r="0" g="0" b="0"/>
+          </a:lnRef>
+          <a:fillRef idx="0">
+            <a:scrgbClr r="0" g="0" b="0"/>
+          </a:fillRef>
+          <a:effectRef idx="0">
+            <a:scrgbClr r="0" g="0" b="0"/>
+          </a:effectRef>
+          <a:fontRef idx="minor">
+            <a:schemeClr val="tx1"/>
+          </a:fontRef>
+        </p:style>
+      </p:cxnSp>
+      <p:cxnSp>
+        <p:nvCxnSpPr>
+          <p:cNvPr id="146" name="Straight Arrow Connector 145">
+            <a:extLst>
+              <a:ext uri="{FF2B5EF4-FFF2-40B4-BE49-F238E27FC236}">
+                <a16:creationId xmlns:a16="http://schemas.microsoft.com/office/drawing/2014/main" id="{C1E6F10B-CE21-942B-AE78-773A2860A596}"/>
+              </a:ext>
+            </a:extLst>
+          </p:cNvPr>
+          <p:cNvCxnSpPr>
+            <a:cxnSpLocks/>
+            <a:stCxn id="150" idx="3"/>
+            <a:endCxn id="9" idx="1"/>
+          </p:cNvCxnSpPr>
+          <p:nvPr/>
+        </p:nvCxnSpPr>
+        <p:spPr>
+          <a:xfrm flipV="1">
+            <a:off x="3050360" y="3435425"/>
+            <a:ext cx="3283480" cy="17960"/>
+          </a:xfrm>
+          <a:prstGeom prst="straightConnector1">
+            <a:avLst/>
+          </a:prstGeom>
+          <a:ln w="19050" cap="flat" cmpd="sng" algn="ctr">
+            <a:solidFill>
+              <a:schemeClr val="dk1"/>
+            </a:solidFill>
+            <a:prstDash val="solid"/>
+            <a:round/>
+            <a:headEnd type="none" w="med" len="med"/>
+            <a:tailEnd type="triangle" w="med" len="med"/>
+          </a:ln>
+        </p:spPr>
+        <p:style>
+          <a:lnRef idx="0">
+            <a:scrgbClr r="0" g="0" b="0"/>
+          </a:lnRef>
+          <a:fillRef idx="0">
+            <a:scrgbClr r="0" g="0" b="0"/>
+          </a:fillRef>
+          <a:effectRef idx="0">
+            <a:scrgbClr r="0" g="0" b="0"/>
+          </a:effectRef>
+          <a:fontRef idx="minor">
+            <a:schemeClr val="tx1"/>
+          </a:fontRef>
+        </p:style>
+      </p:cxnSp>
+      <p:sp>
+        <p:nvSpPr>
+          <p:cNvPr id="150" name="TextBox 149">
+            <a:extLst>
+              <a:ext uri="{FF2B5EF4-FFF2-40B4-BE49-F238E27FC236}">
+                <a16:creationId xmlns:a16="http://schemas.microsoft.com/office/drawing/2014/main" id="{82CFF197-1EFE-07B9-7067-105D2CBC28E7}"/>
+              </a:ext>
+            </a:extLst>
+          </p:cNvPr>
+          <p:cNvSpPr txBox="1"/>
+          <p:nvPr/>
+        </p:nvSpPr>
+        <p:spPr>
+          <a:xfrm>
+            <a:off x="1358360" y="2733385"/>
+            <a:ext cx="1692000" cy="1440000"/>
+          </a:xfrm>
+          <a:prstGeom prst="rect">
+            <a:avLst/>
+          </a:prstGeom>
+        </p:spPr>
+        <p:style>
+          <a:lnRef idx="2">
+            <a:schemeClr val="accent3"/>
+          </a:lnRef>
+          <a:fillRef idx="1">
+            <a:schemeClr val="lt1"/>
+          </a:fillRef>
+          <a:effectRef idx="0">
+            <a:schemeClr val="accent3"/>
+          </a:effectRef>
+          <a:fontRef idx="minor">
+            <a:schemeClr val="dk1"/>
+          </a:fontRef>
+        </p:style>
+        <p:txBody>
+          <a:bodyPr wrap="square" rtlCol="0">
+            <a:spAutoFit/>
+          </a:bodyPr>
+          <a:lstStyle/>
+          <a:p>
+            <a:endParaRPr lang="en-US" noProof="0" dirty="0"/>
+          </a:p>
+        </p:txBody>
+      </p:sp>
+      <p:sp>
+        <p:nvSpPr>
+          <p:cNvPr id="151" name="TextBox 150">
+            <a:extLst>
+              <a:ext uri="{FF2B5EF4-FFF2-40B4-BE49-F238E27FC236}">
+                <a16:creationId xmlns:a16="http://schemas.microsoft.com/office/drawing/2014/main" id="{5BA92C8E-2F4F-1626-C876-8DE60C0BFC95}"/>
+              </a:ext>
+            </a:extLst>
+          </p:cNvPr>
+          <p:cNvSpPr txBox="1"/>
+          <p:nvPr/>
+        </p:nvSpPr>
+        <p:spPr>
+          <a:xfrm>
+            <a:off x="1467400" y="2794427"/>
+            <a:ext cx="1440000" cy="276999"/>
+          </a:xfrm>
+          <a:prstGeom prst="rect">
+            <a:avLst/>
+          </a:prstGeom>
+        </p:spPr>
+        <p:style>
+          <a:lnRef idx="2">
+            <a:schemeClr val="dk1"/>
+          </a:lnRef>
+          <a:fillRef idx="1">
+            <a:schemeClr val="lt1"/>
+          </a:fillRef>
+          <a:effectRef idx="0">
+            <a:schemeClr val="dk1"/>
+          </a:effectRef>
+          <a:fontRef idx="minor">
+            <a:schemeClr val="dk1"/>
+          </a:fontRef>
+        </p:style>
+        <p:txBody>
+          <a:bodyPr wrap="square" rtlCol="0">
+            <a:spAutoFit/>
+          </a:bodyPr>
+          <a:lstStyle/>
+          <a:p>
+            <a:pPr algn="ctr"/>
+            <a:r>
+              <a:rPr lang="en-US" sz="1200" noProof="0" dirty="0">
+                <a:latin typeface="Times New Roman" panose="02020603050405020304" pitchFamily="18" charset="0"/>
+                <a:cs typeface="Times New Roman" panose="02020603050405020304" pitchFamily="18" charset="0"/>
+              </a:rPr>
+              <a:t>Socio-economic</a:t>
+            </a:r>
+          </a:p>
+        </p:txBody>
+      </p:sp>
+      <p:sp>
+        <p:nvSpPr>
+          <p:cNvPr id="152" name="TextBox 151">
+            <a:extLst>
+              <a:ext uri="{FF2B5EF4-FFF2-40B4-BE49-F238E27FC236}">
+                <a16:creationId xmlns:a16="http://schemas.microsoft.com/office/drawing/2014/main" id="{5CADB8FB-8CD0-100A-44B5-0F1BEE74652A}"/>
+              </a:ext>
+            </a:extLst>
+          </p:cNvPr>
+          <p:cNvSpPr txBox="1"/>
+          <p:nvPr/>
+        </p:nvSpPr>
+        <p:spPr>
+          <a:xfrm>
+            <a:off x="1467400" y="3145984"/>
+            <a:ext cx="1440000" cy="276999"/>
+          </a:xfrm>
+          <a:prstGeom prst="rect">
+            <a:avLst/>
+          </a:prstGeom>
+        </p:spPr>
+        <p:style>
+          <a:lnRef idx="2">
+            <a:schemeClr val="dk1"/>
+          </a:lnRef>
+          <a:fillRef idx="1">
+            <a:schemeClr val="lt1"/>
+          </a:fillRef>
+          <a:effectRef idx="0">
+            <a:schemeClr val="dk1"/>
+          </a:effectRef>
+          <a:fontRef idx="minor">
+            <a:schemeClr val="dk1"/>
+          </a:fontRef>
+        </p:style>
+        <p:txBody>
+          <a:bodyPr wrap="square" rtlCol="0">
+            <a:spAutoFit/>
+          </a:bodyPr>
+          <a:lstStyle/>
+          <a:p>
+            <a:pPr algn="ctr"/>
+            <a:r>
+              <a:rPr lang="en-US" sz="1200" noProof="0" dirty="0">
+                <a:latin typeface="Times New Roman" panose="02020603050405020304" pitchFamily="18" charset="0"/>
+                <a:cs typeface="Times New Roman" panose="02020603050405020304" pitchFamily="18" charset="0"/>
+              </a:rPr>
+              <a:t>Socio-cultural</a:t>
+            </a:r>
+          </a:p>
+        </p:txBody>
+      </p:sp>
+      <p:sp>
+        <p:nvSpPr>
+          <p:cNvPr id="153" name="TextBox 152">
+            <a:extLst>
+              <a:ext uri="{FF2B5EF4-FFF2-40B4-BE49-F238E27FC236}">
+                <a16:creationId xmlns:a16="http://schemas.microsoft.com/office/drawing/2014/main" id="{BD991ADB-B50F-66E4-1E1E-432F5513935E}"/>
+              </a:ext>
+            </a:extLst>
+          </p:cNvPr>
+          <p:cNvSpPr txBox="1"/>
+          <p:nvPr/>
+        </p:nvSpPr>
+        <p:spPr>
+          <a:xfrm>
+            <a:off x="1467400" y="3490087"/>
+            <a:ext cx="1440000" cy="276999"/>
+          </a:xfrm>
+          <a:prstGeom prst="rect">
+            <a:avLst/>
+          </a:prstGeom>
+        </p:spPr>
+        <p:style>
+          <a:lnRef idx="2">
+            <a:schemeClr val="dk1"/>
+          </a:lnRef>
+          <a:fillRef idx="1">
+            <a:schemeClr val="lt1"/>
+          </a:fillRef>
+          <a:effectRef idx="0">
+            <a:schemeClr val="dk1"/>
+          </a:effectRef>
+          <a:fontRef idx="minor">
+            <a:schemeClr val="dk1"/>
+          </a:fontRef>
+        </p:style>
+        <p:txBody>
+          <a:bodyPr wrap="square" rtlCol="0">
+            <a:spAutoFit/>
+          </a:bodyPr>
+          <a:lstStyle/>
+          <a:p>
+            <a:pPr algn="ctr"/>
+            <a:r>
+              <a:rPr lang="en-US" sz="1200" dirty="0">
+                <a:latin typeface="Times New Roman" panose="02020603050405020304" pitchFamily="18" charset="0"/>
+                <a:cs typeface="Times New Roman" panose="02020603050405020304" pitchFamily="18" charset="0"/>
+              </a:rPr>
+              <a:t>Political</a:t>
+            </a:r>
+          </a:p>
+        </p:txBody>
+      </p:sp>
+      <p:sp>
+        <p:nvSpPr>
+          <p:cNvPr id="154" name="TextBox 153">
+            <a:extLst>
+              <a:ext uri="{FF2B5EF4-FFF2-40B4-BE49-F238E27FC236}">
+                <a16:creationId xmlns:a16="http://schemas.microsoft.com/office/drawing/2014/main" id="{DC977B5B-C39B-0938-89DD-5E2C294A2C3E}"/>
+              </a:ext>
+            </a:extLst>
+          </p:cNvPr>
+          <p:cNvSpPr txBox="1"/>
+          <p:nvPr/>
+        </p:nvSpPr>
+        <p:spPr>
+          <a:xfrm>
+            <a:off x="1467400" y="3828882"/>
+            <a:ext cx="1440000" cy="276999"/>
+          </a:xfrm>
+          <a:prstGeom prst="rect">
+            <a:avLst/>
+          </a:prstGeom>
+        </p:spPr>
+        <p:style>
+          <a:lnRef idx="2">
+            <a:schemeClr val="dk1"/>
+          </a:lnRef>
+          <a:fillRef idx="1">
+            <a:schemeClr val="lt1"/>
+          </a:fillRef>
+          <a:effectRef idx="0">
+            <a:schemeClr val="dk1"/>
+          </a:effectRef>
+          <a:fontRef idx="minor">
+            <a:schemeClr val="dk1"/>
+          </a:fontRef>
+        </p:style>
+        <p:txBody>
+          <a:bodyPr wrap="square" rtlCol="0">
+            <a:spAutoFit/>
+          </a:bodyPr>
+          <a:lstStyle/>
+          <a:p>
+            <a:pPr algn="ctr"/>
+            <a:r>
+              <a:rPr lang="en-US" sz="1200" dirty="0">
+                <a:latin typeface="Times New Roman" panose="02020603050405020304" pitchFamily="18" charset="0"/>
+                <a:cs typeface="Times New Roman" panose="02020603050405020304" pitchFamily="18" charset="0"/>
+              </a:rPr>
+              <a:t>Values</a:t>
+            </a:r>
+            <a:endParaRPr lang="en-US" sz="1200" noProof="0" dirty="0">
+              <a:latin typeface="Times New Roman" panose="02020603050405020304" pitchFamily="18" charset="0"/>
+              <a:cs typeface="Times New Roman" panose="02020603050405020304" pitchFamily="18" charset="0"/>
+            </a:endParaRPr>
+          </a:p>
+        </p:txBody>
+      </p:sp>
+      <p:sp>
+        <p:nvSpPr>
+          <p:cNvPr id="166" name="TextBox 165">
+            <a:extLst>
+              <a:ext uri="{FF2B5EF4-FFF2-40B4-BE49-F238E27FC236}">
+                <a16:creationId xmlns:a16="http://schemas.microsoft.com/office/drawing/2014/main" id="{2566B2D7-C8D8-E952-580B-429A88827CCB}"/>
+              </a:ext>
+            </a:extLst>
+          </p:cNvPr>
+          <p:cNvSpPr txBox="1"/>
+          <p:nvPr/>
+        </p:nvSpPr>
+        <p:spPr>
+          <a:xfrm>
+            <a:off x="3742600" y="846996"/>
+            <a:ext cx="1764000" cy="1548000"/>
+          </a:xfrm>
+          <a:prstGeom prst="roundRect">
+            <a:avLst/>
+          </a:prstGeom>
+        </p:spPr>
+        <p:style>
+          <a:lnRef idx="2">
+            <a:schemeClr val="accent3"/>
+          </a:lnRef>
+          <a:fillRef idx="1">
+            <a:schemeClr val="lt1"/>
+          </a:fillRef>
+          <a:effectRef idx="0">
+            <a:schemeClr val="accent3"/>
+          </a:effectRef>
+          <a:fontRef idx="minor">
+            <a:schemeClr val="dk1"/>
+          </a:fontRef>
+        </p:style>
+        <p:txBody>
+          <a:bodyPr wrap="square" rtlCol="0">
+            <a:spAutoFit/>
+          </a:bodyPr>
+          <a:lstStyle/>
+          <a:p>
+            <a:endParaRPr lang="en-US" noProof="0" dirty="0"/>
+          </a:p>
+        </p:txBody>
+      </p:sp>
+      <p:sp>
+        <p:nvSpPr>
+          <p:cNvPr id="167" name="TextBox 166">
+            <a:extLst>
+              <a:ext uri="{FF2B5EF4-FFF2-40B4-BE49-F238E27FC236}">
+                <a16:creationId xmlns:a16="http://schemas.microsoft.com/office/drawing/2014/main" id="{7A2E2988-B1E7-F42C-6C53-BE6140031EF5}"/>
+              </a:ext>
+            </a:extLst>
+          </p:cNvPr>
+          <p:cNvSpPr txBox="1"/>
+          <p:nvPr/>
+        </p:nvSpPr>
+        <p:spPr>
+          <a:xfrm>
+            <a:off x="3892250" y="934612"/>
+            <a:ext cx="1440000" cy="276999"/>
+          </a:xfrm>
+          <a:prstGeom prst="rect">
+            <a:avLst/>
+          </a:prstGeom>
+        </p:spPr>
+        <p:style>
+          <a:lnRef idx="2">
+            <a:schemeClr val="dk1"/>
+          </a:lnRef>
+          <a:fillRef idx="1">
+            <a:schemeClr val="lt1"/>
+          </a:fillRef>
+          <a:effectRef idx="0">
+            <a:schemeClr val="dk1"/>
+          </a:effectRef>
+          <a:fontRef idx="minor">
+            <a:schemeClr val="dk1"/>
+          </a:fontRef>
+        </p:style>
+        <p:txBody>
+          <a:bodyPr wrap="square" rtlCol="0">
+            <a:spAutoFit/>
+          </a:bodyPr>
+          <a:lstStyle/>
+          <a:p>
+            <a:pPr algn="ctr"/>
+            <a:r>
+              <a:rPr lang="en-US" sz="1200" noProof="0" dirty="0">
+                <a:latin typeface="Times New Roman" panose="02020603050405020304" pitchFamily="18" charset="0"/>
+                <a:cs typeface="Times New Roman" panose="02020603050405020304" pitchFamily="18" charset="0"/>
+              </a:rPr>
+              <a:t>Socio-economic</a:t>
+            </a:r>
+          </a:p>
+        </p:txBody>
+      </p:sp>
+      <p:sp>
+        <p:nvSpPr>
+          <p:cNvPr id="168" name="TextBox 167">
+            <a:extLst>
+              <a:ext uri="{FF2B5EF4-FFF2-40B4-BE49-F238E27FC236}">
+                <a16:creationId xmlns:a16="http://schemas.microsoft.com/office/drawing/2014/main" id="{C0248755-6C4F-DC36-5875-350128F4536C}"/>
+              </a:ext>
+            </a:extLst>
+          </p:cNvPr>
+          <p:cNvSpPr txBox="1"/>
+          <p:nvPr/>
+        </p:nvSpPr>
+        <p:spPr>
+          <a:xfrm>
+            <a:off x="3892250" y="1286169"/>
+            <a:ext cx="1440000" cy="276999"/>
+          </a:xfrm>
+          <a:prstGeom prst="rect">
+            <a:avLst/>
+          </a:prstGeom>
+        </p:spPr>
+        <p:style>
+          <a:lnRef idx="2">
+            <a:schemeClr val="dk1"/>
+          </a:lnRef>
+          <a:fillRef idx="1">
+            <a:schemeClr val="lt1"/>
+          </a:fillRef>
+          <a:effectRef idx="0">
+            <a:schemeClr val="dk1"/>
+          </a:effectRef>
+          <a:fontRef idx="minor">
+            <a:schemeClr val="dk1"/>
+          </a:fontRef>
+        </p:style>
+        <p:txBody>
+          <a:bodyPr wrap="square" rtlCol="0">
+            <a:spAutoFit/>
+          </a:bodyPr>
+          <a:lstStyle/>
+          <a:p>
+            <a:pPr algn="ctr"/>
+            <a:r>
+              <a:rPr lang="en-US" sz="1200" noProof="0" dirty="0">
+                <a:latin typeface="Times New Roman" panose="02020603050405020304" pitchFamily="18" charset="0"/>
+                <a:cs typeface="Times New Roman" panose="02020603050405020304" pitchFamily="18" charset="0"/>
+              </a:rPr>
+              <a:t>Socio-cultural</a:t>
+            </a:r>
+          </a:p>
+        </p:txBody>
+      </p:sp>
+      <p:sp>
+        <p:nvSpPr>
+          <p:cNvPr id="169" name="TextBox 168">
+            <a:extLst>
+              <a:ext uri="{FF2B5EF4-FFF2-40B4-BE49-F238E27FC236}">
+                <a16:creationId xmlns:a16="http://schemas.microsoft.com/office/drawing/2014/main" id="{07985B01-0BDC-670E-6771-F65A31CF52DB}"/>
+              </a:ext>
+            </a:extLst>
+          </p:cNvPr>
+          <p:cNvSpPr txBox="1"/>
+          <p:nvPr/>
+        </p:nvSpPr>
+        <p:spPr>
+          <a:xfrm>
+            <a:off x="3892250" y="1630272"/>
+            <a:ext cx="1440000" cy="276999"/>
+          </a:xfrm>
+          <a:prstGeom prst="rect">
+            <a:avLst/>
+          </a:prstGeom>
+        </p:spPr>
+        <p:style>
+          <a:lnRef idx="2">
+            <a:schemeClr val="dk1"/>
+          </a:lnRef>
+          <a:fillRef idx="1">
+            <a:schemeClr val="lt1"/>
+          </a:fillRef>
+          <a:effectRef idx="0">
+            <a:schemeClr val="dk1"/>
+          </a:effectRef>
+          <a:fontRef idx="minor">
+            <a:schemeClr val="dk1"/>
+          </a:fontRef>
+        </p:style>
+        <p:txBody>
+          <a:bodyPr wrap="square" rtlCol="0">
+            <a:spAutoFit/>
+          </a:bodyPr>
+          <a:lstStyle/>
+          <a:p>
+            <a:pPr algn="ctr"/>
+            <a:r>
+              <a:rPr lang="en-US" sz="1200" dirty="0">
+                <a:latin typeface="Times New Roman" panose="02020603050405020304" pitchFamily="18" charset="0"/>
+                <a:cs typeface="Times New Roman" panose="02020603050405020304" pitchFamily="18" charset="0"/>
+              </a:rPr>
+              <a:t>Political</a:t>
+            </a:r>
+          </a:p>
+        </p:txBody>
+      </p:sp>
+      <p:sp>
+        <p:nvSpPr>
+          <p:cNvPr id="170" name="TextBox 169">
+            <a:extLst>
+              <a:ext uri="{FF2B5EF4-FFF2-40B4-BE49-F238E27FC236}">
+                <a16:creationId xmlns:a16="http://schemas.microsoft.com/office/drawing/2014/main" id="{F2EE69CC-20FE-A32F-F819-F4071802B934}"/>
+              </a:ext>
+            </a:extLst>
+          </p:cNvPr>
+          <p:cNvSpPr txBox="1"/>
+          <p:nvPr/>
+        </p:nvSpPr>
+        <p:spPr>
+          <a:xfrm>
+            <a:off x="3892250" y="1969067"/>
+            <a:ext cx="1440000" cy="276999"/>
+          </a:xfrm>
+          <a:prstGeom prst="rect">
+            <a:avLst/>
+          </a:prstGeom>
+        </p:spPr>
+        <p:style>
+          <a:lnRef idx="2">
+            <a:schemeClr val="dk1"/>
+          </a:lnRef>
+          <a:fillRef idx="1">
+            <a:schemeClr val="lt1"/>
+          </a:fillRef>
+          <a:effectRef idx="0">
+            <a:schemeClr val="dk1"/>
+          </a:effectRef>
+          <a:fontRef idx="minor">
+            <a:schemeClr val="dk1"/>
+          </a:fontRef>
+        </p:style>
+        <p:txBody>
+          <a:bodyPr wrap="square" rtlCol="0">
+            <a:spAutoFit/>
+          </a:bodyPr>
+          <a:lstStyle/>
+          <a:p>
+            <a:pPr algn="ctr"/>
+            <a:r>
+              <a:rPr lang="en-US" sz="1200" dirty="0">
+                <a:latin typeface="Times New Roman" panose="02020603050405020304" pitchFamily="18" charset="0"/>
+                <a:cs typeface="Times New Roman" panose="02020603050405020304" pitchFamily="18" charset="0"/>
+              </a:rPr>
+              <a:t>Values</a:t>
+            </a:r>
+            <a:endParaRPr lang="en-US" sz="1200" noProof="0" dirty="0">
+              <a:latin typeface="Times New Roman" panose="02020603050405020304" pitchFamily="18" charset="0"/>
+              <a:cs typeface="Times New Roman" panose="02020603050405020304" pitchFamily="18" charset="0"/>
+            </a:endParaRPr>
+          </a:p>
+        </p:txBody>
+      </p:sp>
+      <p:cxnSp>
+        <p:nvCxnSpPr>
+          <p:cNvPr id="173" name="Straight Arrow Connector 172">
+            <a:extLst>
+              <a:ext uri="{FF2B5EF4-FFF2-40B4-BE49-F238E27FC236}">
+                <a16:creationId xmlns:a16="http://schemas.microsoft.com/office/drawing/2014/main" id="{3F2827F9-0E3B-72F0-789A-0B9F85854CF7}"/>
+              </a:ext>
+            </a:extLst>
+          </p:cNvPr>
+          <p:cNvCxnSpPr>
+            <a:cxnSpLocks/>
+            <a:stCxn id="166" idx="2"/>
+          </p:cNvCxnSpPr>
+          <p:nvPr/>
+        </p:nvCxnSpPr>
+        <p:spPr>
+          <a:xfrm>
+            <a:off x="4624600" y="2394996"/>
+            <a:ext cx="0" cy="1027987"/>
+          </a:xfrm>
+          <a:prstGeom prst="straightConnector1">
+            <a:avLst/>
+          </a:prstGeom>
+          <a:ln w="19050" cap="flat" cmpd="sng" algn="ctr">
+            <a:solidFill>
+              <a:schemeClr val="dk1"/>
+            </a:solidFill>
+            <a:prstDash val="solid"/>
+            <a:round/>
+            <a:headEnd type="none" w="med" len="med"/>
+            <a:tailEnd type="triangle" w="med" len="med"/>
+          </a:ln>
+        </p:spPr>
+        <p:style>
+          <a:lnRef idx="0">
+            <a:scrgbClr r="0" g="0" b="0"/>
+          </a:lnRef>
+          <a:fillRef idx="0">
+            <a:scrgbClr r="0" g="0" b="0"/>
+          </a:fillRef>
+          <a:effectRef idx="0">
+            <a:scrgbClr r="0" g="0" b="0"/>
+          </a:effectRef>
+          <a:fontRef idx="minor">
+            <a:schemeClr val="tx1"/>
+          </a:fontRef>
+        </p:style>
+      </p:cxnSp>
+    </p:spTree>
+    <p:extLst>
+      <p:ext uri="{BB962C8B-B14F-4D97-AF65-F5344CB8AC3E}">
+        <p14:creationId xmlns:p14="http://schemas.microsoft.com/office/powerpoint/2010/main" val="3025336891"/>
+      </p:ext>
+    </p:extLst>
+  </p:cSld>
+  <p:clrMapOvr>
+    <a:masterClrMapping/>
+  </p:clrMapOvr>
+</p:sld>
+</file>
+
+<file path=ppt/slides/slide32.xml><?xml version="1.0" encoding="utf-8"?>
+<p:sld xmlns:a="http://schemas.openxmlformats.org/drawingml/2006/main" xmlns:r="http://schemas.openxmlformats.org/officeDocument/2006/relationships" xmlns:p="http://schemas.openxmlformats.org/presentationml/2006/main">
+  <p:cSld>
+    <p:spTree>
+      <p:nvGrpSpPr>
+        <p:cNvPr id="1" name="Shape 126">
+          <a:extLst>
+            <a:ext uri="{FF2B5EF4-FFF2-40B4-BE49-F238E27FC236}">
+              <a16:creationId xmlns:a16="http://schemas.microsoft.com/office/drawing/2014/main" id="{A5511CAC-9996-126C-6118-5031741E1AFA}"/>
+            </a:ext>
+          </a:extLst>
+        </p:cNvPr>
+        <p:cNvGrpSpPr/>
+        <p:nvPr/>
+      </p:nvGrpSpPr>
+      <p:grpSpPr>
+        <a:xfrm>
+          <a:off x="0" y="0"/>
+          <a:ext cx="0" cy="0"/>
+          <a:chOff x="0" y="0"/>
+          <a:chExt cx="0" cy="0"/>
+        </a:xfrm>
+      </p:grpSpPr>
+      <p:sp>
+        <p:nvSpPr>
+          <p:cNvPr id="25" name="TextBox 24">
+            <a:extLst>
+              <a:ext uri="{FF2B5EF4-FFF2-40B4-BE49-F238E27FC236}">
+                <a16:creationId xmlns:a16="http://schemas.microsoft.com/office/drawing/2014/main" id="{9E4D6BC8-5B64-090F-1F4F-DB2CB9218BF0}"/>
+              </a:ext>
+            </a:extLst>
+          </p:cNvPr>
+          <p:cNvSpPr txBox="1"/>
+          <p:nvPr/>
+        </p:nvSpPr>
+        <p:spPr>
+          <a:xfrm>
+            <a:off x="1196074" y="577459"/>
+            <a:ext cx="6978108" cy="3970318"/>
+          </a:xfrm>
+          <a:prstGeom prst="rect">
+            <a:avLst/>
+          </a:prstGeom>
+        </p:spPr>
+        <p:style>
+          <a:lnRef idx="2">
+            <a:schemeClr val="dk1"/>
+          </a:lnRef>
+          <a:fillRef idx="1">
+            <a:schemeClr val="lt1"/>
+          </a:fillRef>
+          <a:effectRef idx="0">
+            <a:schemeClr val="dk1"/>
+          </a:effectRef>
+          <a:fontRef idx="minor">
+            <a:schemeClr val="dk1"/>
+          </a:fontRef>
+        </p:style>
+        <p:txBody>
+          <a:bodyPr wrap="square" rtlCol="0">
+            <a:spAutoFit/>
+          </a:bodyPr>
+          <a:lstStyle/>
+          <a:p>
+            <a:pPr algn="r"/>
+            <a:r>
+              <a:rPr lang="en-US" i="1" noProof="0" dirty="0" err="1">
+                <a:latin typeface="Times New Roman" panose="02020603050405020304" pitchFamily="18" charset="0"/>
+                <a:cs typeface="Times New Roman" panose="02020603050405020304" pitchFamily="18" charset="0"/>
+              </a:rPr>
+              <a:t>Respondente</a:t>
+            </a:r>
+            <a:br>
+              <a:rPr lang="en-US" noProof="0" dirty="0"/>
+            </a:br>
+            <a:br>
+              <a:rPr lang="en-US" noProof="0" dirty="0"/>
+            </a:br>
+            <a:br>
+              <a:rPr lang="en-US" noProof="0" dirty="0"/>
+            </a:br>
+            <a:br>
+              <a:rPr lang="en-US" noProof="0" dirty="0"/>
+            </a:br>
+            <a:br>
+              <a:rPr lang="en-US" noProof="0" dirty="0"/>
+            </a:br>
+            <a:br>
+              <a:rPr lang="en-US" noProof="0" dirty="0"/>
+            </a:br>
+            <a:br>
+              <a:rPr lang="en-US" noProof="0" dirty="0"/>
+            </a:br>
+            <a:br>
+              <a:rPr lang="en-US" noProof="0" dirty="0"/>
+            </a:br>
+            <a:br>
+              <a:rPr lang="en-US" noProof="0" dirty="0"/>
+            </a:br>
+            <a:br>
+              <a:rPr lang="en-US" noProof="0" dirty="0"/>
+            </a:br>
+            <a:br>
+              <a:rPr lang="en-US" noProof="0" dirty="0"/>
+            </a:br>
+            <a:br>
+              <a:rPr lang="en-US" noProof="0" dirty="0"/>
+            </a:br>
+            <a:br>
+              <a:rPr lang="en-US" noProof="0" dirty="0"/>
+            </a:br>
+            <a:br>
+              <a:rPr lang="en-US" noProof="0" dirty="0"/>
+            </a:br>
+            <a:br>
+              <a:rPr lang="en-US" noProof="0" dirty="0"/>
+            </a:br>
+            <a:br>
+              <a:rPr lang="en-US" noProof="0" dirty="0"/>
+            </a:br>
+            <a:br>
+              <a:rPr lang="en-US" noProof="0" dirty="0"/>
+            </a:br>
+            <a:r>
+              <a:rPr lang="en-US" i="1" noProof="0" dirty="0" err="1">
+                <a:latin typeface="Times New Roman" panose="02020603050405020304" pitchFamily="18" charset="0"/>
+                <a:cs typeface="Times New Roman" panose="02020603050405020304" pitchFamily="18" charset="0"/>
+              </a:rPr>
+              <a:t>Viñeta</a:t>
+            </a:r>
+            <a:endParaRPr lang="en-US" i="1" noProof="0" dirty="0">
+              <a:latin typeface="Times New Roman" panose="02020603050405020304" pitchFamily="18" charset="0"/>
+              <a:cs typeface="Times New Roman" panose="02020603050405020304" pitchFamily="18" charset="0"/>
+            </a:endParaRPr>
+          </a:p>
+        </p:txBody>
+      </p:sp>
+      <p:sp>
+        <p:nvSpPr>
+          <p:cNvPr id="28" name="TextBox 27">
+            <a:extLst>
+              <a:ext uri="{FF2B5EF4-FFF2-40B4-BE49-F238E27FC236}">
+                <a16:creationId xmlns:a16="http://schemas.microsoft.com/office/drawing/2014/main" id="{444BB50C-5E24-7150-12DE-48E6211ADFD6}"/>
+              </a:ext>
+            </a:extLst>
+          </p:cNvPr>
+          <p:cNvSpPr txBox="1"/>
+          <p:nvPr/>
+        </p:nvSpPr>
+        <p:spPr>
+          <a:xfrm>
+            <a:off x="1385454" y="625948"/>
+            <a:ext cx="1614055" cy="1882038"/>
+          </a:xfrm>
+          <a:prstGeom prst="rect">
+            <a:avLst/>
+          </a:prstGeom>
+        </p:spPr>
+        <p:style>
+          <a:lnRef idx="2">
+            <a:schemeClr val="accent3"/>
+          </a:lnRef>
+          <a:fillRef idx="1">
+            <a:schemeClr val="lt1"/>
+          </a:fillRef>
+          <a:effectRef idx="0">
+            <a:schemeClr val="accent3"/>
+          </a:effectRef>
+          <a:fontRef idx="minor">
+            <a:schemeClr val="dk1"/>
+          </a:fontRef>
+        </p:style>
+        <p:txBody>
+          <a:bodyPr wrap="square" rtlCol="0">
+            <a:spAutoFit/>
+          </a:bodyPr>
+          <a:lstStyle/>
+          <a:p>
+            <a:endParaRPr lang="en-US" noProof="0" dirty="0"/>
+          </a:p>
+        </p:txBody>
+      </p:sp>
+      <p:sp>
+        <p:nvSpPr>
+          <p:cNvPr id="128" name="Google Shape;128;p21">
+            <a:extLst>
+              <a:ext uri="{FF2B5EF4-FFF2-40B4-BE49-F238E27FC236}">
+                <a16:creationId xmlns:a16="http://schemas.microsoft.com/office/drawing/2014/main" id="{903B1A41-2F56-3B08-21E8-16E43553DDBE}"/>
+              </a:ext>
+            </a:extLst>
+          </p:cNvPr>
+          <p:cNvSpPr txBox="1">
+            <a:spLocks noGrp="1"/>
+          </p:cNvSpPr>
+          <p:nvPr>
+            <p:ph type="sldNum" idx="12"/>
+          </p:nvPr>
+        </p:nvSpPr>
+        <p:spPr>
+          <a:xfrm>
+            <a:off x="8472458" y="4663217"/>
+            <a:ext cx="548700" cy="393600"/>
+          </a:xfrm>
+          <a:prstGeom prst="rect">
+            <a:avLst/>
+          </a:prstGeom>
+        </p:spPr>
+        <p:txBody>
+          <a:bodyPr spcFirstLastPara="1" wrap="square" lIns="91425" tIns="91425" rIns="91425" bIns="91425" anchor="ctr" anchorCtr="0">
+            <a:normAutofit/>
+          </a:bodyPr>
+          <a:lstStyle/>
+          <a:p>
+            <a:pPr marL="0" lvl="0" indent="0" algn="r" rtl="0">
+              <a:spcBef>
+                <a:spcPts val="0"/>
+              </a:spcBef>
+              <a:spcAft>
+                <a:spcPts val="0"/>
+              </a:spcAft>
+              <a:buNone/>
+            </a:pPr>
+            <a:endParaRPr lang="en-US" noProof="0" dirty="0"/>
+          </a:p>
+        </p:txBody>
+      </p:sp>
+      <p:sp>
+        <p:nvSpPr>
+          <p:cNvPr id="2" name="TextBox 1">
+            <a:extLst>
+              <a:ext uri="{FF2B5EF4-FFF2-40B4-BE49-F238E27FC236}">
+                <a16:creationId xmlns:a16="http://schemas.microsoft.com/office/drawing/2014/main" id="{62E3472F-C617-07CD-54A5-BA24D4B07B31}"/>
+              </a:ext>
+            </a:extLst>
+          </p:cNvPr>
+          <p:cNvSpPr txBox="1"/>
+          <p:nvPr/>
+        </p:nvSpPr>
+        <p:spPr>
+          <a:xfrm>
+            <a:off x="1467400" y="2724093"/>
+            <a:ext cx="1440000" cy="276999"/>
+          </a:xfrm>
+          <a:prstGeom prst="rect">
+            <a:avLst/>
+          </a:prstGeom>
+        </p:spPr>
+        <p:style>
+          <a:lnRef idx="2">
+            <a:schemeClr val="dk1"/>
+          </a:lnRef>
+          <a:fillRef idx="1">
+            <a:schemeClr val="lt1"/>
+          </a:fillRef>
+          <a:effectRef idx="0">
+            <a:schemeClr val="dk1"/>
+          </a:effectRef>
+          <a:fontRef idx="minor">
+            <a:schemeClr val="dk1"/>
+          </a:fontRef>
+        </p:style>
+        <p:txBody>
+          <a:bodyPr wrap="square" rtlCol="0">
+            <a:spAutoFit/>
+          </a:bodyPr>
+          <a:lstStyle/>
+          <a:p>
+            <a:pPr algn="ctr"/>
+            <a:r>
+              <a:rPr lang="en-US" sz="1200" noProof="0" dirty="0">
+                <a:latin typeface="Times New Roman" panose="02020603050405020304" pitchFamily="18" charset="0"/>
+                <a:cs typeface="Times New Roman" panose="02020603050405020304" pitchFamily="18" charset="0"/>
+              </a:rPr>
+              <a:t>NSE</a:t>
+            </a:r>
+          </a:p>
+        </p:txBody>
+      </p:sp>
+      <p:grpSp>
+        <p:nvGrpSpPr>
+          <p:cNvPr id="10" name="Group 9">
+            <a:extLst>
+              <a:ext uri="{FF2B5EF4-FFF2-40B4-BE49-F238E27FC236}">
+                <a16:creationId xmlns:a16="http://schemas.microsoft.com/office/drawing/2014/main" id="{3F30E8A6-6468-8C33-B31F-1F81A6771985}"/>
+              </a:ext>
+            </a:extLst>
+          </p:cNvPr>
+          <p:cNvGrpSpPr/>
+          <p:nvPr/>
+        </p:nvGrpSpPr>
+        <p:grpSpPr>
+          <a:xfrm>
+            <a:off x="6114829" y="2946892"/>
+            <a:ext cx="1440000" cy="1080000"/>
+            <a:chOff x="6057900" y="3392309"/>
+            <a:chExt cx="1440000" cy="1080000"/>
+          </a:xfrm>
+        </p:grpSpPr>
+        <p:sp>
+          <p:nvSpPr>
+            <p:cNvPr id="9" name="TextBox 8">
+              <a:extLst>
+                <a:ext uri="{FF2B5EF4-FFF2-40B4-BE49-F238E27FC236}">
+                  <a16:creationId xmlns:a16="http://schemas.microsoft.com/office/drawing/2014/main" id="{BB33F61E-8FD0-F030-3AD9-9F19232D2038}"/>
+                </a:ext>
+              </a:extLst>
+            </p:cNvPr>
+            <p:cNvSpPr txBox="1"/>
+            <p:nvPr/>
+          </p:nvSpPr>
+          <p:spPr>
+            <a:xfrm>
+              <a:off x="6057900" y="3392309"/>
+              <a:ext cx="1440000" cy="1080000"/>
+            </a:xfrm>
+            <a:prstGeom prst="rect">
+              <a:avLst/>
+            </a:prstGeom>
+          </p:spPr>
+          <p:style>
+            <a:lnRef idx="2">
+              <a:schemeClr val="dk1"/>
+            </a:lnRef>
+            <a:fillRef idx="1">
+              <a:schemeClr val="lt1"/>
+            </a:fillRef>
+            <a:effectRef idx="0">
+              <a:schemeClr val="dk1"/>
+            </a:effectRef>
+            <a:fontRef idx="minor">
+              <a:schemeClr val="dk1"/>
+            </a:fontRef>
+          </p:style>
+          <p:txBody>
+            <a:bodyPr wrap="square" rtlCol="0">
+              <a:spAutoFit/>
+            </a:bodyPr>
+            <a:lstStyle/>
+            <a:p>
+              <a:endParaRPr lang="en-US" noProof="0" dirty="0"/>
+            </a:p>
+          </p:txBody>
+        </p:sp>
+        <p:sp>
+          <p:nvSpPr>
+            <p:cNvPr id="3" name="TextBox 2">
+              <a:extLst>
+                <a:ext uri="{FF2B5EF4-FFF2-40B4-BE49-F238E27FC236}">
+                  <a16:creationId xmlns:a16="http://schemas.microsoft.com/office/drawing/2014/main" id="{3BFAA548-D82A-EFE4-4878-4E1FD99F962F}"/>
+                </a:ext>
+              </a:extLst>
+            </p:cNvPr>
+            <p:cNvSpPr txBox="1"/>
+            <p:nvPr/>
+          </p:nvSpPr>
+          <p:spPr>
+            <a:xfrm>
+              <a:off x="6225540" y="3538745"/>
+              <a:ext cx="1080000" cy="276999"/>
+            </a:xfrm>
+            <a:prstGeom prst="rect">
+              <a:avLst/>
+            </a:prstGeom>
+          </p:spPr>
+          <p:style>
+            <a:lnRef idx="2">
+              <a:schemeClr val="dk1"/>
+            </a:lnRef>
+            <a:fillRef idx="1">
+              <a:schemeClr val="lt1"/>
+            </a:fillRef>
+            <a:effectRef idx="0">
+              <a:schemeClr val="dk1"/>
+            </a:effectRef>
+            <a:fontRef idx="minor">
+              <a:schemeClr val="dk1"/>
+            </a:fontRef>
+          </p:style>
+          <p:txBody>
+            <a:bodyPr wrap="square" rtlCol="0">
+              <a:spAutoFit/>
+            </a:bodyPr>
+            <a:lstStyle/>
+            <a:p>
+              <a:r>
+                <a:rPr lang="en-US" sz="1200" b="1" noProof="0" dirty="0" err="1">
+                  <a:solidFill>
+                    <a:srgbClr val="FF0000"/>
+                  </a:solidFill>
+                  <a:latin typeface="Times New Roman" panose="02020603050405020304" pitchFamily="18" charset="0"/>
+                  <a:cs typeface="Times New Roman" panose="02020603050405020304" pitchFamily="18" charset="0"/>
+                </a:rPr>
+                <a:t>Confianza</a:t>
+              </a:r>
+              <a:endParaRPr lang="en-US" sz="1200" b="1" noProof="0" dirty="0">
+                <a:solidFill>
+                  <a:srgbClr val="FF0000"/>
+                </a:solidFill>
+                <a:latin typeface="Times New Roman" panose="02020603050405020304" pitchFamily="18" charset="0"/>
+                <a:cs typeface="Times New Roman" panose="02020603050405020304" pitchFamily="18" charset="0"/>
+              </a:endParaRPr>
+            </a:p>
+          </p:txBody>
+        </p:sp>
+        <p:sp>
+          <p:nvSpPr>
+            <p:cNvPr id="4" name="TextBox 3">
+              <a:extLst>
+                <a:ext uri="{FF2B5EF4-FFF2-40B4-BE49-F238E27FC236}">
+                  <a16:creationId xmlns:a16="http://schemas.microsoft.com/office/drawing/2014/main" id="{B229D8AB-9FC7-9ED7-501E-826A17DC7510}"/>
+                </a:ext>
+              </a:extLst>
+            </p:cNvPr>
+            <p:cNvSpPr txBox="1"/>
+            <p:nvPr/>
+          </p:nvSpPr>
+          <p:spPr>
+            <a:xfrm>
+              <a:off x="6225540" y="4026425"/>
+              <a:ext cx="1080000" cy="276999"/>
+            </a:xfrm>
+            <a:prstGeom prst="rect">
+              <a:avLst/>
+            </a:prstGeom>
+          </p:spPr>
+          <p:style>
+            <a:lnRef idx="2">
+              <a:schemeClr val="dk1"/>
+            </a:lnRef>
+            <a:fillRef idx="1">
+              <a:schemeClr val="lt1"/>
+            </a:fillRef>
+            <a:effectRef idx="0">
+              <a:schemeClr val="dk1"/>
+            </a:effectRef>
+            <a:fontRef idx="minor">
+              <a:schemeClr val="dk1"/>
+            </a:fontRef>
+          </p:style>
+          <p:txBody>
+            <a:bodyPr wrap="square" rtlCol="0">
+              <a:spAutoFit/>
+            </a:bodyPr>
+            <a:lstStyle/>
+            <a:p>
+              <a:r>
+                <a:rPr lang="en-US" sz="1200" noProof="0" dirty="0">
+                  <a:latin typeface="Times New Roman" panose="02020603050405020304" pitchFamily="18" charset="0"/>
+                  <a:cs typeface="Times New Roman" panose="02020603050405020304" pitchFamily="18" charset="0"/>
+                </a:rPr>
+                <a:t>Cooperación</a:t>
+              </a:r>
+            </a:p>
+          </p:txBody>
+        </p:sp>
+      </p:grpSp>
+      <p:sp>
+        <p:nvSpPr>
+          <p:cNvPr id="5" name="TextBox 4">
+            <a:extLst>
+              <a:ext uri="{FF2B5EF4-FFF2-40B4-BE49-F238E27FC236}">
+                <a16:creationId xmlns:a16="http://schemas.microsoft.com/office/drawing/2014/main" id="{C7DC6F22-1C63-711B-A25E-813A61F82FF0}"/>
+              </a:ext>
+            </a:extLst>
+          </p:cNvPr>
+          <p:cNvSpPr txBox="1"/>
+          <p:nvPr/>
+        </p:nvSpPr>
+        <p:spPr>
+          <a:xfrm>
+            <a:off x="1467400" y="3150153"/>
+            <a:ext cx="1440000" cy="276999"/>
+          </a:xfrm>
+          <a:prstGeom prst="rect">
+            <a:avLst/>
+          </a:prstGeom>
+        </p:spPr>
+        <p:style>
+          <a:lnRef idx="2">
+            <a:schemeClr val="dk1"/>
+          </a:lnRef>
+          <a:fillRef idx="1">
+            <a:schemeClr val="lt1"/>
+          </a:fillRef>
+          <a:effectRef idx="0">
+            <a:schemeClr val="dk1"/>
+          </a:effectRef>
+          <a:fontRef idx="minor">
+            <a:schemeClr val="dk1"/>
+          </a:fontRef>
+        </p:style>
+        <p:txBody>
+          <a:bodyPr wrap="square" rtlCol="0">
+            <a:spAutoFit/>
+          </a:bodyPr>
+          <a:lstStyle/>
+          <a:p>
+            <a:pPr algn="ctr"/>
+            <a:r>
+              <a:rPr lang="en-US" sz="1200" noProof="0" dirty="0" err="1">
+                <a:latin typeface="Times New Roman" panose="02020603050405020304" pitchFamily="18" charset="0"/>
+                <a:cs typeface="Times New Roman" panose="02020603050405020304" pitchFamily="18" charset="0"/>
+              </a:rPr>
+              <a:t>Migración</a:t>
+            </a:r>
+            <a:endParaRPr lang="en-US" sz="1200" noProof="0" dirty="0">
+              <a:latin typeface="Times New Roman" panose="02020603050405020304" pitchFamily="18" charset="0"/>
+              <a:cs typeface="Times New Roman" panose="02020603050405020304" pitchFamily="18" charset="0"/>
+            </a:endParaRPr>
+          </a:p>
+        </p:txBody>
+      </p:sp>
+      <p:sp>
+        <p:nvSpPr>
+          <p:cNvPr id="6" name="TextBox 5">
+            <a:extLst>
+              <a:ext uri="{FF2B5EF4-FFF2-40B4-BE49-F238E27FC236}">
+                <a16:creationId xmlns:a16="http://schemas.microsoft.com/office/drawing/2014/main" id="{ABBC74D0-F87D-7881-FE64-D7A264D80C20}"/>
+              </a:ext>
+            </a:extLst>
+          </p:cNvPr>
+          <p:cNvSpPr txBox="1"/>
+          <p:nvPr/>
+        </p:nvSpPr>
+        <p:spPr>
+          <a:xfrm>
+            <a:off x="1467400" y="3486892"/>
+            <a:ext cx="1440000" cy="276999"/>
+          </a:xfrm>
+          <a:prstGeom prst="rect">
+            <a:avLst/>
+          </a:prstGeom>
+        </p:spPr>
+        <p:style>
+          <a:lnRef idx="2">
+            <a:schemeClr val="dk1"/>
+          </a:lnRef>
+          <a:fillRef idx="1">
+            <a:schemeClr val="lt1"/>
+          </a:fillRef>
+          <a:effectRef idx="0">
+            <a:schemeClr val="dk1"/>
+          </a:effectRef>
+          <a:fontRef idx="minor">
+            <a:schemeClr val="dk1"/>
+          </a:fontRef>
+        </p:style>
+        <p:txBody>
+          <a:bodyPr wrap="square" rtlCol="0">
+            <a:spAutoFit/>
+          </a:bodyPr>
+          <a:lstStyle/>
+          <a:p>
+            <a:pPr algn="ctr"/>
+            <a:r>
+              <a:rPr lang="en-US" sz="1200" noProof="0" dirty="0" err="1">
+                <a:latin typeface="Times New Roman" panose="02020603050405020304" pitchFamily="18" charset="0"/>
+                <a:cs typeface="Times New Roman" panose="02020603050405020304" pitchFamily="18" charset="0"/>
+              </a:rPr>
+              <a:t>Religión</a:t>
+            </a:r>
+            <a:endParaRPr lang="en-US" sz="1200" noProof="0" dirty="0">
+              <a:latin typeface="Times New Roman" panose="02020603050405020304" pitchFamily="18" charset="0"/>
+              <a:cs typeface="Times New Roman" panose="02020603050405020304" pitchFamily="18" charset="0"/>
+            </a:endParaRPr>
+          </a:p>
+        </p:txBody>
+      </p:sp>
+      <p:sp>
+        <p:nvSpPr>
+          <p:cNvPr id="7" name="TextBox 6">
+            <a:extLst>
+              <a:ext uri="{FF2B5EF4-FFF2-40B4-BE49-F238E27FC236}">
+                <a16:creationId xmlns:a16="http://schemas.microsoft.com/office/drawing/2014/main" id="{126F4C88-EAF6-249D-A7D3-69AB5652E131}"/>
+              </a:ext>
+            </a:extLst>
+          </p:cNvPr>
+          <p:cNvSpPr txBox="1"/>
+          <p:nvPr/>
+        </p:nvSpPr>
+        <p:spPr>
+          <a:xfrm>
+            <a:off x="1467400" y="3813011"/>
+            <a:ext cx="1440000" cy="276999"/>
+          </a:xfrm>
+          <a:prstGeom prst="rect">
+            <a:avLst/>
+          </a:prstGeom>
+        </p:spPr>
+        <p:style>
+          <a:lnRef idx="2">
+            <a:schemeClr val="dk1"/>
+          </a:lnRef>
+          <a:fillRef idx="1">
+            <a:schemeClr val="lt1"/>
+          </a:fillRef>
+          <a:effectRef idx="0">
+            <a:schemeClr val="dk1"/>
+          </a:effectRef>
+          <a:fontRef idx="minor">
+            <a:schemeClr val="dk1"/>
+          </a:fontRef>
+        </p:style>
+        <p:txBody>
+          <a:bodyPr wrap="square" rtlCol="0">
+            <a:spAutoFit/>
+          </a:bodyPr>
+          <a:lstStyle/>
+          <a:p>
+            <a:pPr algn="ctr"/>
+            <a:r>
+              <a:rPr lang="en-US" sz="1200" dirty="0">
+                <a:latin typeface="Times New Roman" panose="02020603050405020304" pitchFamily="18" charset="0"/>
+                <a:cs typeface="Times New Roman" panose="02020603050405020304" pitchFamily="18" charset="0"/>
+              </a:rPr>
+              <a:t>Pos. Política (Cent.)</a:t>
+            </a:r>
+          </a:p>
+        </p:txBody>
+      </p:sp>
+      <p:sp>
+        <p:nvSpPr>
+          <p:cNvPr id="8" name="TextBox 7">
+            <a:extLst>
+              <a:ext uri="{FF2B5EF4-FFF2-40B4-BE49-F238E27FC236}">
+                <a16:creationId xmlns:a16="http://schemas.microsoft.com/office/drawing/2014/main" id="{173463B3-36B9-C504-A180-5CE7B50C7214}"/>
+              </a:ext>
+            </a:extLst>
+          </p:cNvPr>
+          <p:cNvSpPr txBox="1"/>
+          <p:nvPr/>
+        </p:nvSpPr>
+        <p:spPr>
+          <a:xfrm>
+            <a:off x="1467400" y="4146751"/>
+            <a:ext cx="1440000" cy="276999"/>
+          </a:xfrm>
+          <a:prstGeom prst="rect">
+            <a:avLst/>
+          </a:prstGeom>
+        </p:spPr>
+        <p:style>
+          <a:lnRef idx="2">
+            <a:schemeClr val="dk1"/>
+          </a:lnRef>
+          <a:fillRef idx="1">
+            <a:schemeClr val="lt1"/>
+          </a:fillRef>
+          <a:effectRef idx="0">
+            <a:schemeClr val="dk1"/>
+          </a:effectRef>
+          <a:fontRef idx="minor">
+            <a:schemeClr val="dk1"/>
+          </a:fontRef>
+        </p:style>
+        <p:txBody>
+          <a:bodyPr wrap="square" rtlCol="0">
+            <a:spAutoFit/>
+          </a:bodyPr>
+          <a:lstStyle/>
+          <a:p>
+            <a:pPr algn="ctr"/>
+            <a:r>
+              <a:rPr lang="en-US" sz="1200" dirty="0" err="1">
+                <a:latin typeface="Times New Roman" panose="02020603050405020304" pitchFamily="18" charset="0"/>
+                <a:cs typeface="Times New Roman" panose="02020603050405020304" pitchFamily="18" charset="0"/>
+              </a:rPr>
+              <a:t>Autotrascendencia</a:t>
+            </a:r>
+            <a:endParaRPr lang="en-US" sz="1200" noProof="0" dirty="0">
+              <a:latin typeface="Times New Roman" panose="02020603050405020304" pitchFamily="18" charset="0"/>
+              <a:cs typeface="Times New Roman" panose="02020603050405020304" pitchFamily="18" charset="0"/>
+            </a:endParaRPr>
+          </a:p>
+        </p:txBody>
+      </p:sp>
+      <p:cxnSp>
+        <p:nvCxnSpPr>
+          <p:cNvPr id="12" name="Straight Arrow Connector 11">
+            <a:extLst>
+              <a:ext uri="{FF2B5EF4-FFF2-40B4-BE49-F238E27FC236}">
+                <a16:creationId xmlns:a16="http://schemas.microsoft.com/office/drawing/2014/main" id="{CF4781CA-D271-9194-AA2F-20D8B9B9C302}"/>
+              </a:ext>
+            </a:extLst>
+          </p:cNvPr>
+          <p:cNvCxnSpPr>
+            <a:stCxn id="2" idx="3"/>
+            <a:endCxn id="9" idx="1"/>
+          </p:cNvCxnSpPr>
+          <p:nvPr/>
+        </p:nvCxnSpPr>
+        <p:spPr>
+          <a:xfrm>
+            <a:off x="2907400" y="2862593"/>
+            <a:ext cx="3207429" cy="624299"/>
+          </a:xfrm>
+          <a:prstGeom prst="straightConnector1">
+            <a:avLst/>
+          </a:prstGeom>
+          <a:ln w="19050" cap="flat" cmpd="sng" algn="ctr">
+            <a:solidFill>
+              <a:schemeClr val="dk1"/>
+            </a:solidFill>
+            <a:prstDash val="solid"/>
+            <a:round/>
+            <a:headEnd type="none" w="med" len="med"/>
+            <a:tailEnd type="arrow" w="med" len="med"/>
+          </a:ln>
+        </p:spPr>
+        <p:style>
+          <a:lnRef idx="0">
+            <a:scrgbClr r="0" g="0" b="0"/>
+          </a:lnRef>
+          <a:fillRef idx="0">
+            <a:scrgbClr r="0" g="0" b="0"/>
+          </a:fillRef>
+          <a:effectRef idx="0">
+            <a:scrgbClr r="0" g="0" b="0"/>
+          </a:effectRef>
+          <a:fontRef idx="minor">
+            <a:schemeClr val="tx1"/>
+          </a:fontRef>
+        </p:style>
+      </p:cxnSp>
+      <p:cxnSp>
+        <p:nvCxnSpPr>
+          <p:cNvPr id="13" name="Straight Arrow Connector 12">
+            <a:extLst>
+              <a:ext uri="{FF2B5EF4-FFF2-40B4-BE49-F238E27FC236}">
+                <a16:creationId xmlns:a16="http://schemas.microsoft.com/office/drawing/2014/main" id="{19E1DBB0-6ADA-36D7-28C9-67E5B1EE61B1}"/>
+              </a:ext>
+            </a:extLst>
+          </p:cNvPr>
+          <p:cNvCxnSpPr>
+            <a:cxnSpLocks/>
+            <a:stCxn id="5" idx="3"/>
+            <a:endCxn id="9" idx="1"/>
+          </p:cNvCxnSpPr>
+          <p:nvPr/>
+        </p:nvCxnSpPr>
+        <p:spPr>
+          <a:xfrm>
+            <a:off x="2907400" y="3288653"/>
+            <a:ext cx="3207429" cy="198239"/>
+          </a:xfrm>
+          <a:prstGeom prst="straightConnector1">
+            <a:avLst/>
+          </a:prstGeom>
+          <a:ln w="19050" cap="flat" cmpd="sng" algn="ctr">
+            <a:solidFill>
+              <a:schemeClr val="dk1"/>
+            </a:solidFill>
+            <a:prstDash val="solid"/>
+            <a:round/>
+            <a:headEnd type="none" w="med" len="med"/>
+            <a:tailEnd type="arrow" w="med" len="med"/>
+          </a:ln>
+        </p:spPr>
+        <p:style>
+          <a:lnRef idx="0">
+            <a:scrgbClr r="0" g="0" b="0"/>
+          </a:lnRef>
+          <a:fillRef idx="0">
+            <a:scrgbClr r="0" g="0" b="0"/>
+          </a:fillRef>
+          <a:effectRef idx="0">
+            <a:scrgbClr r="0" g="0" b="0"/>
+          </a:effectRef>
+          <a:fontRef idx="minor">
+            <a:schemeClr val="tx1"/>
+          </a:fontRef>
+        </p:style>
+      </p:cxnSp>
+      <p:cxnSp>
+        <p:nvCxnSpPr>
+          <p:cNvPr id="16" name="Straight Arrow Connector 15">
+            <a:extLst>
+              <a:ext uri="{FF2B5EF4-FFF2-40B4-BE49-F238E27FC236}">
+                <a16:creationId xmlns:a16="http://schemas.microsoft.com/office/drawing/2014/main" id="{7CF5ED64-D329-D50B-F66C-6B14A9B4E91D}"/>
+              </a:ext>
+            </a:extLst>
+          </p:cNvPr>
+          <p:cNvCxnSpPr>
+            <a:cxnSpLocks/>
+            <a:stCxn id="6" idx="3"/>
+            <a:endCxn id="9" idx="1"/>
+          </p:cNvCxnSpPr>
+          <p:nvPr/>
+        </p:nvCxnSpPr>
+        <p:spPr>
+          <a:xfrm flipV="1">
+            <a:off x="2907400" y="3486892"/>
+            <a:ext cx="3207429" cy="138500"/>
+          </a:xfrm>
+          <a:prstGeom prst="straightConnector1">
+            <a:avLst/>
+          </a:prstGeom>
+          <a:ln w="19050" cap="flat" cmpd="sng" algn="ctr">
+            <a:solidFill>
+              <a:schemeClr val="dk1"/>
+            </a:solidFill>
+            <a:prstDash val="solid"/>
+            <a:round/>
+            <a:headEnd type="none" w="med" len="med"/>
+            <a:tailEnd type="arrow" w="med" len="med"/>
+          </a:ln>
+        </p:spPr>
+        <p:style>
+          <a:lnRef idx="0">
+            <a:scrgbClr r="0" g="0" b="0"/>
+          </a:lnRef>
+          <a:fillRef idx="0">
+            <a:scrgbClr r="0" g="0" b="0"/>
+          </a:fillRef>
+          <a:effectRef idx="0">
+            <a:scrgbClr r="0" g="0" b="0"/>
+          </a:effectRef>
+          <a:fontRef idx="minor">
+            <a:schemeClr val="tx1"/>
+          </a:fontRef>
+        </p:style>
+      </p:cxnSp>
+      <p:cxnSp>
+        <p:nvCxnSpPr>
+          <p:cNvPr id="19" name="Straight Arrow Connector 18">
+            <a:extLst>
+              <a:ext uri="{FF2B5EF4-FFF2-40B4-BE49-F238E27FC236}">
+                <a16:creationId xmlns:a16="http://schemas.microsoft.com/office/drawing/2014/main" id="{C03C3A79-C5F6-7713-E62E-165CEB8940D6}"/>
+              </a:ext>
+            </a:extLst>
+          </p:cNvPr>
+          <p:cNvCxnSpPr>
+            <a:cxnSpLocks/>
+            <a:stCxn id="7" idx="3"/>
+            <a:endCxn id="9" idx="1"/>
+          </p:cNvCxnSpPr>
+          <p:nvPr/>
+        </p:nvCxnSpPr>
+        <p:spPr>
+          <a:xfrm flipV="1">
+            <a:off x="2907400" y="3486892"/>
+            <a:ext cx="3207429" cy="464619"/>
+          </a:xfrm>
+          <a:prstGeom prst="straightConnector1">
+            <a:avLst/>
+          </a:prstGeom>
+          <a:ln w="19050" cap="flat" cmpd="sng" algn="ctr">
+            <a:solidFill>
+              <a:schemeClr val="dk1"/>
+            </a:solidFill>
+            <a:prstDash val="solid"/>
+            <a:round/>
+            <a:headEnd type="none" w="med" len="med"/>
+            <a:tailEnd type="arrow" w="med" len="med"/>
+          </a:ln>
+        </p:spPr>
+        <p:style>
+          <a:lnRef idx="0">
+            <a:scrgbClr r="0" g="0" b="0"/>
+          </a:lnRef>
+          <a:fillRef idx="0">
+            <a:scrgbClr r="0" g="0" b="0"/>
+          </a:fillRef>
+          <a:effectRef idx="0">
+            <a:scrgbClr r="0" g="0" b="0"/>
+          </a:effectRef>
+          <a:fontRef idx="minor">
+            <a:schemeClr val="tx1"/>
+          </a:fontRef>
+        </p:style>
+      </p:cxnSp>
+      <p:cxnSp>
+        <p:nvCxnSpPr>
+          <p:cNvPr id="22" name="Straight Arrow Connector 21">
+            <a:extLst>
+              <a:ext uri="{FF2B5EF4-FFF2-40B4-BE49-F238E27FC236}">
+                <a16:creationId xmlns:a16="http://schemas.microsoft.com/office/drawing/2014/main" id="{A818A324-CE3B-2241-9D06-B35ADE07FD43}"/>
+              </a:ext>
+            </a:extLst>
+          </p:cNvPr>
+          <p:cNvCxnSpPr>
+            <a:cxnSpLocks/>
+            <a:stCxn id="8" idx="3"/>
+            <a:endCxn id="9" idx="1"/>
+          </p:cNvCxnSpPr>
+          <p:nvPr/>
+        </p:nvCxnSpPr>
+        <p:spPr>
+          <a:xfrm flipV="1">
+            <a:off x="2907400" y="3486892"/>
+            <a:ext cx="3207429" cy="798359"/>
+          </a:xfrm>
+          <a:prstGeom prst="straightConnector1">
+            <a:avLst/>
+          </a:prstGeom>
+          <a:ln w="19050" cap="flat" cmpd="sng" algn="ctr">
+            <a:solidFill>
+              <a:schemeClr val="dk1"/>
+            </a:solidFill>
+            <a:prstDash val="solid"/>
+            <a:round/>
+            <a:headEnd type="none" w="med" len="med"/>
+            <a:tailEnd type="arrow" w="med" len="med"/>
+          </a:ln>
+        </p:spPr>
+        <p:style>
+          <a:lnRef idx="0">
+            <a:scrgbClr r="0" g="0" b="0"/>
+          </a:lnRef>
+          <a:fillRef idx="0">
+            <a:scrgbClr r="0" g="0" b="0"/>
+          </a:fillRef>
+          <a:effectRef idx="0">
+            <a:scrgbClr r="0" g="0" b="0"/>
+          </a:effectRef>
+          <a:fontRef idx="minor">
+            <a:schemeClr val="tx1"/>
+          </a:fontRef>
+        </p:style>
+      </p:cxnSp>
+      <p:cxnSp>
+        <p:nvCxnSpPr>
+          <p:cNvPr id="37" name="Straight Connector 36">
+            <a:extLst>
+              <a:ext uri="{FF2B5EF4-FFF2-40B4-BE49-F238E27FC236}">
+                <a16:creationId xmlns:a16="http://schemas.microsoft.com/office/drawing/2014/main" id="{19B8526C-1DC5-B222-FD1D-5B6AD4511F3A}"/>
+              </a:ext>
+            </a:extLst>
+          </p:cNvPr>
+          <p:cNvCxnSpPr>
+            <a:cxnSpLocks/>
+            <a:stCxn id="25" idx="1"/>
+            <a:endCxn id="25" idx="3"/>
+          </p:cNvCxnSpPr>
+          <p:nvPr/>
+        </p:nvCxnSpPr>
+        <p:spPr>
+          <a:xfrm>
+            <a:off x="1196074" y="2562618"/>
+            <a:ext cx="6978108" cy="0"/>
+          </a:xfrm>
+          <a:prstGeom prst="line">
+            <a:avLst/>
+          </a:prstGeom>
+          <a:ln w="19050" cap="flat" cmpd="sng" algn="ctr">
+            <a:solidFill>
+              <a:schemeClr val="dk1"/>
+            </a:solidFill>
+            <a:prstDash val="dash"/>
+            <a:round/>
+            <a:headEnd type="none" w="med" len="med"/>
+            <a:tailEnd type="none" w="med" len="med"/>
+          </a:ln>
+        </p:spPr>
+        <p:style>
+          <a:lnRef idx="0">
+            <a:scrgbClr r="0" g="0" b="0"/>
+          </a:lnRef>
+          <a:fillRef idx="0">
+            <a:scrgbClr r="0" g="0" b="0"/>
+          </a:fillRef>
+          <a:effectRef idx="0">
+            <a:scrgbClr r="0" g="0" b="0"/>
+          </a:effectRef>
+          <a:fontRef idx="minor">
+            <a:schemeClr val="tx1"/>
+          </a:fontRef>
+        </p:style>
+      </p:cxnSp>
+      <p:sp>
+        <p:nvSpPr>
+          <p:cNvPr id="38" name="TextBox 37">
+            <a:extLst>
+              <a:ext uri="{FF2B5EF4-FFF2-40B4-BE49-F238E27FC236}">
+                <a16:creationId xmlns:a16="http://schemas.microsoft.com/office/drawing/2014/main" id="{3A6D2107-2D9B-1CD2-D2C6-D66EFAF50DF9}"/>
+              </a:ext>
+            </a:extLst>
+          </p:cNvPr>
+          <p:cNvSpPr txBox="1"/>
+          <p:nvPr/>
+        </p:nvSpPr>
+        <p:spPr>
+          <a:xfrm>
+            <a:off x="1467400" y="698867"/>
+            <a:ext cx="1440000" cy="276999"/>
+          </a:xfrm>
+          <a:prstGeom prst="rect">
+            <a:avLst/>
+          </a:prstGeom>
+        </p:spPr>
+        <p:style>
+          <a:lnRef idx="2">
+            <a:schemeClr val="dk1"/>
+          </a:lnRef>
+          <a:fillRef idx="1">
+            <a:schemeClr val="lt1"/>
+          </a:fillRef>
+          <a:effectRef idx="0">
+            <a:schemeClr val="dk1"/>
+          </a:effectRef>
+          <a:fontRef idx="minor">
+            <a:schemeClr val="dk1"/>
+          </a:fontRef>
+        </p:style>
+        <p:txBody>
+          <a:bodyPr wrap="square" rtlCol="0">
+            <a:spAutoFit/>
+          </a:bodyPr>
+          <a:lstStyle/>
+          <a:p>
+            <a:pPr algn="ctr"/>
+            <a:r>
+              <a:rPr lang="en-US" sz="1200" noProof="0" dirty="0">
+                <a:solidFill>
+                  <a:schemeClr val="tx1"/>
+                </a:solidFill>
+                <a:latin typeface="Times New Roman" panose="02020603050405020304" pitchFamily="18" charset="0"/>
+                <a:cs typeface="Times New Roman" panose="02020603050405020304" pitchFamily="18" charset="0"/>
+              </a:rPr>
+              <a:t>NSE</a:t>
+            </a:r>
+          </a:p>
+        </p:txBody>
+      </p:sp>
+      <p:sp>
+        <p:nvSpPr>
+          <p:cNvPr id="39" name="TextBox 38">
+            <a:extLst>
+              <a:ext uri="{FF2B5EF4-FFF2-40B4-BE49-F238E27FC236}">
+                <a16:creationId xmlns:a16="http://schemas.microsoft.com/office/drawing/2014/main" id="{0BFF1ECA-B117-FB0F-97ED-B683EFBF006F}"/>
+              </a:ext>
+            </a:extLst>
+          </p:cNvPr>
+          <p:cNvSpPr txBox="1"/>
+          <p:nvPr/>
+        </p:nvSpPr>
+        <p:spPr>
+          <a:xfrm>
+            <a:off x="1467400" y="1124927"/>
+            <a:ext cx="1440000" cy="276999"/>
+          </a:xfrm>
+          <a:prstGeom prst="rect">
+            <a:avLst/>
+          </a:prstGeom>
+        </p:spPr>
+        <p:style>
+          <a:lnRef idx="2">
+            <a:schemeClr val="dk1"/>
+          </a:lnRef>
+          <a:fillRef idx="1">
+            <a:schemeClr val="lt1"/>
+          </a:fillRef>
+          <a:effectRef idx="0">
+            <a:schemeClr val="dk1"/>
+          </a:effectRef>
+          <a:fontRef idx="minor">
+            <a:schemeClr val="dk1"/>
+          </a:fontRef>
+        </p:style>
+        <p:txBody>
+          <a:bodyPr wrap="square" rtlCol="0">
+            <a:spAutoFit/>
+          </a:bodyPr>
+          <a:lstStyle/>
+          <a:p>
+            <a:pPr algn="ctr"/>
+            <a:r>
+              <a:rPr lang="en-US" sz="1200" noProof="0" dirty="0" err="1">
+                <a:solidFill>
+                  <a:schemeClr val="tx1"/>
+                </a:solidFill>
+                <a:latin typeface="Times New Roman" panose="02020603050405020304" pitchFamily="18" charset="0"/>
+                <a:cs typeface="Times New Roman" panose="02020603050405020304" pitchFamily="18" charset="0"/>
+              </a:rPr>
+              <a:t>Migración</a:t>
+            </a:r>
+            <a:endParaRPr lang="en-US" sz="1200" noProof="0" dirty="0">
+              <a:solidFill>
+                <a:schemeClr val="tx1"/>
+              </a:solidFill>
+              <a:latin typeface="Times New Roman" panose="02020603050405020304" pitchFamily="18" charset="0"/>
+              <a:cs typeface="Times New Roman" panose="02020603050405020304" pitchFamily="18" charset="0"/>
+            </a:endParaRPr>
+          </a:p>
+        </p:txBody>
+      </p:sp>
+      <p:sp>
+        <p:nvSpPr>
+          <p:cNvPr id="40" name="TextBox 39">
+            <a:extLst>
+              <a:ext uri="{FF2B5EF4-FFF2-40B4-BE49-F238E27FC236}">
+                <a16:creationId xmlns:a16="http://schemas.microsoft.com/office/drawing/2014/main" id="{86C43681-7F62-F231-C523-4750DA42B8FD}"/>
+              </a:ext>
+            </a:extLst>
+          </p:cNvPr>
+          <p:cNvSpPr txBox="1"/>
+          <p:nvPr/>
+        </p:nvSpPr>
+        <p:spPr>
+          <a:xfrm>
+            <a:off x="1467400" y="1461666"/>
+            <a:ext cx="1440000" cy="276999"/>
+          </a:xfrm>
+          <a:prstGeom prst="rect">
+            <a:avLst/>
+          </a:prstGeom>
+        </p:spPr>
+        <p:style>
+          <a:lnRef idx="2">
+            <a:schemeClr val="dk1"/>
+          </a:lnRef>
+          <a:fillRef idx="1">
+            <a:schemeClr val="lt1"/>
+          </a:fillRef>
+          <a:effectRef idx="0">
+            <a:schemeClr val="dk1"/>
+          </a:effectRef>
+          <a:fontRef idx="minor">
+            <a:schemeClr val="dk1"/>
+          </a:fontRef>
+        </p:style>
+        <p:txBody>
+          <a:bodyPr wrap="square" rtlCol="0">
+            <a:spAutoFit/>
+          </a:bodyPr>
+          <a:lstStyle/>
+          <a:p>
+            <a:pPr algn="ctr"/>
+            <a:r>
+              <a:rPr lang="en-US" sz="1200" noProof="0" dirty="0" err="1">
+                <a:solidFill>
+                  <a:schemeClr val="tx1"/>
+                </a:solidFill>
+                <a:latin typeface="Times New Roman" panose="02020603050405020304" pitchFamily="18" charset="0"/>
+                <a:cs typeface="Times New Roman" panose="02020603050405020304" pitchFamily="18" charset="0"/>
+              </a:rPr>
+              <a:t>Religión</a:t>
+            </a:r>
+            <a:endParaRPr lang="en-US" sz="1200" noProof="0" dirty="0">
+              <a:solidFill>
+                <a:schemeClr val="tx1"/>
+              </a:solidFill>
+              <a:latin typeface="Times New Roman" panose="02020603050405020304" pitchFamily="18" charset="0"/>
+              <a:cs typeface="Times New Roman" panose="02020603050405020304" pitchFamily="18" charset="0"/>
+            </a:endParaRPr>
+          </a:p>
+        </p:txBody>
+      </p:sp>
+      <p:sp>
+        <p:nvSpPr>
+          <p:cNvPr id="41" name="TextBox 40">
+            <a:extLst>
+              <a:ext uri="{FF2B5EF4-FFF2-40B4-BE49-F238E27FC236}">
+                <a16:creationId xmlns:a16="http://schemas.microsoft.com/office/drawing/2014/main" id="{6F87D2B3-C8E1-09B5-46A5-D8EA11BE95E8}"/>
+              </a:ext>
+            </a:extLst>
+          </p:cNvPr>
+          <p:cNvSpPr txBox="1"/>
+          <p:nvPr/>
+        </p:nvSpPr>
+        <p:spPr>
+          <a:xfrm>
+            <a:off x="1467400" y="1787785"/>
+            <a:ext cx="1440000" cy="276999"/>
+          </a:xfrm>
+          <a:prstGeom prst="rect">
+            <a:avLst/>
+          </a:prstGeom>
+        </p:spPr>
+        <p:style>
+          <a:lnRef idx="2">
+            <a:schemeClr val="dk1"/>
+          </a:lnRef>
+          <a:fillRef idx="1">
+            <a:schemeClr val="lt1"/>
+          </a:fillRef>
+          <a:effectRef idx="0">
+            <a:schemeClr val="dk1"/>
+          </a:effectRef>
+          <a:fontRef idx="minor">
+            <a:schemeClr val="dk1"/>
+          </a:fontRef>
+        </p:style>
+        <p:txBody>
+          <a:bodyPr wrap="square" rtlCol="0">
+            <a:spAutoFit/>
+          </a:bodyPr>
+          <a:lstStyle/>
+          <a:p>
+            <a:pPr algn="ctr"/>
+            <a:r>
+              <a:rPr lang="en-US" sz="1200" noProof="0" dirty="0" err="1">
+                <a:solidFill>
+                  <a:schemeClr val="tx1"/>
+                </a:solidFill>
+                <a:latin typeface="Times New Roman" panose="02020603050405020304" pitchFamily="18" charset="0"/>
+                <a:cs typeface="Times New Roman" panose="02020603050405020304" pitchFamily="18" charset="0"/>
+              </a:rPr>
+              <a:t>Ideología</a:t>
+            </a:r>
+            <a:r>
+              <a:rPr lang="en-US" sz="1200" noProof="0" dirty="0">
+                <a:solidFill>
+                  <a:schemeClr val="tx1"/>
+                </a:solidFill>
+                <a:latin typeface="Times New Roman" panose="02020603050405020304" pitchFamily="18" charset="0"/>
+                <a:cs typeface="Times New Roman" panose="02020603050405020304" pitchFamily="18" charset="0"/>
+              </a:rPr>
+              <a:t> Política</a:t>
+            </a:r>
+          </a:p>
+        </p:txBody>
+      </p:sp>
+      <p:sp>
+        <p:nvSpPr>
+          <p:cNvPr id="42" name="TextBox 41">
+            <a:extLst>
+              <a:ext uri="{FF2B5EF4-FFF2-40B4-BE49-F238E27FC236}">
+                <a16:creationId xmlns:a16="http://schemas.microsoft.com/office/drawing/2014/main" id="{BFDAC25A-E6B7-5C85-389D-CB9B3A04C66B}"/>
+              </a:ext>
+            </a:extLst>
+          </p:cNvPr>
+          <p:cNvSpPr txBox="1"/>
+          <p:nvPr/>
+        </p:nvSpPr>
+        <p:spPr>
+          <a:xfrm>
+            <a:off x="1467400" y="2121525"/>
+            <a:ext cx="1440000" cy="276999"/>
+          </a:xfrm>
+          <a:prstGeom prst="rect">
+            <a:avLst/>
+          </a:prstGeom>
+        </p:spPr>
+        <p:style>
+          <a:lnRef idx="2">
+            <a:schemeClr val="dk1"/>
+          </a:lnRef>
+          <a:fillRef idx="1">
+            <a:schemeClr val="lt1"/>
+          </a:fillRef>
+          <a:effectRef idx="0">
+            <a:schemeClr val="dk1"/>
+          </a:effectRef>
+          <a:fontRef idx="minor">
+            <a:schemeClr val="dk1"/>
+          </a:fontRef>
+        </p:style>
+        <p:txBody>
+          <a:bodyPr wrap="square" rtlCol="0">
+            <a:spAutoFit/>
+          </a:bodyPr>
+          <a:lstStyle/>
+          <a:p>
+            <a:pPr algn="ctr"/>
+            <a:r>
+              <a:rPr lang="en-US" sz="1200" dirty="0">
+                <a:latin typeface="Times New Roman" panose="02020603050405020304" pitchFamily="18" charset="0"/>
+                <a:cs typeface="Times New Roman" panose="02020603050405020304" pitchFamily="18" charset="0"/>
+              </a:rPr>
+              <a:t>Valores</a:t>
+            </a:r>
+            <a:endParaRPr lang="en-US" sz="1200" noProof="0" dirty="0">
+              <a:latin typeface="Times New Roman" panose="02020603050405020304" pitchFamily="18" charset="0"/>
+              <a:cs typeface="Times New Roman" panose="02020603050405020304" pitchFamily="18" charset="0"/>
+            </a:endParaRPr>
+          </a:p>
+        </p:txBody>
+      </p:sp>
+      <p:cxnSp>
+        <p:nvCxnSpPr>
+          <p:cNvPr id="33" name="Straight Arrow Connector 32">
+            <a:extLst>
+              <a:ext uri="{FF2B5EF4-FFF2-40B4-BE49-F238E27FC236}">
+                <a16:creationId xmlns:a16="http://schemas.microsoft.com/office/drawing/2014/main" id="{E4E0489B-51C2-1D82-94A7-0C1E7FC77AAC}"/>
+              </a:ext>
+            </a:extLst>
+          </p:cNvPr>
+          <p:cNvCxnSpPr>
+            <a:cxnSpLocks/>
+            <a:stCxn id="28" idx="3"/>
+          </p:cNvCxnSpPr>
+          <p:nvPr/>
+        </p:nvCxnSpPr>
+        <p:spPr>
+          <a:xfrm>
+            <a:off x="2999509" y="1566967"/>
+            <a:ext cx="762000" cy="1157126"/>
+          </a:xfrm>
+          <a:prstGeom prst="straightConnector1">
+            <a:avLst/>
+          </a:prstGeom>
+          <a:ln w="19050" cap="flat" cmpd="sng" algn="ctr">
+            <a:solidFill>
+              <a:schemeClr val="dk1"/>
+            </a:solidFill>
+            <a:prstDash val="solid"/>
+            <a:round/>
+            <a:headEnd type="none" w="med" len="med"/>
+            <a:tailEnd type="arrow" w="med" len="med"/>
+          </a:ln>
+        </p:spPr>
+        <p:style>
+          <a:lnRef idx="0">
+            <a:scrgbClr r="0" g="0" b="0"/>
+          </a:lnRef>
+          <a:fillRef idx="0">
+            <a:scrgbClr r="0" g="0" b="0"/>
+          </a:fillRef>
+          <a:effectRef idx="0">
+            <a:scrgbClr r="0" g="0" b="0"/>
+          </a:effectRef>
+          <a:fontRef idx="minor">
+            <a:schemeClr val="tx1"/>
+          </a:fontRef>
+        </p:style>
+      </p:cxnSp>
+      <p:sp>
+        <p:nvSpPr>
+          <p:cNvPr id="49" name="TextBox 48">
+            <a:extLst>
+              <a:ext uri="{FF2B5EF4-FFF2-40B4-BE49-F238E27FC236}">
+                <a16:creationId xmlns:a16="http://schemas.microsoft.com/office/drawing/2014/main" id="{B25788F1-4ADF-0E03-8622-BAA9F3724536}"/>
+              </a:ext>
+            </a:extLst>
+          </p:cNvPr>
+          <p:cNvSpPr txBox="1"/>
+          <p:nvPr/>
+        </p:nvSpPr>
+        <p:spPr>
+          <a:xfrm>
+            <a:off x="3677025" y="2781306"/>
+            <a:ext cx="443346" cy="307777"/>
+          </a:xfrm>
+          <a:prstGeom prst="rect">
+            <a:avLst/>
+          </a:prstGeom>
+          <a:noFill/>
+        </p:spPr>
+        <p:txBody>
+          <a:bodyPr wrap="square" rtlCol="0">
+            <a:spAutoFit/>
+          </a:bodyPr>
+          <a:lstStyle/>
+          <a:p>
+            <a:r>
+              <a:rPr lang="en-US" noProof="0" dirty="0"/>
+              <a:t>+</a:t>
+            </a:r>
+          </a:p>
+        </p:txBody>
+      </p:sp>
+      <p:sp>
+        <p:nvSpPr>
+          <p:cNvPr id="50" name="TextBox 49">
+            <a:extLst>
+              <a:ext uri="{FF2B5EF4-FFF2-40B4-BE49-F238E27FC236}">
+                <a16:creationId xmlns:a16="http://schemas.microsoft.com/office/drawing/2014/main" id="{89C726C7-92C4-EADC-B68F-76429A6D1132}"/>
+              </a:ext>
+            </a:extLst>
+          </p:cNvPr>
+          <p:cNvSpPr txBox="1"/>
+          <p:nvPr/>
+        </p:nvSpPr>
+        <p:spPr>
+          <a:xfrm>
+            <a:off x="3659987" y="3866872"/>
+            <a:ext cx="443346" cy="307777"/>
+          </a:xfrm>
+          <a:prstGeom prst="rect">
+            <a:avLst/>
+          </a:prstGeom>
+          <a:noFill/>
+        </p:spPr>
+        <p:txBody>
+          <a:bodyPr wrap="square" rtlCol="0">
+            <a:spAutoFit/>
+          </a:bodyPr>
+          <a:lstStyle/>
+          <a:p>
+            <a:r>
+              <a:rPr lang="en-US" noProof="0" dirty="0"/>
+              <a:t>+</a:t>
+            </a:r>
+          </a:p>
+        </p:txBody>
+      </p:sp>
+      <p:sp>
+        <p:nvSpPr>
+          <p:cNvPr id="51" name="TextBox 50">
+            <a:extLst>
+              <a:ext uri="{FF2B5EF4-FFF2-40B4-BE49-F238E27FC236}">
+                <a16:creationId xmlns:a16="http://schemas.microsoft.com/office/drawing/2014/main" id="{172A4FA1-052F-BF6A-9654-B4F821F524A9}"/>
+              </a:ext>
+            </a:extLst>
+          </p:cNvPr>
+          <p:cNvSpPr txBox="1"/>
+          <p:nvPr/>
+        </p:nvSpPr>
+        <p:spPr>
+          <a:xfrm>
+            <a:off x="3547960" y="3032122"/>
+            <a:ext cx="443346" cy="307777"/>
+          </a:xfrm>
+          <a:prstGeom prst="rect">
+            <a:avLst/>
+          </a:prstGeom>
+          <a:noFill/>
+        </p:spPr>
+        <p:txBody>
+          <a:bodyPr wrap="square" rtlCol="0">
+            <a:spAutoFit/>
+          </a:bodyPr>
+          <a:lstStyle/>
+          <a:p>
+            <a:r>
+              <a:rPr lang="en-US" noProof="0" dirty="0"/>
+              <a:t>-</a:t>
+            </a:r>
+          </a:p>
+        </p:txBody>
+      </p:sp>
+      <p:sp>
+        <p:nvSpPr>
+          <p:cNvPr id="52" name="TextBox 51">
+            <a:extLst>
+              <a:ext uri="{FF2B5EF4-FFF2-40B4-BE49-F238E27FC236}">
+                <a16:creationId xmlns:a16="http://schemas.microsoft.com/office/drawing/2014/main" id="{D150AD05-DC1C-AA4A-1953-28F96426A461}"/>
+              </a:ext>
+            </a:extLst>
+          </p:cNvPr>
+          <p:cNvSpPr txBox="1"/>
+          <p:nvPr/>
+        </p:nvSpPr>
+        <p:spPr>
+          <a:xfrm>
+            <a:off x="3478660" y="3341604"/>
+            <a:ext cx="443346" cy="307777"/>
+          </a:xfrm>
+          <a:prstGeom prst="rect">
+            <a:avLst/>
+          </a:prstGeom>
+          <a:noFill/>
+        </p:spPr>
+        <p:txBody>
+          <a:bodyPr wrap="square" rtlCol="0">
+            <a:spAutoFit/>
+          </a:bodyPr>
+          <a:lstStyle/>
+          <a:p>
+            <a:r>
+              <a:rPr lang="en-US" noProof="0" dirty="0"/>
+              <a:t>+</a:t>
+            </a:r>
+          </a:p>
+        </p:txBody>
+      </p:sp>
+      <p:sp>
+        <p:nvSpPr>
+          <p:cNvPr id="53" name="TextBox 52">
+            <a:extLst>
+              <a:ext uri="{FF2B5EF4-FFF2-40B4-BE49-F238E27FC236}">
+                <a16:creationId xmlns:a16="http://schemas.microsoft.com/office/drawing/2014/main" id="{3C4433CC-3D92-34A0-DDFC-8580A9F6275D}"/>
+              </a:ext>
+            </a:extLst>
+          </p:cNvPr>
+          <p:cNvSpPr txBox="1"/>
+          <p:nvPr/>
+        </p:nvSpPr>
+        <p:spPr>
+          <a:xfrm>
+            <a:off x="3514685" y="3609431"/>
+            <a:ext cx="443346" cy="307777"/>
+          </a:xfrm>
+          <a:prstGeom prst="rect">
+            <a:avLst/>
+          </a:prstGeom>
+          <a:noFill/>
+        </p:spPr>
+        <p:txBody>
+          <a:bodyPr wrap="square" rtlCol="0">
+            <a:spAutoFit/>
+          </a:bodyPr>
+          <a:lstStyle/>
+          <a:p>
+            <a:r>
+              <a:rPr lang="en-US" noProof="0" dirty="0"/>
+              <a:t>+</a:t>
+            </a:r>
+          </a:p>
+        </p:txBody>
+      </p:sp>
+      <p:sp>
+        <p:nvSpPr>
+          <p:cNvPr id="60" name="TextBox 59">
+            <a:extLst>
+              <a:ext uri="{FF2B5EF4-FFF2-40B4-BE49-F238E27FC236}">
+                <a16:creationId xmlns:a16="http://schemas.microsoft.com/office/drawing/2014/main" id="{E63C430F-6F1F-43BC-65AC-EAB6F11353CB}"/>
+              </a:ext>
+            </a:extLst>
+          </p:cNvPr>
+          <p:cNvSpPr txBox="1"/>
+          <p:nvPr/>
+        </p:nvSpPr>
+        <p:spPr>
+          <a:xfrm>
+            <a:off x="3446901" y="1805535"/>
+            <a:ext cx="2319467" cy="523220"/>
+          </a:xfrm>
+          <a:prstGeom prst="rect">
+            <a:avLst/>
+          </a:prstGeom>
+          <a:noFill/>
+        </p:spPr>
+        <p:txBody>
+          <a:bodyPr wrap="square" rtlCol="0">
+            <a:spAutoFit/>
+          </a:bodyPr>
+          <a:lstStyle/>
+          <a:p>
+            <a:r>
+              <a:rPr lang="en-US" noProof="0" dirty="0">
+                <a:latin typeface="Times New Roman" panose="02020603050405020304" pitchFamily="18" charset="0"/>
+                <a:cs typeface="Times New Roman" panose="02020603050405020304" pitchFamily="18" charset="0"/>
+              </a:rPr>
+              <a:t>H6</a:t>
+            </a:r>
+          </a:p>
+          <a:p>
+            <a:r>
+              <a:rPr lang="en-US" i="1" noProof="0" dirty="0">
+                <a:latin typeface="Times New Roman" panose="02020603050405020304" pitchFamily="18" charset="0"/>
+                <a:cs typeface="Times New Roman" panose="02020603050405020304" pitchFamily="18" charset="0"/>
+              </a:rPr>
+              <a:t>(H</a:t>
+            </a:r>
+            <a:r>
+              <a:rPr lang="en-US" i="1" dirty="0" err="1">
+                <a:latin typeface="Times New Roman" panose="02020603050405020304" pitchFamily="18" charset="0"/>
+                <a:cs typeface="Times New Roman" panose="02020603050405020304" pitchFamily="18" charset="0"/>
+              </a:rPr>
+              <a:t>ipótesis</a:t>
+            </a:r>
+            <a:r>
+              <a:rPr lang="en-US" i="1" dirty="0">
+                <a:latin typeface="Times New Roman" panose="02020603050405020304" pitchFamily="18" charset="0"/>
+                <a:cs typeface="Times New Roman" panose="02020603050405020304" pitchFamily="18" charset="0"/>
+              </a:rPr>
+              <a:t> de </a:t>
+            </a:r>
+            <a:r>
+              <a:rPr lang="en-US" i="1" dirty="0" err="1">
+                <a:latin typeface="Times New Roman" panose="02020603050405020304" pitchFamily="18" charset="0"/>
+                <a:cs typeface="Times New Roman" panose="02020603050405020304" pitchFamily="18" charset="0"/>
+              </a:rPr>
+              <a:t>homofilia</a:t>
+            </a:r>
+            <a:r>
+              <a:rPr lang="en-US" i="1" noProof="0" dirty="0">
+                <a:latin typeface="Times New Roman" panose="02020603050405020304" pitchFamily="18" charset="0"/>
+                <a:cs typeface="Times New Roman" panose="02020603050405020304" pitchFamily="18" charset="0"/>
+              </a:rPr>
+              <a:t>)</a:t>
+            </a:r>
+            <a:endParaRPr lang="en-US" noProof="0" dirty="0">
+              <a:latin typeface="Times New Roman" panose="02020603050405020304" pitchFamily="18" charset="0"/>
+              <a:cs typeface="Times New Roman" panose="02020603050405020304" pitchFamily="18" charset="0"/>
+            </a:endParaRPr>
+          </a:p>
+        </p:txBody>
+      </p:sp>
+      <p:sp>
+        <p:nvSpPr>
+          <p:cNvPr id="62" name="TextBox 61">
+            <a:extLst>
+              <a:ext uri="{FF2B5EF4-FFF2-40B4-BE49-F238E27FC236}">
+                <a16:creationId xmlns:a16="http://schemas.microsoft.com/office/drawing/2014/main" id="{DA6C7CAD-0729-7461-554F-E2E2F5BB6EC2}"/>
+              </a:ext>
+            </a:extLst>
+          </p:cNvPr>
+          <p:cNvSpPr txBox="1"/>
+          <p:nvPr/>
+        </p:nvSpPr>
+        <p:spPr>
+          <a:xfrm>
+            <a:off x="3547960" y="2809604"/>
+            <a:ext cx="579040" cy="1476895"/>
+          </a:xfrm>
+          <a:prstGeom prst="rect">
+            <a:avLst/>
+          </a:prstGeom>
+          <a:noFill/>
+          <a:ln w="9525" cap="flat" cmpd="sng" algn="ctr">
+            <a:solidFill>
+              <a:schemeClr val="dk1"/>
+            </a:solidFill>
+            <a:prstDash val="dash"/>
+            <a:round/>
+            <a:headEnd type="none" w="med" len="med"/>
+            <a:tailEnd type="none" w="med" len="med"/>
+          </a:ln>
+        </p:spPr>
+        <p:style>
+          <a:lnRef idx="0">
+            <a:scrgbClr r="0" g="0" b="0"/>
+          </a:lnRef>
+          <a:fillRef idx="0">
+            <a:scrgbClr r="0" g="0" b="0"/>
+          </a:fillRef>
+          <a:effectRef idx="0">
+            <a:scrgbClr r="0" g="0" b="0"/>
+          </a:effectRef>
+          <a:fontRef idx="minor">
+            <a:schemeClr val="dk1"/>
+          </a:fontRef>
+        </p:style>
+        <p:txBody>
+          <a:bodyPr wrap="square" rtlCol="0">
+            <a:spAutoFit/>
+          </a:bodyPr>
+          <a:lstStyle/>
+          <a:p>
+            <a:endParaRPr lang="en-US" noProof="0" dirty="0"/>
+          </a:p>
+        </p:txBody>
+      </p:sp>
+    </p:spTree>
+    <p:extLst>
+      <p:ext uri="{BB962C8B-B14F-4D97-AF65-F5344CB8AC3E}">
+        <p14:creationId xmlns:p14="http://schemas.microsoft.com/office/powerpoint/2010/main" val="1598568575"/>
+      </p:ext>
+    </p:extLst>
+  </p:cSld>
+  <p:clrMapOvr>
+    <a:masterClrMapping/>
+  </p:clrMapOvr>
 </p:sld>
 </file>
 
